--- a/propuesta-lucrecia-moreno.pptx
+++ b/propuesta-lucrecia-moreno.pptx
@@ -10697,7 +10697,7 @@
                 </a:solidFill>
                 <a:latin typeface="Georgia"/>
               </a:rPr>
-              <a:t>$500.000</a:t>
+              <a:t>$400.000</a:t>
             </a:r>
           </a:p>
         </p:txBody>
@@ -11243,7 +11243,7 @@
                 </a:solidFill>
                 <a:latin typeface="Segoe UI"/>
               </a:rPr>
-              <a:t>$400.000 de honorario + 15% sobre esas operaciones.</a:t>
+              <a:t>$300.000 de honorario + 15% sobre esas operaciones.</a:t>
             </a:r>
           </a:p>
         </p:txBody>

--- a/propuesta-lucrecia-moreno.pptx
+++ b/propuesta-lucrecia-moreno.pptx
@@ -16,7 +16,6 @@
     <p:sldId id="264" r:id="rId15"/>
     <p:sldId id="265" r:id="rId16"/>
     <p:sldId id="266" r:id="rId17"/>
-    <p:sldId id="267" r:id="rId18"/>
   </p:sldIdLst>
   <p:sldSz cx="12191695" cy="6858000" type="screen4x3"/>
   <p:notesSz cx="6858000" cy="9144000"/>
@@ -3350,7 +3349,7 @@
                 </a:solidFill>
                 <a:latin typeface="Georgia"/>
               </a:rPr>
-              <a:t>Más consultas para tu inmobiliaria</a:t>
+              <a:t>Más clientes para tu inmobiliaria</a:t>
             </a:r>
           </a:p>
         </p:txBody>
@@ -3609,7 +3608,7 @@
                 </a:solidFill>
                 <a:latin typeface="Segoe UI"/>
               </a:rPr>
-              <a:t>VAS A ESTAR AL TANTO</a:t>
+              <a:t>LA INVERSIÓN</a:t>
             </a:r>
           </a:p>
         </p:txBody>
@@ -3623,7 +3622,7 @@
         <p:spPr>
           <a:xfrm>
             <a:off x="822960" y="868680"/>
-            <a:ext cx="10058400" cy="1371600"/>
+            <a:ext cx="10424160" cy="1371600"/>
           </a:xfrm>
           <a:prstGeom prst="rect">
             <a:avLst/>
@@ -3654,7 +3653,7 @@
                 </a:solidFill>
                 <a:latin typeface="Georgia"/>
               </a:rPr>
-              <a:t>Un informe claro cada 15 días.</a:t>
+              <a:t>Todo esto, todos los meses.</a:t>
             </a:r>
           </a:p>
         </p:txBody>
@@ -3711,8 +3710,8 @@
         </p:nvSpPr>
         <p:spPr>
           <a:xfrm>
-            <a:off x="850392" y="2377440"/>
-            <a:ext cx="10058400" cy="548640"/>
+            <a:off x="850392" y="2331720"/>
+            <a:ext cx="5486400" cy="274320"/>
           </a:xfrm>
           <a:prstGeom prst="rect">
             <a:avLst/>
@@ -3737,74 +3736,29 @@
               </a:spcAft>
             </a:pPr>
             <a:r>
-              <a:rPr sz="2200" b="0" i="0">
-                <a:solidFill>
-                  <a:srgbClr val="26121D"/>
-                </a:solidFill>
-                <a:latin typeface="Georgia"/>
-              </a:rPr>
-              <a:t>Sin vueltas técnicas. Te muestro lo que importa:</a:t>
-            </a:r>
-          </a:p>
-        </p:txBody>
-      </p:sp>
-      <p:sp>
-        <p:nvSpPr>
-          <p:cNvPr id="6" name="TextBox 5"/>
-          <p:cNvSpPr txBox="1"/>
-          <p:nvPr/>
-        </p:nvSpPr>
-        <p:spPr>
-          <a:xfrm>
-            <a:off x="850392" y="3383280"/>
-            <a:ext cx="3108960" cy="640080"/>
-          </a:xfrm>
-          <a:prstGeom prst="rect">
-            <a:avLst/>
-          </a:prstGeom>
-          <a:noFill/>
-        </p:spPr>
-        <p:txBody>
-          <a:bodyPr wrap="square" anchor="t" lIns="0" rIns="0" tIns="0" bIns="0">
-            <a:spAutoFit/>
-          </a:bodyPr>
-          <a:lstStyle/>
-          <a:p>
-            <a:pPr algn="l">
-              <a:lnSpc>
-                <a:spcPct val="100000"/>
-              </a:lnSpc>
-              <a:spcBef>
-                <a:spcPts val="0"/>
-              </a:spcBef>
-              <a:spcAft>
-                <a:spcPts val="600"/>
-              </a:spcAft>
-            </a:pPr>
-            <a:r>
-              <a:rPr sz="3600" b="0" i="0">
-                <a:solidFill>
-                  <a:srgbClr val="3B1329"/>
-                </a:solidFill>
-                <a:latin typeface="Georgia"/>
-              </a:rPr>
-              <a:t>Consultas</a:t>
-            </a:r>
-          </a:p>
-        </p:txBody>
-      </p:sp>
-      <p:sp>
-        <p:nvSpPr>
-          <p:cNvPr id="7" name="Rectangle 6"/>
+              <a:rPr sz="1200" b="1" i="0" spc="120">
+                <a:solidFill>
+                  <a:srgbClr val="B02467"/>
+                </a:solidFill>
+                <a:latin typeface="Segoe UI"/>
+              </a:rPr>
+              <a:t>INCLUIDO EN EL TRABAJO</a:t>
+            </a:r>
+          </a:p>
+        </p:txBody>
+      </p:sp>
+      <p:sp>
+        <p:nvSpPr>
+          <p:cNvPr id="6" name="Oval 5"/>
           <p:cNvSpPr/>
           <p:nvPr/>
         </p:nvSpPr>
         <p:spPr>
           <a:xfrm>
-            <a:off x="850392" y="4114800"/>
-            <a:ext cx="320040" cy="38100"/>
-          </a:xfrm>
-          <a:prstGeom prst="rect">
+            <a:off x="850392" y="2788920"/>
+            <a:ext cx="237744" cy="237744"/>
+          </a:xfrm>
+          <a:prstGeom prst="ellipse">
             <a:avLst/>
           </a:prstGeom>
           <a:solidFill>
@@ -3830,23 +3784,31 @@
           </a:fontRef>
         </p:style>
         <p:txBody>
-          <a:bodyPr rtlCol="0" anchor="ctr"/>
+          <a:bodyPr rtlCol="0" anchor="ctr" tIns="0" bIns="0"/>
           <a:lstStyle/>
           <a:p>
             <a:pPr algn="ctr"/>
-          </a:p>
-        </p:txBody>
-      </p:sp>
-      <p:sp>
-        <p:nvSpPr>
-          <p:cNvPr id="8" name="TextBox 7"/>
-          <p:cNvSpPr txBox="1"/>
-          <p:nvPr/>
-        </p:nvSpPr>
-        <p:spPr>
-          <a:xfrm>
-            <a:off x="850392" y="4297680"/>
-            <a:ext cx="2926080" cy="548640"/>
+            <a:r>
+              <a:rPr sz="1100" b="1">
+                <a:solidFill>
+                  <a:srgbClr val="FFFFFF"/>
+                </a:solidFill>
+              </a:rPr>
+              <a:t>✓</a:t>
+            </a:r>
+          </a:p>
+        </p:txBody>
+      </p:sp>
+      <p:sp>
+        <p:nvSpPr>
+          <p:cNvPr id="7" name="TextBox 6"/>
+          <p:cNvSpPr txBox="1"/>
+          <p:nvPr/>
+        </p:nvSpPr>
+        <p:spPr>
+          <a:xfrm>
+            <a:off x="1234440" y="2793492"/>
+            <a:ext cx="4846320" cy="365760"/>
           </a:xfrm>
           <a:prstGeom prst="rect">
             <a:avLst/>
@@ -3861,7 +3823,7 @@
           <a:p>
             <a:pPr algn="l">
               <a:lnSpc>
-                <a:spcPct val="100000"/>
+                <a:spcPct val="105000"/>
               </a:lnSpc>
               <a:spcBef>
                 <a:spcPts val="0"/>
@@ -3873,72 +3835,27 @@
             <a:r>
               <a:rPr sz="1500" b="0" i="0">
                 <a:solidFill>
-                  <a:srgbClr val="7A6570"/>
+                  <a:srgbClr val="26121D"/>
                 </a:solidFill>
                 <a:latin typeface="Segoe UI"/>
               </a:rPr>
-              <a:t>cuántas llegaron</a:t>
-            </a:r>
-          </a:p>
-        </p:txBody>
-      </p:sp>
-      <p:sp>
-        <p:nvSpPr>
-          <p:cNvPr id="9" name="TextBox 8"/>
-          <p:cNvSpPr txBox="1"/>
-          <p:nvPr/>
-        </p:nvSpPr>
-        <p:spPr>
-          <a:xfrm>
-            <a:off x="4370832" y="3383280"/>
-            <a:ext cx="3108960" cy="640080"/>
-          </a:xfrm>
-          <a:prstGeom prst="rect">
-            <a:avLst/>
-          </a:prstGeom>
-          <a:noFill/>
-        </p:spPr>
-        <p:txBody>
-          <a:bodyPr wrap="square" anchor="t" lIns="0" rIns="0" tIns="0" bIns="0">
-            <a:spAutoFit/>
-          </a:bodyPr>
-          <a:lstStyle/>
-          <a:p>
-            <a:pPr algn="l">
-              <a:lnSpc>
-                <a:spcPct val="100000"/>
-              </a:lnSpc>
-              <a:spcBef>
-                <a:spcPts val="0"/>
-              </a:spcBef>
-              <a:spcAft>
-                <a:spcPts val="600"/>
-              </a:spcAft>
-            </a:pPr>
-            <a:r>
-              <a:rPr sz="3600" b="0" i="0">
-                <a:solidFill>
-                  <a:srgbClr val="3B1329"/>
-                </a:solidFill>
-                <a:latin typeface="Georgia"/>
-              </a:rPr>
-              <a:t>Costo</a:t>
-            </a:r>
-          </a:p>
-        </p:txBody>
-      </p:sp>
-      <p:sp>
-        <p:nvSpPr>
-          <p:cNvPr id="10" name="Rectangle 9"/>
+              <a:t>Estrategia y elección de las propiedades a promocionar</a:t>
+            </a:r>
+          </a:p>
+        </p:txBody>
+      </p:sp>
+      <p:sp>
+        <p:nvSpPr>
+          <p:cNvPr id="8" name="Oval 7"/>
           <p:cNvSpPr/>
           <p:nvPr/>
         </p:nvSpPr>
         <p:spPr>
           <a:xfrm>
-            <a:off x="4370832" y="4114800"/>
-            <a:ext cx="320040" cy="38100"/>
-          </a:xfrm>
-          <a:prstGeom prst="rect">
+            <a:off x="850392" y="3264408"/>
+            <a:ext cx="237744" cy="237744"/>
+          </a:xfrm>
+          <a:prstGeom prst="ellipse">
             <a:avLst/>
           </a:prstGeom>
           <a:solidFill>
@@ -3964,23 +3881,31 @@
           </a:fontRef>
         </p:style>
         <p:txBody>
-          <a:bodyPr rtlCol="0" anchor="ctr"/>
+          <a:bodyPr rtlCol="0" anchor="ctr" tIns="0" bIns="0"/>
           <a:lstStyle/>
           <a:p>
             <a:pPr algn="ctr"/>
-          </a:p>
-        </p:txBody>
-      </p:sp>
-      <p:sp>
-        <p:nvSpPr>
-          <p:cNvPr id="11" name="TextBox 10"/>
-          <p:cNvSpPr txBox="1"/>
-          <p:nvPr/>
-        </p:nvSpPr>
-        <p:spPr>
-          <a:xfrm>
-            <a:off x="4370832" y="4297680"/>
-            <a:ext cx="2926080" cy="548640"/>
+            <a:r>
+              <a:rPr sz="1100" b="1">
+                <a:solidFill>
+                  <a:srgbClr val="FFFFFF"/>
+                </a:solidFill>
+              </a:rPr>
+              <a:t>✓</a:t>
+            </a:r>
+          </a:p>
+        </p:txBody>
+      </p:sp>
+      <p:sp>
+        <p:nvSpPr>
+          <p:cNvPr id="9" name="TextBox 8"/>
+          <p:cNvSpPr txBox="1"/>
+          <p:nvPr/>
+        </p:nvSpPr>
+        <p:spPr>
+          <a:xfrm>
+            <a:off x="1234440" y="3268980"/>
+            <a:ext cx="4846320" cy="365760"/>
           </a:xfrm>
           <a:prstGeom prst="rect">
             <a:avLst/>
@@ -3995,7 +3920,7 @@
           <a:p>
             <a:pPr algn="l">
               <a:lnSpc>
-                <a:spcPct val="100000"/>
+                <a:spcPct val="105000"/>
               </a:lnSpc>
               <a:spcBef>
                 <a:spcPts val="0"/>
@@ -4007,72 +3932,27 @@
             <a:r>
               <a:rPr sz="1500" b="0" i="0">
                 <a:solidFill>
-                  <a:srgbClr val="7A6570"/>
+                  <a:srgbClr val="26121D"/>
                 </a:solidFill>
                 <a:latin typeface="Segoe UI"/>
               </a:rPr>
-              <a:t>cuánto costó cada una</a:t>
-            </a:r>
-          </a:p>
-        </p:txBody>
-      </p:sp>
-      <p:sp>
-        <p:nvSpPr>
-          <p:cNvPr id="12" name="TextBox 11"/>
-          <p:cNvSpPr txBox="1"/>
-          <p:nvPr/>
-        </p:nvSpPr>
-        <p:spPr>
-          <a:xfrm>
-            <a:off x="7891272" y="3383280"/>
-            <a:ext cx="3108960" cy="640080"/>
-          </a:xfrm>
-          <a:prstGeom prst="rect">
-            <a:avLst/>
-          </a:prstGeom>
-          <a:noFill/>
-        </p:spPr>
-        <p:txBody>
-          <a:bodyPr wrap="square" anchor="t" lIns="0" rIns="0" tIns="0" bIns="0">
-            <a:spAutoFit/>
-          </a:bodyPr>
-          <a:lstStyle/>
-          <a:p>
-            <a:pPr algn="l">
-              <a:lnSpc>
-                <a:spcPct val="100000"/>
-              </a:lnSpc>
-              <a:spcBef>
-                <a:spcPts val="0"/>
-              </a:spcBef>
-              <a:spcAft>
-                <a:spcPts val="600"/>
-              </a:spcAft>
-            </a:pPr>
-            <a:r>
-              <a:rPr sz="3600" b="0" i="0">
-                <a:solidFill>
-                  <a:srgbClr val="3B1329"/>
-                </a:solidFill>
-                <a:latin typeface="Georgia"/>
-              </a:rPr>
-              <a:t>Visitas</a:t>
-            </a:r>
-          </a:p>
-        </p:txBody>
-      </p:sp>
-      <p:sp>
-        <p:nvSpPr>
-          <p:cNvPr id="13" name="Rectangle 12"/>
+              <a:t>Campañas, creatividades y textos de los avisos</a:t>
+            </a:r>
+          </a:p>
+        </p:txBody>
+      </p:sp>
+      <p:sp>
+        <p:nvSpPr>
+          <p:cNvPr id="10" name="Oval 9"/>
           <p:cNvSpPr/>
           <p:nvPr/>
         </p:nvSpPr>
         <p:spPr>
           <a:xfrm>
-            <a:off x="7891272" y="4114800"/>
-            <a:ext cx="320040" cy="38100"/>
-          </a:xfrm>
-          <a:prstGeom prst="rect">
+            <a:off x="850392" y="3739896"/>
+            <a:ext cx="237744" cy="237744"/>
+          </a:xfrm>
+          <a:prstGeom prst="ellipse">
             <a:avLst/>
           </a:prstGeom>
           <a:solidFill>
@@ -4098,6 +3978,394 @@
           </a:fontRef>
         </p:style>
         <p:txBody>
+          <a:bodyPr rtlCol="0" anchor="ctr" tIns="0" bIns="0"/>
+          <a:lstStyle/>
+          <a:p>
+            <a:pPr algn="ctr"/>
+            <a:r>
+              <a:rPr sz="1100" b="1">
+                <a:solidFill>
+                  <a:srgbClr val="FFFFFF"/>
+                </a:solidFill>
+              </a:rPr>
+              <a:t>✓</a:t>
+            </a:r>
+          </a:p>
+        </p:txBody>
+      </p:sp>
+      <p:sp>
+        <p:nvSpPr>
+          <p:cNvPr id="11" name="TextBox 10"/>
+          <p:cNvSpPr txBox="1"/>
+          <p:nvPr/>
+        </p:nvSpPr>
+        <p:spPr>
+          <a:xfrm>
+            <a:off x="1234440" y="3744468"/>
+            <a:ext cx="4846320" cy="365760"/>
+          </a:xfrm>
+          <a:prstGeom prst="rect">
+            <a:avLst/>
+          </a:prstGeom>
+          <a:noFill/>
+        </p:spPr>
+        <p:txBody>
+          <a:bodyPr wrap="square" anchor="t" lIns="0" rIns="0" tIns="0" bIns="0">
+            <a:spAutoFit/>
+          </a:bodyPr>
+          <a:lstStyle/>
+          <a:p>
+            <a:pPr algn="l">
+              <a:lnSpc>
+                <a:spcPct val="105000"/>
+              </a:lnSpc>
+              <a:spcBef>
+                <a:spcPts val="0"/>
+              </a:spcBef>
+              <a:spcAft>
+                <a:spcPts val="600"/>
+              </a:spcAft>
+            </a:pPr>
+            <a:r>
+              <a:rPr sz="1500" b="0" i="0">
+                <a:solidFill>
+                  <a:srgbClr val="26121D"/>
+                </a:solidFill>
+                <a:latin typeface="Segoe UI"/>
+              </a:rPr>
+              <a:t>Formulario y WhatsApp que capturan el pedido del cliente</a:t>
+            </a:r>
+          </a:p>
+        </p:txBody>
+      </p:sp>
+      <p:sp>
+        <p:nvSpPr>
+          <p:cNvPr id="12" name="Oval 11"/>
+          <p:cNvSpPr/>
+          <p:nvPr/>
+        </p:nvSpPr>
+        <p:spPr>
+          <a:xfrm>
+            <a:off x="850392" y="4215384"/>
+            <a:ext cx="237744" cy="237744"/>
+          </a:xfrm>
+          <a:prstGeom prst="ellipse">
+            <a:avLst/>
+          </a:prstGeom>
+          <a:solidFill>
+            <a:srgbClr val="E84A9C"/>
+          </a:solidFill>
+          <a:ln>
+            <a:noFill/>
+          </a:ln>
+          <a:effectLst/>
+        </p:spPr>
+        <p:style>
+          <a:lnRef idx="1">
+            <a:schemeClr val="accent1"/>
+          </a:lnRef>
+          <a:fillRef idx="3">
+            <a:schemeClr val="accent1"/>
+          </a:fillRef>
+          <a:effectRef idx="2">
+            <a:schemeClr val="accent1"/>
+          </a:effectRef>
+          <a:fontRef idx="minor">
+            <a:schemeClr val="lt1"/>
+          </a:fontRef>
+        </p:style>
+        <p:txBody>
+          <a:bodyPr rtlCol="0" anchor="ctr" tIns="0" bIns="0"/>
+          <a:lstStyle/>
+          <a:p>
+            <a:pPr algn="ctr"/>
+            <a:r>
+              <a:rPr sz="1100" b="1">
+                <a:solidFill>
+                  <a:srgbClr val="FFFFFF"/>
+                </a:solidFill>
+              </a:rPr>
+              <a:t>✓</a:t>
+            </a:r>
+          </a:p>
+        </p:txBody>
+      </p:sp>
+      <p:sp>
+        <p:nvSpPr>
+          <p:cNvPr id="13" name="TextBox 12"/>
+          <p:cNvSpPr txBox="1"/>
+          <p:nvPr/>
+        </p:nvSpPr>
+        <p:spPr>
+          <a:xfrm>
+            <a:off x="1234440" y="4219956"/>
+            <a:ext cx="4846320" cy="365760"/>
+          </a:xfrm>
+          <a:prstGeom prst="rect">
+            <a:avLst/>
+          </a:prstGeom>
+          <a:noFill/>
+        </p:spPr>
+        <p:txBody>
+          <a:bodyPr wrap="square" anchor="t" lIns="0" rIns="0" tIns="0" bIns="0">
+            <a:spAutoFit/>
+          </a:bodyPr>
+          <a:lstStyle/>
+          <a:p>
+            <a:pPr algn="l">
+              <a:lnSpc>
+                <a:spcPct val="105000"/>
+              </a:lnSpc>
+              <a:spcBef>
+                <a:spcPts val="0"/>
+              </a:spcBef>
+              <a:spcAft>
+                <a:spcPts val="600"/>
+              </a:spcAft>
+            </a:pPr>
+            <a:r>
+              <a:rPr sz="1500" b="0" i="0">
+                <a:solidFill>
+                  <a:srgbClr val="26121D"/>
+                </a:solidFill>
+                <a:latin typeface="Segoe UI"/>
+              </a:rPr>
+              <a:t>Optimización semanal de la pauta</a:t>
+            </a:r>
+          </a:p>
+        </p:txBody>
+      </p:sp>
+      <p:sp>
+        <p:nvSpPr>
+          <p:cNvPr id="14" name="Oval 13"/>
+          <p:cNvSpPr/>
+          <p:nvPr/>
+        </p:nvSpPr>
+        <p:spPr>
+          <a:xfrm>
+            <a:off x="850392" y="4690872"/>
+            <a:ext cx="237744" cy="237744"/>
+          </a:xfrm>
+          <a:prstGeom prst="ellipse">
+            <a:avLst/>
+          </a:prstGeom>
+          <a:solidFill>
+            <a:srgbClr val="E84A9C"/>
+          </a:solidFill>
+          <a:ln>
+            <a:noFill/>
+          </a:ln>
+          <a:effectLst/>
+        </p:spPr>
+        <p:style>
+          <a:lnRef idx="1">
+            <a:schemeClr val="accent1"/>
+          </a:lnRef>
+          <a:fillRef idx="3">
+            <a:schemeClr val="accent1"/>
+          </a:fillRef>
+          <a:effectRef idx="2">
+            <a:schemeClr val="accent1"/>
+          </a:effectRef>
+          <a:fontRef idx="minor">
+            <a:schemeClr val="lt1"/>
+          </a:fontRef>
+        </p:style>
+        <p:txBody>
+          <a:bodyPr rtlCol="0" anchor="ctr" tIns="0" bIns="0"/>
+          <a:lstStyle/>
+          <a:p>
+            <a:pPr algn="ctr"/>
+            <a:r>
+              <a:rPr sz="1100" b="1">
+                <a:solidFill>
+                  <a:srgbClr val="FFFFFF"/>
+                </a:solidFill>
+              </a:rPr>
+              <a:t>✓</a:t>
+            </a:r>
+          </a:p>
+        </p:txBody>
+      </p:sp>
+      <p:sp>
+        <p:nvSpPr>
+          <p:cNvPr id="15" name="TextBox 14"/>
+          <p:cNvSpPr txBox="1"/>
+          <p:nvPr/>
+        </p:nvSpPr>
+        <p:spPr>
+          <a:xfrm>
+            <a:off x="1234440" y="4695444"/>
+            <a:ext cx="4846320" cy="365760"/>
+          </a:xfrm>
+          <a:prstGeom prst="rect">
+            <a:avLst/>
+          </a:prstGeom>
+          <a:noFill/>
+        </p:spPr>
+        <p:txBody>
+          <a:bodyPr wrap="square" anchor="t" lIns="0" rIns="0" tIns="0" bIns="0">
+            <a:spAutoFit/>
+          </a:bodyPr>
+          <a:lstStyle/>
+          <a:p>
+            <a:pPr algn="l">
+              <a:lnSpc>
+                <a:spcPct val="105000"/>
+              </a:lnSpc>
+              <a:spcBef>
+                <a:spcPts val="0"/>
+              </a:spcBef>
+              <a:spcAft>
+                <a:spcPts val="600"/>
+              </a:spcAft>
+            </a:pPr>
+            <a:r>
+              <a:rPr sz="1500" b="0" i="0">
+                <a:solidFill>
+                  <a:srgbClr val="26121D"/>
+                </a:solidFill>
+                <a:latin typeface="Segoe UI"/>
+              </a:rPr>
+              <a:t>Orden del proceso de respuesta y seguimiento</a:t>
+            </a:r>
+          </a:p>
+        </p:txBody>
+      </p:sp>
+      <p:sp>
+        <p:nvSpPr>
+          <p:cNvPr id="16" name="Oval 15"/>
+          <p:cNvSpPr/>
+          <p:nvPr/>
+        </p:nvSpPr>
+        <p:spPr>
+          <a:xfrm>
+            <a:off x="850392" y="5166360"/>
+            <a:ext cx="237744" cy="237744"/>
+          </a:xfrm>
+          <a:prstGeom prst="ellipse">
+            <a:avLst/>
+          </a:prstGeom>
+          <a:solidFill>
+            <a:srgbClr val="E84A9C"/>
+          </a:solidFill>
+          <a:ln>
+            <a:noFill/>
+          </a:ln>
+          <a:effectLst/>
+        </p:spPr>
+        <p:style>
+          <a:lnRef idx="1">
+            <a:schemeClr val="accent1"/>
+          </a:lnRef>
+          <a:fillRef idx="3">
+            <a:schemeClr val="accent1"/>
+          </a:fillRef>
+          <a:effectRef idx="2">
+            <a:schemeClr val="accent1"/>
+          </a:effectRef>
+          <a:fontRef idx="minor">
+            <a:schemeClr val="lt1"/>
+          </a:fontRef>
+        </p:style>
+        <p:txBody>
+          <a:bodyPr rtlCol="0" anchor="ctr" tIns="0" bIns="0"/>
+          <a:lstStyle/>
+          <a:p>
+            <a:pPr algn="ctr"/>
+            <a:r>
+              <a:rPr sz="1100" b="1">
+                <a:solidFill>
+                  <a:srgbClr val="FFFFFF"/>
+                </a:solidFill>
+              </a:rPr>
+              <a:t>✓</a:t>
+            </a:r>
+          </a:p>
+        </p:txBody>
+      </p:sp>
+      <p:sp>
+        <p:nvSpPr>
+          <p:cNvPr id="17" name="TextBox 16"/>
+          <p:cNvSpPr txBox="1"/>
+          <p:nvPr/>
+        </p:nvSpPr>
+        <p:spPr>
+          <a:xfrm>
+            <a:off x="1234440" y="5170932"/>
+            <a:ext cx="4846320" cy="365760"/>
+          </a:xfrm>
+          <a:prstGeom prst="rect">
+            <a:avLst/>
+          </a:prstGeom>
+          <a:noFill/>
+        </p:spPr>
+        <p:txBody>
+          <a:bodyPr wrap="square" anchor="t" lIns="0" rIns="0" tIns="0" bIns="0">
+            <a:spAutoFit/>
+          </a:bodyPr>
+          <a:lstStyle/>
+          <a:p>
+            <a:pPr algn="l">
+              <a:lnSpc>
+                <a:spcPct val="105000"/>
+              </a:lnSpc>
+              <a:spcBef>
+                <a:spcPts val="0"/>
+              </a:spcBef>
+              <a:spcAft>
+                <a:spcPts val="600"/>
+              </a:spcAft>
+            </a:pPr>
+            <a:r>
+              <a:rPr sz="1500" b="0" i="0">
+                <a:solidFill>
+                  <a:srgbClr val="26121D"/>
+                </a:solidFill>
+                <a:latin typeface="Segoe UI"/>
+              </a:rPr>
+              <a:t>Informe claro cada 15 días</a:t>
+            </a:r>
+          </a:p>
+        </p:txBody>
+      </p:sp>
+      <p:sp>
+        <p:nvSpPr>
+          <p:cNvPr id="18" name="Rounded Rectangle 17"/>
+          <p:cNvSpPr/>
+          <p:nvPr/>
+        </p:nvSpPr>
+        <p:spPr>
+          <a:xfrm>
+            <a:off x="6583680" y="2331720"/>
+            <a:ext cx="4754880" cy="2468880"/>
+          </a:xfrm>
+          <a:prstGeom prst="roundRect">
+            <a:avLst/>
+          </a:prstGeom>
+          <a:solidFill>
+            <a:srgbClr val="FBEEF4"/>
+          </a:solidFill>
+          <a:ln>
+            <a:noFill/>
+          </a:ln>
+          <a:effectLst/>
+        </p:spPr>
+        <p:style>
+          <a:lnRef idx="1">
+            <a:schemeClr val="accent1"/>
+          </a:lnRef>
+          <a:fillRef idx="3">
+            <a:schemeClr val="accent1"/>
+          </a:fillRef>
+          <a:effectRef idx="2">
+            <a:schemeClr val="accent1"/>
+          </a:effectRef>
+          <a:fontRef idx="minor">
+            <a:schemeClr val="lt1"/>
+          </a:fontRef>
+        </p:style>
+        <p:txBody>
           <a:bodyPr rtlCol="0" anchor="ctr"/>
           <a:lstStyle/>
           <a:p>
@@ -4107,14 +4375,14 @@
       </p:sp>
       <p:sp>
         <p:nvSpPr>
-          <p:cNvPr id="14" name="TextBox 13"/>
-          <p:cNvSpPr txBox="1"/>
-          <p:nvPr/>
-        </p:nvSpPr>
-        <p:spPr>
-          <a:xfrm>
-            <a:off x="7891272" y="4297680"/>
-            <a:ext cx="2926080" cy="548640"/>
+          <p:cNvPr id="19" name="TextBox 18"/>
+          <p:cNvSpPr txBox="1"/>
+          <p:nvPr/>
+        </p:nvSpPr>
+        <p:spPr>
+          <a:xfrm>
+            <a:off x="6858000" y="2560320"/>
+            <a:ext cx="2743200" cy="365760"/>
           </a:xfrm>
           <a:prstGeom prst="rect">
             <a:avLst/>
@@ -4141,25 +4409,70 @@
             <a:r>
               <a:rPr sz="1500" b="0" i="0">
                 <a:solidFill>
-                  <a:srgbClr val="7A6570"/>
+                  <a:srgbClr val="26121D"/>
                 </a:solidFill>
                 <a:latin typeface="Segoe UI"/>
               </a:rPr>
-              <a:t>cuántas se concretaron</a:t>
-            </a:r>
-          </a:p>
-        </p:txBody>
-      </p:sp>
-      <p:sp>
-        <p:nvSpPr>
-          <p:cNvPr id="15" name="Rectangle 14"/>
+              <a:t>Mi honorario mensual</a:t>
+            </a:r>
+          </a:p>
+        </p:txBody>
+      </p:sp>
+      <p:sp>
+        <p:nvSpPr>
+          <p:cNvPr id="20" name="TextBox 19"/>
+          <p:cNvSpPr txBox="1"/>
+          <p:nvPr/>
+        </p:nvSpPr>
+        <p:spPr>
+          <a:xfrm>
+            <a:off x="9509760" y="2560320"/>
+            <a:ext cx="1554480" cy="365760"/>
+          </a:xfrm>
+          <a:prstGeom prst="rect">
+            <a:avLst/>
+          </a:prstGeom>
+          <a:noFill/>
+        </p:spPr>
+        <p:txBody>
+          <a:bodyPr wrap="square" anchor="t" lIns="0" rIns="0" tIns="0" bIns="0">
+            <a:spAutoFit/>
+          </a:bodyPr>
+          <a:lstStyle/>
+          <a:p>
+            <a:pPr algn="r">
+              <a:lnSpc>
+                <a:spcPct val="100000"/>
+              </a:lnSpc>
+              <a:spcBef>
+                <a:spcPts val="0"/>
+              </a:spcBef>
+              <a:spcAft>
+                <a:spcPts val="600"/>
+              </a:spcAft>
+            </a:pPr>
+            <a:r>
+              <a:rPr sz="2100" b="1" i="0">
+                <a:solidFill>
+                  <a:srgbClr val="3B1329"/>
+                </a:solidFill>
+                <a:latin typeface="Georgia"/>
+              </a:rPr>
+              <a:t>$400.000</a:t>
+            </a:r>
+          </a:p>
+        </p:txBody>
+      </p:sp>
+      <p:sp>
+        <p:nvSpPr>
+          <p:cNvPr id="21" name="Rectangle 20"/>
           <p:cNvSpPr/>
           <p:nvPr/>
         </p:nvSpPr>
         <p:spPr>
           <a:xfrm>
-            <a:off x="822960" y="6355080"/>
-            <a:ext cx="10543032" cy="12700"/>
+            <a:off x="6858000" y="3163824"/>
+            <a:ext cx="4206240" cy="12700"/>
           </a:xfrm>
           <a:prstGeom prst="rect">
             <a:avLst/>
@@ -4196,7 +4509,473 @@
       </p:sp>
       <p:sp>
         <p:nvSpPr>
-          <p:cNvPr id="16" name="TextBox 15"/>
+          <p:cNvPr id="22" name="TextBox 21"/>
+          <p:cNvSpPr txBox="1"/>
+          <p:nvPr/>
+        </p:nvSpPr>
+        <p:spPr>
+          <a:xfrm>
+            <a:off x="6858000" y="3291840"/>
+            <a:ext cx="2743200" cy="365760"/>
+          </a:xfrm>
+          <a:prstGeom prst="rect">
+            <a:avLst/>
+          </a:prstGeom>
+          <a:noFill/>
+        </p:spPr>
+        <p:txBody>
+          <a:bodyPr wrap="square" anchor="t" lIns="0" rIns="0" tIns="0" bIns="0">
+            <a:spAutoFit/>
+          </a:bodyPr>
+          <a:lstStyle/>
+          <a:p>
+            <a:pPr algn="l">
+              <a:lnSpc>
+                <a:spcPct val="100000"/>
+              </a:lnSpc>
+              <a:spcBef>
+                <a:spcPts val="0"/>
+              </a:spcBef>
+              <a:spcAft>
+                <a:spcPts val="600"/>
+              </a:spcAft>
+            </a:pPr>
+            <a:r>
+              <a:rPr sz="1500" b="0" i="0">
+                <a:solidFill>
+                  <a:srgbClr val="26121D"/>
+                </a:solidFill>
+                <a:latin typeface="Segoe UI"/>
+              </a:rPr>
+              <a:t>Publicidad</a:t>
+            </a:r>
+          </a:p>
+        </p:txBody>
+      </p:sp>
+      <p:sp>
+        <p:nvSpPr>
+          <p:cNvPr id="23" name="TextBox 22"/>
+          <p:cNvSpPr txBox="1"/>
+          <p:nvPr/>
+        </p:nvSpPr>
+        <p:spPr>
+          <a:xfrm>
+            <a:off x="6858000" y="3602736"/>
+            <a:ext cx="2926080" cy="274320"/>
+          </a:xfrm>
+          <a:prstGeom prst="rect">
+            <a:avLst/>
+          </a:prstGeom>
+          <a:noFill/>
+        </p:spPr>
+        <p:txBody>
+          <a:bodyPr wrap="square" anchor="t" lIns="0" rIns="0" tIns="0" bIns="0">
+            <a:spAutoFit/>
+          </a:bodyPr>
+          <a:lstStyle/>
+          <a:p>
+            <a:pPr algn="l">
+              <a:lnSpc>
+                <a:spcPct val="100000"/>
+              </a:lnSpc>
+              <a:spcBef>
+                <a:spcPts val="0"/>
+              </a:spcBef>
+              <a:spcAft>
+                <a:spcPts val="600"/>
+              </a:spcAft>
+            </a:pPr>
+            <a:r>
+              <a:rPr sz="1000" b="0" i="0">
+                <a:solidFill>
+                  <a:srgbClr val="7A6570"/>
+                </a:solidFill>
+                <a:latin typeface="Segoe UI"/>
+              </a:rPr>
+              <a:t>la pagás vos, va directo a Facebook</a:t>
+            </a:r>
+          </a:p>
+        </p:txBody>
+      </p:sp>
+      <p:sp>
+        <p:nvSpPr>
+          <p:cNvPr id="24" name="TextBox 23"/>
+          <p:cNvSpPr txBox="1"/>
+          <p:nvPr/>
+        </p:nvSpPr>
+        <p:spPr>
+          <a:xfrm>
+            <a:off x="9509760" y="3291840"/>
+            <a:ext cx="1554480" cy="365760"/>
+          </a:xfrm>
+          <a:prstGeom prst="rect">
+            <a:avLst/>
+          </a:prstGeom>
+          <a:noFill/>
+        </p:spPr>
+        <p:txBody>
+          <a:bodyPr wrap="square" anchor="t" lIns="0" rIns="0" tIns="0" bIns="0">
+            <a:spAutoFit/>
+          </a:bodyPr>
+          <a:lstStyle/>
+          <a:p>
+            <a:pPr algn="r">
+              <a:lnSpc>
+                <a:spcPct val="100000"/>
+              </a:lnSpc>
+              <a:spcBef>
+                <a:spcPts val="0"/>
+              </a:spcBef>
+              <a:spcAft>
+                <a:spcPts val="600"/>
+              </a:spcAft>
+            </a:pPr>
+            <a:r>
+              <a:rPr sz="2100" b="1" i="0">
+                <a:solidFill>
+                  <a:srgbClr val="3B1329"/>
+                </a:solidFill>
+                <a:latin typeface="Georgia"/>
+              </a:rPr>
+              <a:t>$300.000</a:t>
+            </a:r>
+          </a:p>
+        </p:txBody>
+      </p:sp>
+      <p:sp>
+        <p:nvSpPr>
+          <p:cNvPr id="25" name="Rectangle 24"/>
+          <p:cNvSpPr/>
+          <p:nvPr/>
+        </p:nvSpPr>
+        <p:spPr>
+          <a:xfrm>
+            <a:off x="6858000" y="3895344"/>
+            <a:ext cx="4206240" cy="12700"/>
+          </a:xfrm>
+          <a:prstGeom prst="rect">
+            <a:avLst/>
+          </a:prstGeom>
+          <a:solidFill>
+            <a:srgbClr val="F0D9E5"/>
+          </a:solidFill>
+          <a:ln>
+            <a:noFill/>
+          </a:ln>
+          <a:effectLst/>
+        </p:spPr>
+        <p:style>
+          <a:lnRef idx="1">
+            <a:schemeClr val="accent1"/>
+          </a:lnRef>
+          <a:fillRef idx="3">
+            <a:schemeClr val="accent1"/>
+          </a:fillRef>
+          <a:effectRef idx="2">
+            <a:schemeClr val="accent1"/>
+          </a:effectRef>
+          <a:fontRef idx="minor">
+            <a:schemeClr val="lt1"/>
+          </a:fontRef>
+        </p:style>
+        <p:txBody>
+          <a:bodyPr rtlCol="0" anchor="ctr"/>
+          <a:lstStyle/>
+          <a:p>
+            <a:pPr algn="ctr"/>
+          </a:p>
+        </p:txBody>
+      </p:sp>
+      <p:sp>
+        <p:nvSpPr>
+          <p:cNvPr id="26" name="TextBox 25"/>
+          <p:cNvSpPr txBox="1"/>
+          <p:nvPr/>
+        </p:nvSpPr>
+        <p:spPr>
+          <a:xfrm>
+            <a:off x="6858000" y="4023360"/>
+            <a:ext cx="2743200" cy="365760"/>
+          </a:xfrm>
+          <a:prstGeom prst="rect">
+            <a:avLst/>
+          </a:prstGeom>
+          <a:noFill/>
+        </p:spPr>
+        <p:txBody>
+          <a:bodyPr wrap="square" anchor="t" lIns="0" rIns="0" tIns="0" bIns="0">
+            <a:spAutoFit/>
+          </a:bodyPr>
+          <a:lstStyle/>
+          <a:p>
+            <a:pPr algn="l">
+              <a:lnSpc>
+                <a:spcPct val="100000"/>
+              </a:lnSpc>
+              <a:spcBef>
+                <a:spcPts val="0"/>
+              </a:spcBef>
+              <a:spcAft>
+                <a:spcPts val="600"/>
+              </a:spcAft>
+            </a:pPr>
+            <a:r>
+              <a:rPr sz="1500" b="0" i="0">
+                <a:solidFill>
+                  <a:srgbClr val="26121D"/>
+                </a:solidFill>
+                <a:latin typeface="Segoe UI"/>
+              </a:rPr>
+              <a:t>Comisión sobre operaciones</a:t>
+            </a:r>
+          </a:p>
+        </p:txBody>
+      </p:sp>
+      <p:sp>
+        <p:nvSpPr>
+          <p:cNvPr id="27" name="TextBox 26"/>
+          <p:cNvSpPr txBox="1"/>
+          <p:nvPr/>
+        </p:nvSpPr>
+        <p:spPr>
+          <a:xfrm>
+            <a:off x="6858000" y="4334256"/>
+            <a:ext cx="2926080" cy="274320"/>
+          </a:xfrm>
+          <a:prstGeom prst="rect">
+            <a:avLst/>
+          </a:prstGeom>
+          <a:noFill/>
+        </p:spPr>
+        <p:txBody>
+          <a:bodyPr wrap="square" anchor="t" lIns="0" rIns="0" tIns="0" bIns="0">
+            <a:spAutoFit/>
+          </a:bodyPr>
+          <a:lstStyle/>
+          <a:p>
+            <a:pPr algn="l">
+              <a:lnSpc>
+                <a:spcPct val="100000"/>
+              </a:lnSpc>
+              <a:spcBef>
+                <a:spcPts val="0"/>
+              </a:spcBef>
+              <a:spcAft>
+                <a:spcPts val="600"/>
+              </a:spcAft>
+            </a:pPr>
+            <a:r>
+              <a:rPr sz="1000" b="0" i="0">
+                <a:solidFill>
+                  <a:srgbClr val="7A6570"/>
+                </a:solidFill>
+                <a:latin typeface="Segoe UI"/>
+              </a:rPr>
+              <a:t>solo de las que salen de este trabajo</a:t>
+            </a:r>
+          </a:p>
+        </p:txBody>
+      </p:sp>
+      <p:sp>
+        <p:nvSpPr>
+          <p:cNvPr id="28" name="TextBox 27"/>
+          <p:cNvSpPr txBox="1"/>
+          <p:nvPr/>
+        </p:nvSpPr>
+        <p:spPr>
+          <a:xfrm>
+            <a:off x="9509760" y="4023360"/>
+            <a:ext cx="1554480" cy="365760"/>
+          </a:xfrm>
+          <a:prstGeom prst="rect">
+            <a:avLst/>
+          </a:prstGeom>
+          <a:noFill/>
+        </p:spPr>
+        <p:txBody>
+          <a:bodyPr wrap="square" anchor="t" lIns="0" rIns="0" tIns="0" bIns="0">
+            <a:spAutoFit/>
+          </a:bodyPr>
+          <a:lstStyle/>
+          <a:p>
+            <a:pPr algn="r">
+              <a:lnSpc>
+                <a:spcPct val="100000"/>
+              </a:lnSpc>
+              <a:spcBef>
+                <a:spcPts val="0"/>
+              </a:spcBef>
+              <a:spcAft>
+                <a:spcPts val="600"/>
+              </a:spcAft>
+            </a:pPr>
+            <a:r>
+              <a:rPr sz="2100" b="1" i="0">
+                <a:solidFill>
+                  <a:srgbClr val="B02467"/>
+                </a:solidFill>
+                <a:latin typeface="Georgia"/>
+              </a:rPr>
+              <a:t>10%</a:t>
+            </a:r>
+          </a:p>
+        </p:txBody>
+      </p:sp>
+      <p:sp>
+        <p:nvSpPr>
+          <p:cNvPr id="29" name="TextBox 28"/>
+          <p:cNvSpPr txBox="1"/>
+          <p:nvPr/>
+        </p:nvSpPr>
+        <p:spPr>
+          <a:xfrm>
+            <a:off x="6583680" y="4983480"/>
+            <a:ext cx="4846320" cy="731520"/>
+          </a:xfrm>
+          <a:prstGeom prst="rect">
+            <a:avLst/>
+          </a:prstGeom>
+          <a:noFill/>
+        </p:spPr>
+        <p:txBody>
+          <a:bodyPr wrap="square" anchor="t" lIns="0" rIns="0" tIns="0" bIns="0">
+            <a:spAutoFit/>
+          </a:bodyPr>
+          <a:lstStyle/>
+          <a:p>
+            <a:pPr algn="l">
+              <a:lnSpc>
+                <a:spcPct val="112000"/>
+              </a:lnSpc>
+              <a:spcBef>
+                <a:spcPts val="0"/>
+              </a:spcBef>
+              <a:spcAft>
+                <a:spcPts val="600"/>
+              </a:spcAft>
+            </a:pPr>
+            <a:r>
+              <a:rPr sz="2000" b="0" i="0">
+                <a:solidFill>
+                  <a:srgbClr val="3B1329"/>
+                </a:solidFill>
+                <a:latin typeface="Georgia"/>
+              </a:rPr>
+              <a:t>Una sola operación cubre más de medio año de trabajo.</a:t>
+            </a:r>
+          </a:p>
+        </p:txBody>
+      </p:sp>
+      <p:sp>
+        <p:nvSpPr>
+          <p:cNvPr id="30" name="TextBox 29"/>
+          <p:cNvSpPr txBox="1"/>
+          <p:nvPr/>
+        </p:nvSpPr>
+        <p:spPr>
+          <a:xfrm>
+            <a:off x="6583680" y="5715000"/>
+            <a:ext cx="4846320" cy="548640"/>
+          </a:xfrm>
+          <a:prstGeom prst="rect">
+            <a:avLst/>
+          </a:prstGeom>
+          <a:noFill/>
+        </p:spPr>
+        <p:txBody>
+          <a:bodyPr wrap="square" anchor="t" lIns="0" rIns="0" tIns="0" bIns="0">
+            <a:spAutoFit/>
+          </a:bodyPr>
+          <a:lstStyle/>
+          <a:p>
+            <a:pPr algn="l">
+              <a:lnSpc>
+                <a:spcPct val="120000"/>
+              </a:lnSpc>
+              <a:spcBef>
+                <a:spcPts val="0"/>
+              </a:spcBef>
+              <a:spcAft>
+                <a:spcPts val="600"/>
+              </a:spcAft>
+            </a:pPr>
+            <a:r>
+              <a:rPr sz="1100" b="0" i="0">
+                <a:solidFill>
+                  <a:srgbClr val="7A6570"/>
+                </a:solidFill>
+                <a:latin typeface="Segoe UI"/>
+              </a:rPr>
+              <a:t>El 10% se cobra solo sobre ventas y alquileres de este sistema. </a:t>
+            </a:r>
+            <a:r>
+              <a:rPr sz="1100" b="1" i="0">
+                <a:solidFill>
+                  <a:srgbClr val="B02467"/>
+                </a:solidFill>
+                <a:latin typeface="Segoe UI"/>
+              </a:rPr>
+              <a:t>Otra opción: </a:t>
+            </a:r>
+            <a:r>
+              <a:rPr sz="1100" b="0" i="0">
+                <a:solidFill>
+                  <a:srgbClr val="7A6570"/>
+                </a:solidFill>
+                <a:latin typeface="Segoe UI"/>
+              </a:rPr>
+              <a:t>$300.000 + 15%.</a:t>
+            </a:r>
+          </a:p>
+        </p:txBody>
+      </p:sp>
+      <p:sp>
+        <p:nvSpPr>
+          <p:cNvPr id="31" name="Rectangle 30"/>
+          <p:cNvSpPr/>
+          <p:nvPr/>
+        </p:nvSpPr>
+        <p:spPr>
+          <a:xfrm>
+            <a:off x="822960" y="6355080"/>
+            <a:ext cx="10543032" cy="12700"/>
+          </a:xfrm>
+          <a:prstGeom prst="rect">
+            <a:avLst/>
+          </a:prstGeom>
+          <a:solidFill>
+            <a:srgbClr val="F0D9E5"/>
+          </a:solidFill>
+          <a:ln>
+            <a:noFill/>
+          </a:ln>
+          <a:effectLst/>
+        </p:spPr>
+        <p:style>
+          <a:lnRef idx="1">
+            <a:schemeClr val="accent1"/>
+          </a:lnRef>
+          <a:fillRef idx="3">
+            <a:schemeClr val="accent1"/>
+          </a:fillRef>
+          <a:effectRef idx="2">
+            <a:schemeClr val="accent1"/>
+          </a:effectRef>
+          <a:fontRef idx="minor">
+            <a:schemeClr val="lt1"/>
+          </a:fontRef>
+        </p:style>
+        <p:txBody>
+          <a:bodyPr rtlCol="0" anchor="ctr"/>
+          <a:lstStyle/>
+          <a:p>
+            <a:pPr algn="ctr"/>
+          </a:p>
+        </p:txBody>
+      </p:sp>
+      <p:sp>
+        <p:nvSpPr>
+          <p:cNvPr id="32" name="TextBox 31"/>
           <p:cNvSpPr txBox="1"/>
           <p:nvPr/>
         </p:nvSpPr>
@@ -4241,7 +5020,7 @@
       </p:sp>
       <p:sp>
         <p:nvSpPr>
-          <p:cNvPr id="17" name="TextBox 16"/>
+          <p:cNvPr id="33" name="TextBox 32"/>
           <p:cNvSpPr txBox="1"/>
           <p:nvPr/>
         </p:nvSpPr>
@@ -4279,14 +5058,14 @@
                 </a:solidFill>
                 <a:latin typeface="Segoe UI"/>
               </a:rPr>
-              <a:t>PROPUESTA · LUCRECIA MORENO NEGOCIOS INMOBILIARIOS</a:t>
-            </a:r>
-          </a:p>
-        </p:txBody>
-      </p:sp>
-      <p:sp>
-        <p:nvSpPr>
-          <p:cNvPr id="18" name="TextBox 17"/>
+              <a:t>COMPROMISO INICIAL DE 90 DÍAS</a:t>
+            </a:r>
+          </a:p>
+        </p:txBody>
+      </p:sp>
+      <p:sp>
+        <p:nvSpPr>
+          <p:cNvPr id="34" name="TextBox 33"/>
           <p:cNvSpPr txBox="1"/>
           <p:nvPr/>
         </p:nvSpPr>
@@ -4324,7 +5103,7 @@
                 </a:solidFill>
                 <a:latin typeface="Segoe UI"/>
               </a:rPr>
-              <a:t>10 / 12</a:t>
+              <a:t>10 / 11</a:t>
             </a:r>
           </a:p>
         </p:txBody>
@@ -4338,771 +5117,6 @@
 </file>
 
 <file path=ppt/slides/slide11.xml><?xml version="1.0" encoding="utf-8"?>
-<p:sld xmlns:a="http://schemas.openxmlformats.org/drawingml/2006/main" xmlns:p="http://schemas.openxmlformats.org/presentationml/2006/main" xmlns:r="http://schemas.openxmlformats.org/officeDocument/2006/relationships">
-  <p:cSld>
-    <p:bg>
-      <p:bgPr>
-        <a:solidFill>
-          <a:srgbClr val="FFFFFF"/>
-        </a:solidFill>
-        <a:effectLst/>
-      </p:bgPr>
-    </p:bg>
-    <p:spTree>
-      <p:nvGrpSpPr>
-        <p:cNvPr id="1" name=""/>
-        <p:cNvGrpSpPr/>
-        <p:nvPr/>
-      </p:nvGrpSpPr>
-      <p:grpSpPr/>
-      <p:sp>
-        <p:nvSpPr>
-          <p:cNvPr id="2" name="TextBox 1"/>
-          <p:cNvSpPr txBox="1"/>
-          <p:nvPr/>
-        </p:nvSpPr>
-        <p:spPr>
-          <a:xfrm>
-            <a:off x="850392" y="566928"/>
-            <a:ext cx="8229600" cy="274320"/>
-          </a:xfrm>
-          <a:prstGeom prst="rect">
-            <a:avLst/>
-          </a:prstGeom>
-          <a:noFill/>
-        </p:spPr>
-        <p:txBody>
-          <a:bodyPr wrap="square" anchor="t" lIns="0" rIns="0" tIns="0" bIns="0">
-            <a:spAutoFit/>
-          </a:bodyPr>
-          <a:lstStyle/>
-          <a:p>
-            <a:pPr algn="l">
-              <a:lnSpc>
-                <a:spcPct val="100000"/>
-              </a:lnSpc>
-              <a:spcBef>
-                <a:spcPts val="0"/>
-              </a:spcBef>
-              <a:spcAft>
-                <a:spcPts val="600"/>
-              </a:spcAft>
-            </a:pPr>
-            <a:r>
-              <a:rPr sz="1200" b="1" i="0" spc="220">
-                <a:solidFill>
-                  <a:srgbClr val="B02467"/>
-                </a:solidFill>
-                <a:latin typeface="Segoe UI"/>
-              </a:rPr>
-              <a:t>EL PRIMER PASO</a:t>
-            </a:r>
-          </a:p>
-        </p:txBody>
-      </p:sp>
-      <p:sp>
-        <p:nvSpPr>
-          <p:cNvPr id="3" name="TextBox 2"/>
-          <p:cNvSpPr txBox="1"/>
-          <p:nvPr/>
-        </p:nvSpPr>
-        <p:spPr>
-          <a:xfrm>
-            <a:off x="822960" y="868680"/>
-            <a:ext cx="10058400" cy="1371600"/>
-          </a:xfrm>
-          <a:prstGeom prst="rect">
-            <a:avLst/>
-          </a:prstGeom>
-          <a:noFill/>
-        </p:spPr>
-        <p:txBody>
-          <a:bodyPr wrap="square" anchor="t" lIns="0" rIns="0" tIns="0" bIns="0">
-            <a:spAutoFit/>
-          </a:bodyPr>
-          <a:lstStyle/>
-          <a:p>
-            <a:pPr algn="l">
-              <a:lnSpc>
-                <a:spcPct val="105000"/>
-              </a:lnSpc>
-              <a:spcBef>
-                <a:spcPts val="0"/>
-              </a:spcBef>
-              <a:spcAft>
-                <a:spcPts val="600"/>
-              </a:spcAft>
-            </a:pPr>
-            <a:r>
-              <a:rPr sz="3400" b="0" i="0">
-                <a:solidFill>
-                  <a:srgbClr val="3B1329"/>
-                </a:solidFill>
-                <a:latin typeface="Georgia"/>
-              </a:rPr>
-              <a:t>Podemos arrancar esta semana.</a:t>
-            </a:r>
-          </a:p>
-        </p:txBody>
-      </p:sp>
-      <p:sp>
-        <p:nvSpPr>
-          <p:cNvPr id="4" name="Rectangle 3"/>
-          <p:cNvSpPr/>
-          <p:nvPr/>
-        </p:nvSpPr>
-        <p:spPr>
-          <a:xfrm>
-            <a:off x="850392" y="1847088"/>
-            <a:ext cx="548640" cy="38100"/>
-          </a:xfrm>
-          <a:prstGeom prst="rect">
-            <a:avLst/>
-          </a:prstGeom>
-          <a:solidFill>
-            <a:srgbClr val="E84A9C"/>
-          </a:solidFill>
-          <a:ln>
-            <a:noFill/>
-          </a:ln>
-          <a:effectLst/>
-        </p:spPr>
-        <p:style>
-          <a:lnRef idx="1">
-            <a:schemeClr val="accent1"/>
-          </a:lnRef>
-          <a:fillRef idx="3">
-            <a:schemeClr val="accent1"/>
-          </a:fillRef>
-          <a:effectRef idx="2">
-            <a:schemeClr val="accent1"/>
-          </a:effectRef>
-          <a:fontRef idx="minor">
-            <a:schemeClr val="lt1"/>
-          </a:fontRef>
-        </p:style>
-        <p:txBody>
-          <a:bodyPr rtlCol="0" anchor="ctr"/>
-          <a:lstStyle/>
-          <a:p>
-            <a:pPr algn="ctr"/>
-          </a:p>
-        </p:txBody>
-      </p:sp>
-      <p:sp>
-        <p:nvSpPr>
-          <p:cNvPr id="5" name="Oval 4"/>
-          <p:cNvSpPr/>
-          <p:nvPr/>
-        </p:nvSpPr>
-        <p:spPr>
-          <a:xfrm>
-            <a:off x="850392" y="2651760"/>
-            <a:ext cx="384048" cy="384048"/>
-          </a:xfrm>
-          <a:prstGeom prst="ellipse">
-            <a:avLst/>
-          </a:prstGeom>
-          <a:solidFill>
-            <a:srgbClr val="3B1329"/>
-          </a:solidFill>
-          <a:ln>
-            <a:noFill/>
-          </a:ln>
-          <a:effectLst/>
-        </p:spPr>
-        <p:style>
-          <a:lnRef idx="1">
-            <a:schemeClr val="accent1"/>
-          </a:lnRef>
-          <a:fillRef idx="3">
-            <a:schemeClr val="accent1"/>
-          </a:fillRef>
-          <a:effectRef idx="2">
-            <a:schemeClr val="accent1"/>
-          </a:effectRef>
-          <a:fontRef idx="minor">
-            <a:schemeClr val="lt1"/>
-          </a:fontRef>
-        </p:style>
-        <p:txBody>
-          <a:bodyPr rtlCol="0" anchor="ctr" tIns="0" bIns="0"/>
-          <a:lstStyle/>
-          <a:p>
-            <a:pPr algn="ctr"/>
-            <a:r>
-              <a:rPr sz="1400" b="1">
-                <a:solidFill>
-                  <a:srgbClr val="FFFFFF"/>
-                </a:solidFill>
-                <a:latin typeface="Georgia"/>
-              </a:rPr>
-              <a:t>1</a:t>
-            </a:r>
-          </a:p>
-        </p:txBody>
-      </p:sp>
-      <p:sp>
-        <p:nvSpPr>
-          <p:cNvPr id="6" name="TextBox 5"/>
-          <p:cNvSpPr txBox="1"/>
-          <p:nvPr/>
-        </p:nvSpPr>
-        <p:spPr>
-          <a:xfrm>
-            <a:off x="1463040" y="2670048"/>
-            <a:ext cx="8229600" cy="457200"/>
-          </a:xfrm>
-          <a:prstGeom prst="rect">
-            <a:avLst/>
-          </a:prstGeom>
-          <a:noFill/>
-        </p:spPr>
-        <p:txBody>
-          <a:bodyPr wrap="square" anchor="t" lIns="0" rIns="0" tIns="0" bIns="0">
-            <a:spAutoFit/>
-          </a:bodyPr>
-          <a:lstStyle/>
-          <a:p>
-            <a:pPr algn="l">
-              <a:lnSpc>
-                <a:spcPct val="100000"/>
-              </a:lnSpc>
-              <a:spcBef>
-                <a:spcPts val="0"/>
-              </a:spcBef>
-              <a:spcAft>
-                <a:spcPts val="600"/>
-              </a:spcAft>
-            </a:pPr>
-            <a:r>
-              <a:rPr sz="2000" b="0" i="0">
-                <a:solidFill>
-                  <a:srgbClr val="26121D"/>
-                </a:solidFill>
-                <a:latin typeface="Segoe UI"/>
-              </a:rPr>
-              <a:t>Me das los accesos a tus redes y página.</a:t>
-            </a:r>
-          </a:p>
-        </p:txBody>
-      </p:sp>
-      <p:sp>
-        <p:nvSpPr>
-          <p:cNvPr id="7" name="Rectangle 6"/>
-          <p:cNvSpPr/>
-          <p:nvPr/>
-        </p:nvSpPr>
-        <p:spPr>
-          <a:xfrm>
-            <a:off x="850392" y="3310128"/>
-            <a:ext cx="8686800" cy="12700"/>
-          </a:xfrm>
-          <a:prstGeom prst="rect">
-            <a:avLst/>
-          </a:prstGeom>
-          <a:solidFill>
-            <a:srgbClr val="F0D9E5"/>
-          </a:solidFill>
-          <a:ln>
-            <a:noFill/>
-          </a:ln>
-          <a:effectLst/>
-        </p:spPr>
-        <p:style>
-          <a:lnRef idx="1">
-            <a:schemeClr val="accent1"/>
-          </a:lnRef>
-          <a:fillRef idx="3">
-            <a:schemeClr val="accent1"/>
-          </a:fillRef>
-          <a:effectRef idx="2">
-            <a:schemeClr val="accent1"/>
-          </a:effectRef>
-          <a:fontRef idx="minor">
-            <a:schemeClr val="lt1"/>
-          </a:fontRef>
-        </p:style>
-        <p:txBody>
-          <a:bodyPr rtlCol="0" anchor="ctr"/>
-          <a:lstStyle/>
-          <a:p>
-            <a:pPr algn="ctr"/>
-          </a:p>
-        </p:txBody>
-      </p:sp>
-      <p:sp>
-        <p:nvSpPr>
-          <p:cNvPr id="8" name="Oval 7"/>
-          <p:cNvSpPr/>
-          <p:nvPr/>
-        </p:nvSpPr>
-        <p:spPr>
-          <a:xfrm>
-            <a:off x="850392" y="3520440"/>
-            <a:ext cx="384048" cy="384048"/>
-          </a:xfrm>
-          <a:prstGeom prst="ellipse">
-            <a:avLst/>
-          </a:prstGeom>
-          <a:solidFill>
-            <a:srgbClr val="3B1329"/>
-          </a:solidFill>
-          <a:ln>
-            <a:noFill/>
-          </a:ln>
-          <a:effectLst/>
-        </p:spPr>
-        <p:style>
-          <a:lnRef idx="1">
-            <a:schemeClr val="accent1"/>
-          </a:lnRef>
-          <a:fillRef idx="3">
-            <a:schemeClr val="accent1"/>
-          </a:fillRef>
-          <a:effectRef idx="2">
-            <a:schemeClr val="accent1"/>
-          </a:effectRef>
-          <a:fontRef idx="minor">
-            <a:schemeClr val="lt1"/>
-          </a:fontRef>
-        </p:style>
-        <p:txBody>
-          <a:bodyPr rtlCol="0" anchor="ctr" tIns="0" bIns="0"/>
-          <a:lstStyle/>
-          <a:p>
-            <a:pPr algn="ctr"/>
-            <a:r>
-              <a:rPr sz="1400" b="1">
-                <a:solidFill>
-                  <a:srgbClr val="FFFFFF"/>
-                </a:solidFill>
-                <a:latin typeface="Georgia"/>
-              </a:rPr>
-              <a:t>2</a:t>
-            </a:r>
-          </a:p>
-        </p:txBody>
-      </p:sp>
-      <p:sp>
-        <p:nvSpPr>
-          <p:cNvPr id="9" name="TextBox 8"/>
-          <p:cNvSpPr txBox="1"/>
-          <p:nvPr/>
-        </p:nvSpPr>
-        <p:spPr>
-          <a:xfrm>
-            <a:off x="1463040" y="3538728"/>
-            <a:ext cx="8229600" cy="457200"/>
-          </a:xfrm>
-          <a:prstGeom prst="rect">
-            <a:avLst/>
-          </a:prstGeom>
-          <a:noFill/>
-        </p:spPr>
-        <p:txBody>
-          <a:bodyPr wrap="square" anchor="t" lIns="0" rIns="0" tIns="0" bIns="0">
-            <a:spAutoFit/>
-          </a:bodyPr>
-          <a:lstStyle/>
-          <a:p>
-            <a:pPr algn="l">
-              <a:lnSpc>
-                <a:spcPct val="100000"/>
-              </a:lnSpc>
-              <a:spcBef>
-                <a:spcPts val="0"/>
-              </a:spcBef>
-              <a:spcAft>
-                <a:spcPts val="600"/>
-              </a:spcAft>
-            </a:pPr>
-            <a:r>
-              <a:rPr sz="2000" b="0" i="0">
-                <a:solidFill>
-                  <a:srgbClr val="26121D"/>
-                </a:solidFill>
-                <a:latin typeface="Segoe UI"/>
-              </a:rPr>
-              <a:t>Elegimos juntos las primeras propiedades.</a:t>
-            </a:r>
-          </a:p>
-        </p:txBody>
-      </p:sp>
-      <p:sp>
-        <p:nvSpPr>
-          <p:cNvPr id="10" name="Rectangle 9"/>
-          <p:cNvSpPr/>
-          <p:nvPr/>
-        </p:nvSpPr>
-        <p:spPr>
-          <a:xfrm>
-            <a:off x="850392" y="4178808"/>
-            <a:ext cx="8686800" cy="12700"/>
-          </a:xfrm>
-          <a:prstGeom prst="rect">
-            <a:avLst/>
-          </a:prstGeom>
-          <a:solidFill>
-            <a:srgbClr val="F0D9E5"/>
-          </a:solidFill>
-          <a:ln>
-            <a:noFill/>
-          </a:ln>
-          <a:effectLst/>
-        </p:spPr>
-        <p:style>
-          <a:lnRef idx="1">
-            <a:schemeClr val="accent1"/>
-          </a:lnRef>
-          <a:fillRef idx="3">
-            <a:schemeClr val="accent1"/>
-          </a:fillRef>
-          <a:effectRef idx="2">
-            <a:schemeClr val="accent1"/>
-          </a:effectRef>
-          <a:fontRef idx="minor">
-            <a:schemeClr val="lt1"/>
-          </a:fontRef>
-        </p:style>
-        <p:txBody>
-          <a:bodyPr rtlCol="0" anchor="ctr"/>
-          <a:lstStyle/>
-          <a:p>
-            <a:pPr algn="ctr"/>
-          </a:p>
-        </p:txBody>
-      </p:sp>
-      <p:sp>
-        <p:nvSpPr>
-          <p:cNvPr id="11" name="Oval 10"/>
-          <p:cNvSpPr/>
-          <p:nvPr/>
-        </p:nvSpPr>
-        <p:spPr>
-          <a:xfrm>
-            <a:off x="850392" y="4389120"/>
-            <a:ext cx="384048" cy="384048"/>
-          </a:xfrm>
-          <a:prstGeom prst="ellipse">
-            <a:avLst/>
-          </a:prstGeom>
-          <a:solidFill>
-            <a:srgbClr val="E84A9C"/>
-          </a:solidFill>
-          <a:ln>
-            <a:noFill/>
-          </a:ln>
-          <a:effectLst/>
-        </p:spPr>
-        <p:style>
-          <a:lnRef idx="1">
-            <a:schemeClr val="accent1"/>
-          </a:lnRef>
-          <a:fillRef idx="3">
-            <a:schemeClr val="accent1"/>
-          </a:fillRef>
-          <a:effectRef idx="2">
-            <a:schemeClr val="accent1"/>
-          </a:effectRef>
-          <a:fontRef idx="minor">
-            <a:schemeClr val="lt1"/>
-          </a:fontRef>
-        </p:style>
-        <p:txBody>
-          <a:bodyPr rtlCol="0" anchor="ctr" tIns="0" bIns="0"/>
-          <a:lstStyle/>
-          <a:p>
-            <a:pPr algn="ctr"/>
-            <a:r>
-              <a:rPr sz="1400" b="1">
-                <a:solidFill>
-                  <a:srgbClr val="FFFFFF"/>
-                </a:solidFill>
-                <a:latin typeface="Georgia"/>
-              </a:rPr>
-              <a:t>3</a:t>
-            </a:r>
-          </a:p>
-        </p:txBody>
-      </p:sp>
-      <p:sp>
-        <p:nvSpPr>
-          <p:cNvPr id="12" name="TextBox 11"/>
-          <p:cNvSpPr txBox="1"/>
-          <p:nvPr/>
-        </p:nvSpPr>
-        <p:spPr>
-          <a:xfrm>
-            <a:off x="1463040" y="4407408"/>
-            <a:ext cx="8229600" cy="457200"/>
-          </a:xfrm>
-          <a:prstGeom prst="rect">
-            <a:avLst/>
-          </a:prstGeom>
-          <a:noFill/>
-        </p:spPr>
-        <p:txBody>
-          <a:bodyPr wrap="square" anchor="t" lIns="0" rIns="0" tIns="0" bIns="0">
-            <a:spAutoFit/>
-          </a:bodyPr>
-          <a:lstStyle/>
-          <a:p>
-            <a:pPr algn="l">
-              <a:lnSpc>
-                <a:spcPct val="100000"/>
-              </a:lnSpc>
-              <a:spcBef>
-                <a:spcPts val="0"/>
-              </a:spcBef>
-              <a:spcAft>
-                <a:spcPts val="600"/>
-              </a:spcAft>
-            </a:pPr>
-            <a:r>
-              <a:rPr sz="2000" b="1" i="0">
-                <a:solidFill>
-                  <a:srgbClr val="26121D"/>
-                </a:solidFill>
-                <a:latin typeface="Segoe UI"/>
-              </a:rPr>
-              <a:t>En 7 días los avisos están funcionando.</a:t>
-            </a:r>
-          </a:p>
-        </p:txBody>
-      </p:sp>
-      <p:sp>
-        <p:nvSpPr>
-          <p:cNvPr id="13" name="Rectangle 12"/>
-          <p:cNvSpPr/>
-          <p:nvPr/>
-        </p:nvSpPr>
-        <p:spPr>
-          <a:xfrm>
-            <a:off x="850392" y="5047488"/>
-            <a:ext cx="8686800" cy="12700"/>
-          </a:xfrm>
-          <a:prstGeom prst="rect">
-            <a:avLst/>
-          </a:prstGeom>
-          <a:solidFill>
-            <a:srgbClr val="F0D9E5"/>
-          </a:solidFill>
-          <a:ln>
-            <a:noFill/>
-          </a:ln>
-          <a:effectLst/>
-        </p:spPr>
-        <p:style>
-          <a:lnRef idx="1">
-            <a:schemeClr val="accent1"/>
-          </a:lnRef>
-          <a:fillRef idx="3">
-            <a:schemeClr val="accent1"/>
-          </a:fillRef>
-          <a:effectRef idx="2">
-            <a:schemeClr val="accent1"/>
-          </a:effectRef>
-          <a:fontRef idx="minor">
-            <a:schemeClr val="lt1"/>
-          </a:fontRef>
-        </p:style>
-        <p:txBody>
-          <a:bodyPr rtlCol="0" anchor="ctr"/>
-          <a:lstStyle/>
-          <a:p>
-            <a:pPr algn="ctr"/>
-          </a:p>
-        </p:txBody>
-      </p:sp>
-      <p:sp>
-        <p:nvSpPr>
-          <p:cNvPr id="14" name="Rectangle 13"/>
-          <p:cNvSpPr/>
-          <p:nvPr/>
-        </p:nvSpPr>
-        <p:spPr>
-          <a:xfrm>
-            <a:off x="822960" y="6355080"/>
-            <a:ext cx="10543032" cy="12700"/>
-          </a:xfrm>
-          <a:prstGeom prst="rect">
-            <a:avLst/>
-          </a:prstGeom>
-          <a:solidFill>
-            <a:srgbClr val="F0D9E5"/>
-          </a:solidFill>
-          <a:ln>
-            <a:noFill/>
-          </a:ln>
-          <a:effectLst/>
-        </p:spPr>
-        <p:style>
-          <a:lnRef idx="1">
-            <a:schemeClr val="accent1"/>
-          </a:lnRef>
-          <a:fillRef idx="3">
-            <a:schemeClr val="accent1"/>
-          </a:fillRef>
-          <a:effectRef idx="2">
-            <a:schemeClr val="accent1"/>
-          </a:effectRef>
-          <a:fontRef idx="minor">
-            <a:schemeClr val="lt1"/>
-          </a:fontRef>
-        </p:style>
-        <p:txBody>
-          <a:bodyPr rtlCol="0" anchor="ctr"/>
-          <a:lstStyle/>
-          <a:p>
-            <a:pPr algn="ctr"/>
-          </a:p>
-        </p:txBody>
-      </p:sp>
-      <p:sp>
-        <p:nvSpPr>
-          <p:cNvPr id="15" name="TextBox 14"/>
-          <p:cNvSpPr txBox="1"/>
-          <p:nvPr/>
-        </p:nvSpPr>
-        <p:spPr>
-          <a:xfrm>
-            <a:off x="822960" y="6419088"/>
-            <a:ext cx="3657600" cy="274320"/>
-          </a:xfrm>
-          <a:prstGeom prst="rect">
-            <a:avLst/>
-          </a:prstGeom>
-          <a:noFill/>
-        </p:spPr>
-        <p:txBody>
-          <a:bodyPr wrap="square" anchor="t" lIns="0" rIns="0" tIns="0" bIns="0">
-            <a:spAutoFit/>
-          </a:bodyPr>
-          <a:lstStyle/>
-          <a:p>
-            <a:pPr algn="l">
-              <a:lnSpc>
-                <a:spcPct val="100000"/>
-              </a:lnSpc>
-              <a:spcBef>
-                <a:spcPts val="0"/>
-              </a:spcBef>
-              <a:spcAft>
-                <a:spcPts val="600"/>
-              </a:spcAft>
-            </a:pPr>
-            <a:r>
-              <a:rPr sz="900" b="1" i="0" spc="120">
-                <a:solidFill>
-                  <a:srgbClr val="3B1329"/>
-                </a:solidFill>
-                <a:latin typeface="Segoe UI"/>
-              </a:rPr>
-              <a:t>SANTINO MARCONI</a:t>
-            </a:r>
-          </a:p>
-        </p:txBody>
-      </p:sp>
-      <p:sp>
-        <p:nvSpPr>
-          <p:cNvPr id="16" name="TextBox 15"/>
-          <p:cNvSpPr txBox="1"/>
-          <p:nvPr/>
-        </p:nvSpPr>
-        <p:spPr>
-          <a:xfrm>
-            <a:off x="4114800" y="6419088"/>
-            <a:ext cx="3959352" cy="274320"/>
-          </a:xfrm>
-          <a:prstGeom prst="rect">
-            <a:avLst/>
-          </a:prstGeom>
-          <a:noFill/>
-        </p:spPr>
-        <p:txBody>
-          <a:bodyPr wrap="square" anchor="t" lIns="0" rIns="0" tIns="0" bIns="0">
-            <a:spAutoFit/>
-          </a:bodyPr>
-          <a:lstStyle/>
-          <a:p>
-            <a:pPr algn="ctr">
-              <a:lnSpc>
-                <a:spcPct val="100000"/>
-              </a:lnSpc>
-              <a:spcBef>
-                <a:spcPts val="0"/>
-              </a:spcBef>
-              <a:spcAft>
-                <a:spcPts val="600"/>
-              </a:spcAft>
-            </a:pPr>
-            <a:r>
-              <a:rPr sz="900" b="0" i="0" spc="120">
-                <a:solidFill>
-                  <a:srgbClr val="7A6570"/>
-                </a:solidFill>
-                <a:latin typeface="Segoe UI"/>
-              </a:rPr>
-              <a:t>PROPUESTA · LUCRECIA MORENO NEGOCIOS INMOBILIARIOS</a:t>
-            </a:r>
-          </a:p>
-        </p:txBody>
-      </p:sp>
-      <p:sp>
-        <p:nvSpPr>
-          <p:cNvPr id="17" name="TextBox 16"/>
-          <p:cNvSpPr txBox="1"/>
-          <p:nvPr/>
-        </p:nvSpPr>
-        <p:spPr>
-          <a:xfrm>
-            <a:off x="8686800" y="6419088"/>
-            <a:ext cx="2679192" cy="274320"/>
-          </a:xfrm>
-          <a:prstGeom prst="rect">
-            <a:avLst/>
-          </a:prstGeom>
-          <a:noFill/>
-        </p:spPr>
-        <p:txBody>
-          <a:bodyPr wrap="square" anchor="t" lIns="0" rIns="0" tIns="0" bIns="0">
-            <a:spAutoFit/>
-          </a:bodyPr>
-          <a:lstStyle/>
-          <a:p>
-            <a:pPr algn="r">
-              <a:lnSpc>
-                <a:spcPct val="100000"/>
-              </a:lnSpc>
-              <a:spcBef>
-                <a:spcPts val="0"/>
-              </a:spcBef>
-              <a:spcAft>
-                <a:spcPts val="600"/>
-              </a:spcAft>
-            </a:pPr>
-            <a:r>
-              <a:rPr sz="900" b="0" i="0" spc="120">
-                <a:solidFill>
-                  <a:srgbClr val="7A6570"/>
-                </a:solidFill>
-                <a:latin typeface="Segoe UI"/>
-              </a:rPr>
-              <a:t>11 / 12</a:t>
-            </a:r>
-          </a:p>
-        </p:txBody>
-      </p:sp>
-    </p:spTree>
-  </p:cSld>
-  <p:clrMapOvr>
-    <a:masterClrMapping/>
-  </p:clrMapOvr>
-</p:sld>
-</file>
-
-<file path=ppt/slides/slide12.xml><?xml version="1.0" encoding="utf-8"?>
 <p:sld xmlns:a="http://schemas.openxmlformats.org/drawingml/2006/main" xmlns:p="http://schemas.openxmlformats.org/presentationml/2006/main" xmlns:r="http://schemas.openxmlformats.org/officeDocument/2006/relationships">
   <p:cSld>
     <p:bg>
@@ -5216,8 +5230,8 @@
         </p:nvSpPr>
         <p:spPr>
           <a:xfrm>
-            <a:off x="5413248" y="1234440"/>
-            <a:ext cx="1371600" cy="1371600"/>
+            <a:off x="822960" y="640080"/>
+            <a:ext cx="1005840" cy="1005840"/>
           </a:xfrm>
           <a:prstGeom prst="roundRect">
             <a:avLst/>
@@ -5270,8 +5284,8 @@
         </p:blipFill>
         <p:spPr>
           <a:xfrm>
-            <a:off x="5413248" y="1234440"/>
-            <a:ext cx="1371600" cy="1371600"/>
+            <a:off x="822960" y="640080"/>
+            <a:ext cx="1005840" cy="1005840"/>
           </a:xfrm>
           <a:prstGeom prst="rect">
             <a:avLst/>
@@ -5286,55 +5300,234 @@
         </p:nvSpPr>
         <p:spPr>
           <a:xfrm>
-            <a:off x="1371600" y="3200400"/>
-            <a:ext cx="9445752" cy="1463040"/>
-          </a:xfrm>
-          <a:prstGeom prst="rect">
-            <a:avLst/>
-          </a:prstGeom>
-          <a:noFill/>
-        </p:spPr>
-        <p:txBody>
-          <a:bodyPr wrap="square" anchor="t" lIns="0" rIns="0" tIns="0" bIns="0">
-            <a:spAutoFit/>
-          </a:bodyPr>
-          <a:lstStyle/>
-          <a:p>
-            <a:pPr algn="ctr">
-              <a:lnSpc>
-                <a:spcPct val="110000"/>
-              </a:lnSpc>
-              <a:spcBef>
-                <a:spcPts val="0"/>
-              </a:spcBef>
-              <a:spcAft>
-                <a:spcPts val="600"/>
-              </a:spcAft>
-            </a:pPr>
-            <a:r>
-              <a:rPr sz="4000" b="0" i="0">
+            <a:off x="2011680" y="749808"/>
+            <a:ext cx="5486400" cy="457200"/>
+          </a:xfrm>
+          <a:prstGeom prst="rect">
+            <a:avLst/>
+          </a:prstGeom>
+          <a:noFill/>
+        </p:spPr>
+        <p:txBody>
+          <a:bodyPr wrap="square" anchor="t" lIns="0" rIns="0" tIns="0" bIns="0">
+            <a:spAutoFit/>
+          </a:bodyPr>
+          <a:lstStyle/>
+          <a:p>
+            <a:pPr algn="l">
+              <a:lnSpc>
+                <a:spcPct val="100000"/>
+              </a:lnSpc>
+              <a:spcBef>
+                <a:spcPts val="0"/>
+              </a:spcBef>
+              <a:spcAft>
+                <a:spcPts val="600"/>
+              </a:spcAft>
+            </a:pPr>
+            <a:r>
+              <a:rPr sz="1800" b="0" i="0">
                 <a:solidFill>
                   <a:srgbClr val="FFFFFF"/>
                 </a:solidFill>
                 <a:latin typeface="Georgia"/>
               </a:rPr>
-              <a:t>Empecemos a construir tu cartera de clientes.</a:t>
-            </a:r>
-          </a:p>
-        </p:txBody>
-      </p:sp>
-      <p:sp>
-        <p:nvSpPr>
-          <p:cNvPr id="7" name="Rectangle 6"/>
+              <a:t>Lucrecia Moreno</a:t>
+            </a:r>
+          </a:p>
+        </p:txBody>
+      </p:sp>
+      <p:sp>
+        <p:nvSpPr>
+          <p:cNvPr id="7" name="TextBox 6"/>
+          <p:cNvSpPr txBox="1"/>
+          <p:nvPr/>
+        </p:nvSpPr>
+        <p:spPr>
+          <a:xfrm>
+            <a:off x="2011680" y="1170432"/>
+            <a:ext cx="5486400" cy="274320"/>
+          </a:xfrm>
+          <a:prstGeom prst="rect">
+            <a:avLst/>
+          </a:prstGeom>
+          <a:noFill/>
+        </p:spPr>
+        <p:txBody>
+          <a:bodyPr wrap="square" anchor="t" lIns="0" rIns="0" tIns="0" bIns="0">
+            <a:spAutoFit/>
+          </a:bodyPr>
+          <a:lstStyle/>
+          <a:p>
+            <a:pPr algn="l">
+              <a:lnSpc>
+                <a:spcPct val="100000"/>
+              </a:lnSpc>
+              <a:spcBef>
+                <a:spcPts val="0"/>
+              </a:spcBef>
+              <a:spcAft>
+                <a:spcPts val="600"/>
+              </a:spcAft>
+            </a:pPr>
+            <a:r>
+              <a:rPr sz="1100" b="0" i="0" spc="120">
+                <a:solidFill>
+                  <a:srgbClr val="C79BB2"/>
+                </a:solidFill>
+                <a:latin typeface="Segoe UI"/>
+              </a:rPr>
+              <a:t>NEGOCIOS INMOBILIARIOS</a:t>
+            </a:r>
+          </a:p>
+        </p:txBody>
+      </p:sp>
+      <p:sp>
+        <p:nvSpPr>
+          <p:cNvPr id="8" name="TextBox 7"/>
+          <p:cNvSpPr txBox="1"/>
+          <p:nvPr/>
+        </p:nvSpPr>
+        <p:spPr>
+          <a:xfrm>
+            <a:off x="822960" y="2331720"/>
+            <a:ext cx="8229600" cy="274320"/>
+          </a:xfrm>
+          <a:prstGeom prst="rect">
+            <a:avLst/>
+          </a:prstGeom>
+          <a:noFill/>
+        </p:spPr>
+        <p:txBody>
+          <a:bodyPr wrap="square" anchor="t" lIns="0" rIns="0" tIns="0" bIns="0">
+            <a:spAutoFit/>
+          </a:bodyPr>
+          <a:lstStyle/>
+          <a:p>
+            <a:pPr algn="l">
+              <a:lnSpc>
+                <a:spcPct val="100000"/>
+              </a:lnSpc>
+              <a:spcBef>
+                <a:spcPts val="0"/>
+              </a:spcBef>
+              <a:spcAft>
+                <a:spcPts val="600"/>
+              </a:spcAft>
+            </a:pPr>
+            <a:r>
+              <a:rPr sz="1200" b="1" i="0" spc="220">
+                <a:solidFill>
+                  <a:srgbClr val="E84A9C"/>
+                </a:solidFill>
+                <a:latin typeface="Segoe UI"/>
+              </a:rPr>
+              <a:t>EL PRIMER PASO</a:t>
+            </a:r>
+          </a:p>
+        </p:txBody>
+      </p:sp>
+      <p:sp>
+        <p:nvSpPr>
+          <p:cNvPr id="9" name="TextBox 8"/>
+          <p:cNvSpPr txBox="1"/>
+          <p:nvPr/>
+        </p:nvSpPr>
+        <p:spPr>
+          <a:xfrm>
+            <a:off x="822960" y="2743200"/>
+            <a:ext cx="8229600" cy="822960"/>
+          </a:xfrm>
+          <a:prstGeom prst="rect">
+            <a:avLst/>
+          </a:prstGeom>
+          <a:noFill/>
+        </p:spPr>
+        <p:txBody>
+          <a:bodyPr wrap="square" anchor="t" lIns="0" rIns="0" tIns="0" bIns="0">
+            <a:spAutoFit/>
+          </a:bodyPr>
+          <a:lstStyle/>
+          <a:p>
+            <a:pPr algn="l">
+              <a:lnSpc>
+                <a:spcPct val="100000"/>
+              </a:lnSpc>
+              <a:spcBef>
+                <a:spcPts val="0"/>
+              </a:spcBef>
+              <a:spcAft>
+                <a:spcPts val="600"/>
+              </a:spcAft>
+            </a:pPr>
+            <a:r>
+              <a:rPr sz="3800" b="0" i="0">
+                <a:solidFill>
+                  <a:srgbClr val="FFFFFF"/>
+                </a:solidFill>
+                <a:latin typeface="Georgia"/>
+              </a:rPr>
+              <a:t>Podemos arrancar esta semana.</a:t>
+            </a:r>
+          </a:p>
+        </p:txBody>
+      </p:sp>
+      <p:sp>
+        <p:nvSpPr>
+          <p:cNvPr id="10" name="Rectangle 9"/>
           <p:cNvSpPr/>
           <p:nvPr/>
         </p:nvSpPr>
         <p:spPr>
           <a:xfrm>
-            <a:off x="4270248" y="5486400"/>
-            <a:ext cx="3657600" cy="12700"/>
-          </a:xfrm>
-          <a:prstGeom prst="rect">
+            <a:off x="850392" y="3611880"/>
+            <a:ext cx="548640" cy="38100"/>
+          </a:xfrm>
+          <a:prstGeom prst="rect">
+            <a:avLst/>
+          </a:prstGeom>
+          <a:solidFill>
+            <a:srgbClr val="E84A9C"/>
+          </a:solidFill>
+          <a:ln>
+            <a:noFill/>
+          </a:ln>
+          <a:effectLst/>
+        </p:spPr>
+        <p:style>
+          <a:lnRef idx="1">
+            <a:schemeClr val="accent1"/>
+          </a:lnRef>
+          <a:fillRef idx="3">
+            <a:schemeClr val="accent1"/>
+          </a:fillRef>
+          <a:effectRef idx="2">
+            <a:schemeClr val="accent1"/>
+          </a:effectRef>
+          <a:fontRef idx="minor">
+            <a:schemeClr val="lt1"/>
+          </a:fontRef>
+        </p:style>
+        <p:txBody>
+          <a:bodyPr rtlCol="0" anchor="ctr"/>
+          <a:lstStyle/>
+          <a:p>
+            <a:pPr algn="ctr"/>
+          </a:p>
+        </p:txBody>
+      </p:sp>
+      <p:sp>
+        <p:nvSpPr>
+          <p:cNvPr id="11" name="Oval 10"/>
+          <p:cNvSpPr/>
+          <p:nvPr/>
+        </p:nvSpPr>
+        <p:spPr>
+          <a:xfrm>
+            <a:off x="850392" y="3977639"/>
+            <a:ext cx="365760" cy="365760"/>
+          </a:xfrm>
+          <a:prstGeom prst="ellipse">
             <a:avLst/>
           </a:prstGeom>
           <a:solidFill>
@@ -5360,6 +5553,300 @@
           </a:fontRef>
         </p:style>
         <p:txBody>
+          <a:bodyPr rtlCol="0" anchor="ctr" tIns="0" bIns="0"/>
+          <a:lstStyle/>
+          <a:p>
+            <a:pPr algn="ctr"/>
+            <a:r>
+              <a:rPr sz="1300" b="1">
+                <a:solidFill>
+                  <a:srgbClr val="FFFFFF"/>
+                </a:solidFill>
+                <a:latin typeface="Georgia"/>
+              </a:rPr>
+              <a:t>1</a:t>
+            </a:r>
+          </a:p>
+        </p:txBody>
+      </p:sp>
+      <p:sp>
+        <p:nvSpPr>
+          <p:cNvPr id="12" name="TextBox 11"/>
+          <p:cNvSpPr txBox="1"/>
+          <p:nvPr/>
+        </p:nvSpPr>
+        <p:spPr>
+          <a:xfrm>
+            <a:off x="1417320" y="4005071"/>
+            <a:ext cx="8229600" cy="365760"/>
+          </a:xfrm>
+          <a:prstGeom prst="rect">
+            <a:avLst/>
+          </a:prstGeom>
+          <a:noFill/>
+        </p:spPr>
+        <p:txBody>
+          <a:bodyPr wrap="square" anchor="t" lIns="0" rIns="0" tIns="0" bIns="0">
+            <a:spAutoFit/>
+          </a:bodyPr>
+          <a:lstStyle/>
+          <a:p>
+            <a:pPr algn="l">
+              <a:lnSpc>
+                <a:spcPct val="100000"/>
+              </a:lnSpc>
+              <a:spcBef>
+                <a:spcPts val="0"/>
+              </a:spcBef>
+              <a:spcAft>
+                <a:spcPts val="600"/>
+              </a:spcAft>
+            </a:pPr>
+            <a:r>
+              <a:rPr sz="1900" b="0" i="0">
+                <a:solidFill>
+                  <a:srgbClr val="FFFFFF"/>
+                </a:solidFill>
+                <a:latin typeface="Segoe UI"/>
+              </a:rPr>
+              <a:t>Me das los accesos a tus redes y página.</a:t>
+            </a:r>
+          </a:p>
+        </p:txBody>
+      </p:sp>
+      <p:sp>
+        <p:nvSpPr>
+          <p:cNvPr id="13" name="Oval 12"/>
+          <p:cNvSpPr/>
+          <p:nvPr/>
+        </p:nvSpPr>
+        <p:spPr>
+          <a:xfrm>
+            <a:off x="850392" y="4636007"/>
+            <a:ext cx="365760" cy="365760"/>
+          </a:xfrm>
+          <a:prstGeom prst="ellipse">
+            <a:avLst/>
+          </a:prstGeom>
+          <a:solidFill>
+            <a:srgbClr val="66334D"/>
+          </a:solidFill>
+          <a:ln>
+            <a:noFill/>
+          </a:ln>
+          <a:effectLst/>
+        </p:spPr>
+        <p:style>
+          <a:lnRef idx="1">
+            <a:schemeClr val="accent1"/>
+          </a:lnRef>
+          <a:fillRef idx="3">
+            <a:schemeClr val="accent1"/>
+          </a:fillRef>
+          <a:effectRef idx="2">
+            <a:schemeClr val="accent1"/>
+          </a:effectRef>
+          <a:fontRef idx="minor">
+            <a:schemeClr val="lt1"/>
+          </a:fontRef>
+        </p:style>
+        <p:txBody>
+          <a:bodyPr rtlCol="0" anchor="ctr" tIns="0" bIns="0"/>
+          <a:lstStyle/>
+          <a:p>
+            <a:pPr algn="ctr"/>
+            <a:r>
+              <a:rPr sz="1300" b="1">
+                <a:solidFill>
+                  <a:srgbClr val="FFFFFF"/>
+                </a:solidFill>
+                <a:latin typeface="Georgia"/>
+              </a:rPr>
+              <a:t>2</a:t>
+            </a:r>
+          </a:p>
+        </p:txBody>
+      </p:sp>
+      <p:sp>
+        <p:nvSpPr>
+          <p:cNvPr id="14" name="TextBox 13"/>
+          <p:cNvSpPr txBox="1"/>
+          <p:nvPr/>
+        </p:nvSpPr>
+        <p:spPr>
+          <a:xfrm>
+            <a:off x="1417320" y="4663439"/>
+            <a:ext cx="8229600" cy="365760"/>
+          </a:xfrm>
+          <a:prstGeom prst="rect">
+            <a:avLst/>
+          </a:prstGeom>
+          <a:noFill/>
+        </p:spPr>
+        <p:txBody>
+          <a:bodyPr wrap="square" anchor="t" lIns="0" rIns="0" tIns="0" bIns="0">
+            <a:spAutoFit/>
+          </a:bodyPr>
+          <a:lstStyle/>
+          <a:p>
+            <a:pPr algn="l">
+              <a:lnSpc>
+                <a:spcPct val="100000"/>
+              </a:lnSpc>
+              <a:spcBef>
+                <a:spcPts val="0"/>
+              </a:spcBef>
+              <a:spcAft>
+                <a:spcPts val="600"/>
+              </a:spcAft>
+            </a:pPr>
+            <a:r>
+              <a:rPr sz="1900" b="0" i="0">
+                <a:solidFill>
+                  <a:srgbClr val="FFFFFF"/>
+                </a:solidFill>
+                <a:latin typeface="Segoe UI"/>
+              </a:rPr>
+              <a:t>Elegimos juntos las primeras propiedades.</a:t>
+            </a:r>
+          </a:p>
+        </p:txBody>
+      </p:sp>
+      <p:sp>
+        <p:nvSpPr>
+          <p:cNvPr id="15" name="Oval 14"/>
+          <p:cNvSpPr/>
+          <p:nvPr/>
+        </p:nvSpPr>
+        <p:spPr>
+          <a:xfrm>
+            <a:off x="850392" y="5294375"/>
+            <a:ext cx="365760" cy="365760"/>
+          </a:xfrm>
+          <a:prstGeom prst="ellipse">
+            <a:avLst/>
+          </a:prstGeom>
+          <a:solidFill>
+            <a:srgbClr val="E84A9C"/>
+          </a:solidFill>
+          <a:ln>
+            <a:noFill/>
+          </a:ln>
+          <a:effectLst/>
+        </p:spPr>
+        <p:style>
+          <a:lnRef idx="1">
+            <a:schemeClr val="accent1"/>
+          </a:lnRef>
+          <a:fillRef idx="3">
+            <a:schemeClr val="accent1"/>
+          </a:fillRef>
+          <a:effectRef idx="2">
+            <a:schemeClr val="accent1"/>
+          </a:effectRef>
+          <a:fontRef idx="minor">
+            <a:schemeClr val="lt1"/>
+          </a:fontRef>
+        </p:style>
+        <p:txBody>
+          <a:bodyPr rtlCol="0" anchor="ctr" tIns="0" bIns="0"/>
+          <a:lstStyle/>
+          <a:p>
+            <a:pPr algn="ctr"/>
+            <a:r>
+              <a:rPr sz="1300" b="1">
+                <a:solidFill>
+                  <a:srgbClr val="FFFFFF"/>
+                </a:solidFill>
+                <a:latin typeface="Georgia"/>
+              </a:rPr>
+              <a:t>3</a:t>
+            </a:r>
+          </a:p>
+        </p:txBody>
+      </p:sp>
+      <p:sp>
+        <p:nvSpPr>
+          <p:cNvPr id="16" name="TextBox 15"/>
+          <p:cNvSpPr txBox="1"/>
+          <p:nvPr/>
+        </p:nvSpPr>
+        <p:spPr>
+          <a:xfrm>
+            <a:off x="1417320" y="5321807"/>
+            <a:ext cx="8229600" cy="365760"/>
+          </a:xfrm>
+          <a:prstGeom prst="rect">
+            <a:avLst/>
+          </a:prstGeom>
+          <a:noFill/>
+        </p:spPr>
+        <p:txBody>
+          <a:bodyPr wrap="square" anchor="t" lIns="0" rIns="0" tIns="0" bIns="0">
+            <a:spAutoFit/>
+          </a:bodyPr>
+          <a:lstStyle/>
+          <a:p>
+            <a:pPr algn="l">
+              <a:lnSpc>
+                <a:spcPct val="100000"/>
+              </a:lnSpc>
+              <a:spcBef>
+                <a:spcPts val="0"/>
+              </a:spcBef>
+              <a:spcAft>
+                <a:spcPts val="600"/>
+              </a:spcAft>
+            </a:pPr>
+            <a:r>
+              <a:rPr sz="1900" b="1" i="0">
+                <a:solidFill>
+                  <a:srgbClr val="FFFFFF"/>
+                </a:solidFill>
+                <a:latin typeface="Segoe UI"/>
+              </a:rPr>
+              <a:t>En 7 días los avisos están funcionando.</a:t>
+            </a:r>
+          </a:p>
+        </p:txBody>
+      </p:sp>
+      <p:sp>
+        <p:nvSpPr>
+          <p:cNvPr id="17" name="Rectangle 16"/>
+          <p:cNvSpPr/>
+          <p:nvPr/>
+        </p:nvSpPr>
+        <p:spPr>
+          <a:xfrm>
+            <a:off x="822960" y="6172200"/>
+            <a:ext cx="10543032" cy="12700"/>
+          </a:xfrm>
+          <a:prstGeom prst="rect">
+            <a:avLst/>
+          </a:prstGeom>
+          <a:solidFill>
+            <a:srgbClr val="66334D"/>
+          </a:solidFill>
+          <a:ln>
+            <a:noFill/>
+          </a:ln>
+          <a:effectLst/>
+        </p:spPr>
+        <p:style>
+          <a:lnRef idx="1">
+            <a:schemeClr val="accent1"/>
+          </a:lnRef>
+          <a:fillRef idx="3">
+            <a:schemeClr val="accent1"/>
+          </a:fillRef>
+          <a:effectRef idx="2">
+            <a:schemeClr val="accent1"/>
+          </a:effectRef>
+          <a:fontRef idx="minor">
+            <a:schemeClr val="lt1"/>
+          </a:fontRef>
+        </p:style>
+        <p:txBody>
           <a:bodyPr rtlCol="0" anchor="ctr"/>
           <a:lstStyle/>
           <a:p>
@@ -5369,27 +5856,27 @@
       </p:sp>
       <p:sp>
         <p:nvSpPr>
-          <p:cNvPr id="8" name="TextBox 7"/>
-          <p:cNvSpPr txBox="1"/>
-          <p:nvPr/>
-        </p:nvSpPr>
-        <p:spPr>
-          <a:xfrm>
-            <a:off x="1371600" y="5623560"/>
-            <a:ext cx="9445752" cy="365760"/>
-          </a:xfrm>
-          <a:prstGeom prst="rect">
-            <a:avLst/>
-          </a:prstGeom>
-          <a:noFill/>
-        </p:spPr>
-        <p:txBody>
-          <a:bodyPr wrap="square" anchor="t" lIns="0" rIns="0" tIns="0" bIns="0">
-            <a:spAutoFit/>
-          </a:bodyPr>
-          <a:lstStyle/>
-          <a:p>
-            <a:pPr algn="ctr">
+          <p:cNvPr id="18" name="TextBox 17"/>
+          <p:cNvSpPr txBox="1"/>
+          <p:nvPr/>
+        </p:nvSpPr>
+        <p:spPr>
+          <a:xfrm>
+            <a:off x="822960" y="6309360"/>
+            <a:ext cx="8229600" cy="365760"/>
+          </a:xfrm>
+          <a:prstGeom prst="rect">
+            <a:avLst/>
+          </a:prstGeom>
+          <a:noFill/>
+        </p:spPr>
+        <p:txBody>
+          <a:bodyPr wrap="square" anchor="t" lIns="0" rIns="0" tIns="0" bIns="0">
+            <a:spAutoFit/>
+          </a:bodyPr>
+          <a:lstStyle/>
+          <a:p>
+            <a:pPr algn="l">
               <a:lnSpc>
                 <a:spcPct val="100000"/>
               </a:lnSpc>
@@ -5492,7 +5979,7 @@
         <p:spPr>
           <a:xfrm>
             <a:off x="822960" y="868680"/>
-            <a:ext cx="10058400" cy="1371600"/>
+            <a:ext cx="10424160" cy="1371600"/>
           </a:xfrm>
           <a:prstGeom prst="rect">
             <a:avLst/>
@@ -6211,7 +6698,7 @@
                 </a:solidFill>
                 <a:latin typeface="Segoe UI"/>
               </a:rPr>
-              <a:t>2 / 12</a:t>
+              <a:t>2 / 11</a:t>
             </a:r>
           </a:p>
         </p:txBody>
@@ -6296,7 +6783,7 @@
         <p:spPr>
           <a:xfrm>
             <a:off x="822960" y="868680"/>
-            <a:ext cx="10058400" cy="1371600"/>
+            <a:ext cx="10424160" cy="1371600"/>
           </a:xfrm>
           <a:prstGeom prst="rect">
             <a:avLst/>
@@ -6488,7 +6975,7 @@
                 </a:solidFill>
                 <a:latin typeface="Georgia"/>
               </a:rPr>
-              <a:t>Hoy vos no estás ahí.</a:t>
+              <a:t>Cada semana que pasa, a esos clientes los atiende otro.</a:t>
             </a:r>
           </a:p>
         </p:txBody>
@@ -6667,7 +7154,7 @@
                 </a:solidFill>
                 <a:latin typeface="Segoe UI"/>
               </a:rPr>
-              <a:t>3 / 12</a:t>
+              <a:t>3 / 11</a:t>
             </a:r>
           </a:p>
         </p:txBody>
@@ -6752,7 +7239,7 @@
         <p:spPr>
           <a:xfrm>
             <a:off x="822960" y="868680"/>
-            <a:ext cx="10058400" cy="1371600"/>
+            <a:ext cx="10424160" cy="1371600"/>
           </a:xfrm>
           <a:prstGeom prst="rect">
             <a:avLst/>
@@ -6783,7 +7270,7 @@
                 </a:solidFill>
                 <a:latin typeface="Georgia"/>
               </a:rPr>
-              <a:t>Poner tus propiedades adelante de quien busca.</a:t>
+              <a:t>No es publicidad. Es ordenar todo el camino del cliente.</a:t>
             </a:r>
           </a:p>
         </p:txBody>
@@ -6840,8 +7327,8 @@
         </p:nvSpPr>
         <p:spPr>
           <a:xfrm>
-            <a:off x="850392" y="2743200"/>
-            <a:ext cx="10058400" cy="2194560"/>
+            <a:off x="850392" y="2651760"/>
+            <a:ext cx="10058400" cy="1645920"/>
           </a:xfrm>
           <a:prstGeom prst="rect">
             <a:avLst/>
@@ -6856,48 +7343,102 @@
           <a:p>
             <a:pPr algn="l">
               <a:lnSpc>
-                <a:spcPct val="132000"/>
-              </a:lnSpc>
-              <a:spcBef>
-                <a:spcPts val="0"/>
-              </a:spcBef>
-              <a:spcAft>
-                <a:spcPts val="600"/>
-              </a:spcAft>
-            </a:pPr>
-            <a:r>
-              <a:rPr sz="2600" b="0" i="0">
+                <a:spcPct val="130000"/>
+              </a:lnSpc>
+              <a:spcBef>
+                <a:spcPts val="0"/>
+              </a:spcBef>
+              <a:spcAft>
+                <a:spcPts val="600"/>
+              </a:spcAft>
+            </a:pPr>
+            <a:r>
+              <a:rPr sz="2500" b="0" i="0">
                 <a:solidFill>
                   <a:srgbClr val="26121D"/>
                 </a:solidFill>
                 <a:latin typeface="Georgia"/>
               </a:rPr>
-              <a:t>Me encargo de mostrar tus propiedades con publicidad paga a la gente que está buscando comprar o alquilar en Tandil y la zona, y de que esas </a:t>
-            </a:r>
-            <a:r>
-              <a:rPr sz="2600" b="1" i="0">
+              <a:t>Me encargo de que tus propiedades aparezcan frente a quien está buscando, de que la consulta te llegue </a:t>
+            </a:r>
+            <a:r>
+              <a:rPr sz="2500" b="1" i="0">
                 <a:solidFill>
                   <a:srgbClr val="B02467"/>
                 </a:solidFill>
                 <a:latin typeface="Georgia"/>
               </a:rPr>
-              <a:t>consultas te lleguen directo al WhatsApp</a:t>
-            </a:r>
-            <a:r>
-              <a:rPr sz="2600" b="0" i="0">
+              <a:t>ordenada al WhatsApp</a:t>
+            </a:r>
+            <a:r>
+              <a:rPr sz="2500" b="0" i="0">
                 <a:solidFill>
                   <a:srgbClr val="26121D"/>
                 </a:solidFill>
                 <a:latin typeface="Georgia"/>
               </a:rPr>
-              <a:t>, ordenadas y listas para atender.</a:t>
-            </a:r>
-          </a:p>
-        </p:txBody>
-      </p:sp>
-      <p:sp>
-        <p:nvSpPr>
-          <p:cNvPr id="6" name="Rectangle 5"/>
+              <a:t>, y de que sepas exactamente qué hacer con ella hasta la firma.</a:t>
+            </a:r>
+          </a:p>
+        </p:txBody>
+      </p:sp>
+      <p:sp>
+        <p:nvSpPr>
+          <p:cNvPr id="6" name="TextBox 5"/>
+          <p:cNvSpPr txBox="1"/>
+          <p:nvPr/>
+        </p:nvSpPr>
+        <p:spPr>
+          <a:xfrm>
+            <a:off x="850392" y="4572000"/>
+            <a:ext cx="10058400" cy="1097280"/>
+          </a:xfrm>
+          <a:prstGeom prst="rect">
+            <a:avLst/>
+          </a:prstGeom>
+          <a:noFill/>
+        </p:spPr>
+        <p:txBody>
+          <a:bodyPr wrap="square" anchor="t" lIns="0" rIns="0" tIns="0" bIns="0">
+            <a:spAutoFit/>
+          </a:bodyPr>
+          <a:lstStyle/>
+          <a:p>
+            <a:pPr algn="l">
+              <a:lnSpc>
+                <a:spcPct val="130000"/>
+              </a:lnSpc>
+              <a:spcBef>
+                <a:spcPts val="0"/>
+              </a:spcBef>
+              <a:spcAft>
+                <a:spcPts val="600"/>
+              </a:spcAft>
+            </a:pPr>
+            <a:r>
+              <a:rPr sz="2500" b="0" i="0">
+                <a:solidFill>
+                  <a:srgbClr val="26121D"/>
+                </a:solidFill>
+                <a:latin typeface="Georgia"/>
+              </a:rPr>
+              <a:t>El anuncio es solo la puerta de entrada. Mi trabajo es que </a:t>
+            </a:r>
+            <a:r>
+              <a:rPr sz="2500" b="1" i="0">
+                <a:solidFill>
+                  <a:srgbClr val="B02467"/>
+                </a:solidFill>
+                <a:latin typeface="Georgia"/>
+              </a:rPr>
+              <a:t>todo lo que viene después también funcione.</a:t>
+            </a:r>
+          </a:p>
+        </p:txBody>
+      </p:sp>
+      <p:sp>
+        <p:nvSpPr>
+          <p:cNvPr id="7" name="Rectangle 6"/>
           <p:cNvSpPr/>
           <p:nvPr/>
         </p:nvSpPr>
@@ -6941,7 +7482,7 @@
       </p:sp>
       <p:sp>
         <p:nvSpPr>
-          <p:cNvPr id="7" name="TextBox 6"/>
+          <p:cNvPr id="8" name="TextBox 7"/>
           <p:cNvSpPr txBox="1"/>
           <p:nvPr/>
         </p:nvSpPr>
@@ -6986,7 +7527,7 @@
       </p:sp>
       <p:sp>
         <p:nvSpPr>
-          <p:cNvPr id="8" name="TextBox 7"/>
+          <p:cNvPr id="9" name="TextBox 8"/>
           <p:cNvSpPr txBox="1"/>
           <p:nvPr/>
         </p:nvSpPr>
@@ -7031,7 +7572,7 @@
       </p:sp>
       <p:sp>
         <p:nvSpPr>
-          <p:cNvPr id="9" name="TextBox 8"/>
+          <p:cNvPr id="10" name="TextBox 9"/>
           <p:cNvSpPr txBox="1"/>
           <p:nvPr/>
         </p:nvSpPr>
@@ -7069,7 +7610,7 @@
                 </a:solidFill>
                 <a:latin typeface="Segoe UI"/>
               </a:rPr>
-              <a:t>4 / 12</a:t>
+              <a:t>4 / 11</a:t>
             </a:r>
           </a:p>
         </p:txBody>
@@ -7140,7 +7681,7 @@
                 </a:solidFill>
                 <a:latin typeface="Segoe UI"/>
               </a:rPr>
-              <a:t>CÓMO FUNCIONA</a:t>
+              <a:t>EL SISTEMA COMPLETO</a:t>
             </a:r>
           </a:p>
         </p:txBody>
@@ -7154,7 +7695,7 @@
         <p:spPr>
           <a:xfrm>
             <a:off x="822960" y="868680"/>
-            <a:ext cx="10058400" cy="1371600"/>
+            <a:ext cx="10424160" cy="1371600"/>
           </a:xfrm>
           <a:prstGeom prst="rect">
             <a:avLst/>
@@ -7185,7 +7726,7 @@
                 </a:solidFill>
                 <a:latin typeface="Georgia"/>
               </a:rPr>
-              <a:t>Tres pasos, simple.</a:t>
+              <a:t>Cuatro piezas trabajando juntas.</a:t>
             </a:r>
           </a:p>
         </p:txBody>
@@ -7242,7 +7783,7 @@
         </p:nvSpPr>
         <p:spPr>
           <a:xfrm>
-            <a:off x="850392" y="2560320"/>
+            <a:off x="850392" y="2651760"/>
             <a:ext cx="914400" cy="640080"/>
           </a:xfrm>
           <a:prstGeom prst="rect">
@@ -7268,7 +7809,7 @@
               </a:spcAft>
             </a:pPr>
             <a:r>
-              <a:rPr sz="4000" b="1" i="0">
+              <a:rPr sz="3800" b="1" i="0">
                 <a:solidFill>
                   <a:srgbClr val="E84A9C"/>
                 </a:solidFill>
@@ -7287,8 +7828,8 @@
         </p:nvSpPr>
         <p:spPr>
           <a:xfrm>
-            <a:off x="850392" y="3429000"/>
-            <a:ext cx="3108960" cy="12700"/>
+            <a:off x="850392" y="3474720"/>
+            <a:ext cx="2542032" cy="12700"/>
           </a:xfrm>
           <a:prstGeom prst="rect">
             <a:avLst/>
@@ -7331,8 +7872,8 @@
         </p:nvSpPr>
         <p:spPr>
           <a:xfrm>
-            <a:off x="850392" y="3611880"/>
-            <a:ext cx="3108960" cy="457200"/>
+            <a:off x="850392" y="3657600"/>
+            <a:ext cx="2542032" cy="457200"/>
           </a:xfrm>
           <a:prstGeom prst="rect">
             <a:avLst/>
@@ -7357,13 +7898,13 @@
               </a:spcAft>
             </a:pPr>
             <a:r>
-              <a:rPr sz="2300" b="0" i="0">
+              <a:rPr sz="2200" b="0" i="0">
                 <a:solidFill>
                   <a:srgbClr val="3B1329"/>
                 </a:solidFill>
                 <a:latin typeface="Georgia"/>
               </a:rPr>
-              <a:t>Mostramos</a:t>
+              <a:t>Distribución</a:t>
             </a:r>
           </a:p>
         </p:txBody>
@@ -7376,8 +7917,8 @@
         </p:nvSpPr>
         <p:spPr>
           <a:xfrm>
-            <a:off x="850392" y="4160520"/>
-            <a:ext cx="3108960" cy="1463040"/>
+            <a:off x="850392" y="4206240"/>
+            <a:ext cx="2542032" cy="1828800"/>
           </a:xfrm>
           <a:prstGeom prst="rect">
             <a:avLst/>
@@ -7392,23 +7933,23 @@
           <a:p>
             <a:pPr algn="l">
               <a:lnSpc>
-                <a:spcPct val="125000"/>
-              </a:lnSpc>
-              <a:spcBef>
-                <a:spcPts val="0"/>
-              </a:spcBef>
-              <a:spcAft>
-                <a:spcPts val="600"/>
-              </a:spcAft>
-            </a:pPr>
-            <a:r>
-              <a:rPr sz="1500" b="0" i="0">
+                <a:spcPct val="122000"/>
+              </a:lnSpc>
+              <a:spcBef>
+                <a:spcPts val="0"/>
+              </a:spcBef>
+              <a:spcAft>
+                <a:spcPts val="600"/>
+              </a:spcAft>
+            </a:pPr>
+            <a:r>
+              <a:rPr sz="1400" b="0" i="0">
                 <a:solidFill>
                   <a:srgbClr val="7A6570"/>
                 </a:solidFill>
                 <a:latin typeface="Segoe UI"/>
               </a:rPr>
-              <a:t>Tus propiedades aparecen como avisos pagos frente a compradores e inquilinos de Tandil y la región.</a:t>
+              <a:t>Tus propiedades como avisos pagos frente a compradores e inquilinos de Tandil y la región.</a:t>
             </a:r>
           </a:p>
         </p:txBody>
@@ -7421,7 +7962,7 @@
         </p:nvSpPr>
         <p:spPr>
           <a:xfrm>
-            <a:off x="4370832" y="2560320"/>
+            <a:off x="3547872" y="2651760"/>
             <a:ext cx="914400" cy="640080"/>
           </a:xfrm>
           <a:prstGeom prst="rect">
@@ -7447,7 +7988,7 @@
               </a:spcAft>
             </a:pPr>
             <a:r>
-              <a:rPr sz="4000" b="1" i="0">
+              <a:rPr sz="3800" b="1" i="0">
                 <a:solidFill>
                   <a:srgbClr val="E84A9C"/>
                 </a:solidFill>
@@ -7466,8 +8007,8 @@
         </p:nvSpPr>
         <p:spPr>
           <a:xfrm>
-            <a:off x="4370832" y="3429000"/>
-            <a:ext cx="3108960" cy="12700"/>
+            <a:off x="3547872" y="3474720"/>
+            <a:ext cx="2542032" cy="12700"/>
           </a:xfrm>
           <a:prstGeom prst="rect">
             <a:avLst/>
@@ -7510,8 +8051,8 @@
         </p:nvSpPr>
         <p:spPr>
           <a:xfrm>
-            <a:off x="4370832" y="3611880"/>
-            <a:ext cx="3108960" cy="457200"/>
+            <a:off x="3547872" y="3657600"/>
+            <a:ext cx="2542032" cy="457200"/>
           </a:xfrm>
           <a:prstGeom prst="rect">
             <a:avLst/>
@@ -7536,13 +8077,13 @@
               </a:spcAft>
             </a:pPr>
             <a:r>
-              <a:rPr sz="2300" b="0" i="0">
+              <a:rPr sz="2200" b="0" i="0">
                 <a:solidFill>
                   <a:srgbClr val="3B1329"/>
                 </a:solidFill>
                 <a:latin typeface="Georgia"/>
               </a:rPr>
-              <a:t>Consultan</a:t>
+              <a:t>Captura</a:t>
             </a:r>
           </a:p>
         </p:txBody>
@@ -7555,8 +8096,8 @@
         </p:nvSpPr>
         <p:spPr>
           <a:xfrm>
-            <a:off x="4370832" y="4160520"/>
-            <a:ext cx="3108960" cy="1463040"/>
+            <a:off x="3547872" y="4206240"/>
+            <a:ext cx="2542032" cy="1828800"/>
           </a:xfrm>
           <a:prstGeom prst="rect">
             <a:avLst/>
@@ -7571,23 +8112,23 @@
           <a:p>
             <a:pPr algn="l">
               <a:lnSpc>
-                <a:spcPct val="125000"/>
-              </a:lnSpc>
-              <a:spcBef>
-                <a:spcPts val="0"/>
-              </a:spcBef>
-              <a:spcAft>
-                <a:spcPts val="600"/>
-              </a:spcAft>
-            </a:pPr>
-            <a:r>
-              <a:rPr sz="1500" b="0" i="0">
+                <a:spcPct val="122000"/>
+              </a:lnSpc>
+              <a:spcBef>
+                <a:spcPts val="0"/>
+              </a:spcBef>
+              <a:spcAft>
+                <a:spcPts val="600"/>
+              </a:spcAft>
+            </a:pPr>
+            <a:r>
+              <a:rPr sz="1400" b="0" i="0">
                 <a:solidFill>
                   <a:srgbClr val="7A6570"/>
                 </a:solidFill>
                 <a:latin typeface="Segoe UI"/>
               </a:rPr>
-              <a:t>El interesado deja su nombre y teléfono, o te escribe directo por WhatsApp.</a:t>
+              <a:t>Cada interesado deja su nombre y teléfono, o te escribe directo — ordenado, no perdido entre comentarios.</a:t>
             </a:r>
           </a:p>
         </p:txBody>
@@ -7600,7 +8141,7 @@
         </p:nvSpPr>
         <p:spPr>
           <a:xfrm>
-            <a:off x="7891272" y="2560320"/>
+            <a:off x="6245352" y="2651760"/>
             <a:ext cx="914400" cy="640080"/>
           </a:xfrm>
           <a:prstGeom prst="rect">
@@ -7626,7 +8167,7 @@
               </a:spcAft>
             </a:pPr>
             <a:r>
-              <a:rPr sz="4000" b="1" i="0">
+              <a:rPr sz="3800" b="1" i="0">
                 <a:solidFill>
                   <a:srgbClr val="E84A9C"/>
                 </a:solidFill>
@@ -7645,8 +8186,8 @@
         </p:nvSpPr>
         <p:spPr>
           <a:xfrm>
-            <a:off x="7891272" y="3429000"/>
-            <a:ext cx="3108960" cy="12700"/>
+            <a:off x="6245352" y="3474720"/>
+            <a:ext cx="2542032" cy="12700"/>
           </a:xfrm>
           <a:prstGeom prst="rect">
             <a:avLst/>
@@ -7689,8 +8230,8 @@
         </p:nvSpPr>
         <p:spPr>
           <a:xfrm>
-            <a:off x="7891272" y="3611880"/>
-            <a:ext cx="3108960" cy="457200"/>
+            <a:off x="6245352" y="3657600"/>
+            <a:ext cx="2542032" cy="457200"/>
           </a:xfrm>
           <a:prstGeom prst="rect">
             <a:avLst/>
@@ -7715,13 +8256,13 @@
               </a:spcAft>
             </a:pPr>
             <a:r>
-              <a:rPr sz="2300" b="0" i="0">
+              <a:rPr sz="2200" b="0" i="0">
                 <a:solidFill>
                   <a:srgbClr val="3B1329"/>
                 </a:solidFill>
                 <a:latin typeface="Georgia"/>
               </a:rPr>
-              <a:t>Cerrás</a:t>
+              <a:t>Proceso</a:t>
             </a:r>
           </a:p>
         </p:txBody>
@@ -7734,8 +8275,8 @@
         </p:nvSpPr>
         <p:spPr>
           <a:xfrm>
-            <a:off x="7891272" y="4160520"/>
-            <a:ext cx="3108960" cy="1463040"/>
+            <a:off x="6245352" y="4206240"/>
+            <a:ext cx="2542032" cy="1828800"/>
           </a:xfrm>
           <a:prstGeom prst="rect">
             <a:avLst/>
@@ -7750,37 +8291,82 @@
           <a:p>
             <a:pPr algn="l">
               <a:lnSpc>
-                <a:spcPct val="125000"/>
-              </a:lnSpc>
-              <a:spcBef>
-                <a:spcPts val="0"/>
-              </a:spcBef>
-              <a:spcAft>
-                <a:spcPts val="600"/>
-              </a:spcAft>
-            </a:pPr>
-            <a:r>
-              <a:rPr sz="1500" b="0" i="0">
+                <a:spcPct val="122000"/>
+              </a:lnSpc>
+              <a:spcBef>
+                <a:spcPts val="0"/>
+              </a:spcBef>
+              <a:spcAft>
+                <a:spcPts val="600"/>
+              </a:spcAft>
+            </a:pPr>
+            <a:r>
+              <a:rPr sz="1400" b="0" i="0">
                 <a:solidFill>
                   <a:srgbClr val="7A6570"/>
                 </a:solidFill>
                 <a:latin typeface="Segoe UI"/>
               </a:rPr>
-              <a:t>Vos atendés la consulta, coordinás la visita y cerrás la operación.</a:t>
-            </a:r>
-          </a:p>
-        </p:txBody>
-      </p:sp>
-      <p:sp>
-        <p:nvSpPr>
-          <p:cNvPr id="17" name="Rectangle 16"/>
+              <a:t>Ordenamos la respuesta y el seguimiento: rápido, con método y sin que se te enfríe ningún contacto.</a:t>
+            </a:r>
+          </a:p>
+        </p:txBody>
+      </p:sp>
+      <p:sp>
+        <p:nvSpPr>
+          <p:cNvPr id="17" name="TextBox 16"/>
+          <p:cNvSpPr txBox="1"/>
+          <p:nvPr/>
+        </p:nvSpPr>
+        <p:spPr>
+          <a:xfrm>
+            <a:off x="8942832" y="2651760"/>
+            <a:ext cx="914400" cy="640080"/>
+          </a:xfrm>
+          <a:prstGeom prst="rect">
+            <a:avLst/>
+          </a:prstGeom>
+          <a:noFill/>
+        </p:spPr>
+        <p:txBody>
+          <a:bodyPr wrap="square" anchor="t" lIns="0" rIns="0" tIns="0" bIns="0">
+            <a:spAutoFit/>
+          </a:bodyPr>
+          <a:lstStyle/>
+          <a:p>
+            <a:pPr algn="l">
+              <a:lnSpc>
+                <a:spcPct val="100000"/>
+              </a:lnSpc>
+              <a:spcBef>
+                <a:spcPts val="0"/>
+              </a:spcBef>
+              <a:spcAft>
+                <a:spcPts val="600"/>
+              </a:spcAft>
+            </a:pPr>
+            <a:r>
+              <a:rPr sz="3800" b="1" i="0">
+                <a:solidFill>
+                  <a:srgbClr val="E84A9C"/>
+                </a:solidFill>
+                <a:latin typeface="Georgia"/>
+              </a:rPr>
+              <a:t>4</a:t>
+            </a:r>
+          </a:p>
+        </p:txBody>
+      </p:sp>
+      <p:sp>
+        <p:nvSpPr>
+          <p:cNvPr id="18" name="Rectangle 17"/>
           <p:cNvSpPr/>
           <p:nvPr/>
         </p:nvSpPr>
         <p:spPr>
           <a:xfrm>
-            <a:off x="822960" y="6355080"/>
-            <a:ext cx="10543032" cy="12700"/>
+            <a:off x="8942832" y="3474720"/>
+            <a:ext cx="2542032" cy="12700"/>
           </a:xfrm>
           <a:prstGeom prst="rect">
             <a:avLst/>
@@ -7817,7 +8403,141 @@
       </p:sp>
       <p:sp>
         <p:nvSpPr>
-          <p:cNvPr id="18" name="TextBox 17"/>
+          <p:cNvPr id="19" name="TextBox 18"/>
+          <p:cNvSpPr txBox="1"/>
+          <p:nvPr/>
+        </p:nvSpPr>
+        <p:spPr>
+          <a:xfrm>
+            <a:off x="8942832" y="3657600"/>
+            <a:ext cx="2542032" cy="457200"/>
+          </a:xfrm>
+          <a:prstGeom prst="rect">
+            <a:avLst/>
+          </a:prstGeom>
+          <a:noFill/>
+        </p:spPr>
+        <p:txBody>
+          <a:bodyPr wrap="square" anchor="t" lIns="0" rIns="0" tIns="0" bIns="0">
+            <a:spAutoFit/>
+          </a:bodyPr>
+          <a:lstStyle/>
+          <a:p>
+            <a:pPr algn="l">
+              <a:lnSpc>
+                <a:spcPct val="100000"/>
+              </a:lnSpc>
+              <a:spcBef>
+                <a:spcPts val="0"/>
+              </a:spcBef>
+              <a:spcAft>
+                <a:spcPts val="600"/>
+              </a:spcAft>
+            </a:pPr>
+            <a:r>
+              <a:rPr sz="2200" b="0" i="0">
+                <a:solidFill>
+                  <a:srgbClr val="3B1329"/>
+                </a:solidFill>
+                <a:latin typeface="Georgia"/>
+              </a:rPr>
+              <a:t>Medición</a:t>
+            </a:r>
+          </a:p>
+        </p:txBody>
+      </p:sp>
+      <p:sp>
+        <p:nvSpPr>
+          <p:cNvPr id="20" name="TextBox 19"/>
+          <p:cNvSpPr txBox="1"/>
+          <p:nvPr/>
+        </p:nvSpPr>
+        <p:spPr>
+          <a:xfrm>
+            <a:off x="8942832" y="4206240"/>
+            <a:ext cx="2542032" cy="1828800"/>
+          </a:xfrm>
+          <a:prstGeom prst="rect">
+            <a:avLst/>
+          </a:prstGeom>
+          <a:noFill/>
+        </p:spPr>
+        <p:txBody>
+          <a:bodyPr wrap="square" anchor="t" lIns="0" rIns="0" tIns="0" bIns="0">
+            <a:spAutoFit/>
+          </a:bodyPr>
+          <a:lstStyle/>
+          <a:p>
+            <a:pPr algn="l">
+              <a:lnSpc>
+                <a:spcPct val="122000"/>
+              </a:lnSpc>
+              <a:spcBef>
+                <a:spcPts val="0"/>
+              </a:spcBef>
+              <a:spcAft>
+                <a:spcPts val="600"/>
+              </a:spcAft>
+            </a:pPr>
+            <a:r>
+              <a:rPr sz="1400" b="0" i="0">
+                <a:solidFill>
+                  <a:srgbClr val="7A6570"/>
+                </a:solidFill>
+                <a:latin typeface="Segoe UI"/>
+              </a:rPr>
+              <a:t>Sabés cuántas consultas llegaron, cuánto costó cada una y qué pasó con ellas.</a:t>
+            </a:r>
+          </a:p>
+        </p:txBody>
+      </p:sp>
+      <p:sp>
+        <p:nvSpPr>
+          <p:cNvPr id="21" name="Rectangle 20"/>
+          <p:cNvSpPr/>
+          <p:nvPr/>
+        </p:nvSpPr>
+        <p:spPr>
+          <a:xfrm>
+            <a:off x="822960" y="6355080"/>
+            <a:ext cx="10543032" cy="12700"/>
+          </a:xfrm>
+          <a:prstGeom prst="rect">
+            <a:avLst/>
+          </a:prstGeom>
+          <a:solidFill>
+            <a:srgbClr val="F0D9E5"/>
+          </a:solidFill>
+          <a:ln>
+            <a:noFill/>
+          </a:ln>
+          <a:effectLst/>
+        </p:spPr>
+        <p:style>
+          <a:lnRef idx="1">
+            <a:schemeClr val="accent1"/>
+          </a:lnRef>
+          <a:fillRef idx="3">
+            <a:schemeClr val="accent1"/>
+          </a:fillRef>
+          <a:effectRef idx="2">
+            <a:schemeClr val="accent1"/>
+          </a:effectRef>
+          <a:fontRef idx="minor">
+            <a:schemeClr val="lt1"/>
+          </a:fontRef>
+        </p:style>
+        <p:txBody>
+          <a:bodyPr rtlCol="0" anchor="ctr"/>
+          <a:lstStyle/>
+          <a:p>
+            <a:pPr algn="ctr"/>
+          </a:p>
+        </p:txBody>
+      </p:sp>
+      <p:sp>
+        <p:nvSpPr>
+          <p:cNvPr id="22" name="TextBox 21"/>
           <p:cNvSpPr txBox="1"/>
           <p:nvPr/>
         </p:nvSpPr>
@@ -7862,7 +8582,7 @@
       </p:sp>
       <p:sp>
         <p:nvSpPr>
-          <p:cNvPr id="19" name="TextBox 18"/>
+          <p:cNvPr id="23" name="TextBox 22"/>
           <p:cNvSpPr txBox="1"/>
           <p:nvPr/>
         </p:nvSpPr>
@@ -7907,7 +8627,7 @@
       </p:sp>
       <p:sp>
         <p:nvSpPr>
-          <p:cNvPr id="20" name="TextBox 19"/>
+          <p:cNvPr id="24" name="TextBox 23"/>
           <p:cNvSpPr txBox="1"/>
           <p:nvPr/>
         </p:nvSpPr>
@@ -7945,7 +8665,7 @@
                 </a:solidFill>
                 <a:latin typeface="Segoe UI"/>
               </a:rPr>
-              <a:t>5 / 12</a:t>
+              <a:t>5 / 11</a:t>
             </a:r>
           </a:p>
         </p:txBody>
@@ -8030,7 +8750,7 @@
         <p:spPr>
           <a:xfrm>
             <a:off x="822960" y="868680"/>
-            <a:ext cx="10058400" cy="1371600"/>
+            <a:ext cx="10424160" cy="1371600"/>
           </a:xfrm>
           <a:prstGeom prst="rect">
             <a:avLst/>
@@ -8410,7 +9130,7 @@
                 </a:solidFill>
                 <a:latin typeface="Segoe UI"/>
               </a:rPr>
-              <a:t>6 / 12</a:t>
+              <a:t>6 / 11</a:t>
             </a:r>
           </a:p>
         </p:txBody>
@@ -8481,7 +9201,7 @@
                 </a:solidFill>
                 <a:latin typeface="Segoe UI"/>
               </a:rPr>
-              <a:t>PARA EMPEZAR</a:t>
+              <a:t>POR QUÉ YO</a:t>
             </a:r>
           </a:p>
         </p:txBody>
@@ -8495,7 +9215,7 @@
         <p:spPr>
           <a:xfrm>
             <a:off x="822960" y="868680"/>
-            <a:ext cx="10058400" cy="1371600"/>
+            <a:ext cx="10424160" cy="1371600"/>
           </a:xfrm>
           <a:prstGeom prst="rect">
             <a:avLst/>
@@ -8526,7 +9246,7 @@
                 </a:solidFill>
                 <a:latin typeface="Georgia"/>
               </a:rPr>
-              <a:t>Arrancamos con estas propiedades.</a:t>
+              <a:t>No solo sé de anuncios.</a:t>
             </a:r>
           </a:p>
         </p:txBody>
@@ -8575,402 +9295,16 @@
           </a:p>
         </p:txBody>
       </p:sp>
-      <p:pic>
-        <p:nvPicPr>
-          <p:cNvPr id="5" name="Picture 4" descr="casa-juanbjusto-62k.jpg"/>
-          <p:cNvPicPr>
-            <a:picLocks noChangeAspect="1"/>
-          </p:cNvPicPr>
-          <p:nvPr/>
-        </p:nvPicPr>
-        <p:blipFill>
-          <a:blip r:embed="rId2"/>
-          <a:stretch>
-            <a:fillRect/>
-          </a:stretch>
-        </p:blipFill>
-        <p:spPr>
-          <a:xfrm>
-            <a:off x="850392" y="2331720"/>
-            <a:ext cx="2487168" cy="1865376"/>
-          </a:xfrm>
-          <a:prstGeom prst="rect">
-            <a:avLst/>
-          </a:prstGeom>
-        </p:spPr>
-      </p:pic>
-      <p:sp>
-        <p:nvSpPr>
-          <p:cNvPr id="6" name="TextBox 5"/>
-          <p:cNvSpPr txBox="1"/>
-          <p:nvPr/>
-        </p:nvSpPr>
-        <p:spPr>
-          <a:xfrm>
-            <a:off x="850392" y="4306824"/>
-            <a:ext cx="2487168" cy="457200"/>
-          </a:xfrm>
-          <a:prstGeom prst="rect">
-            <a:avLst/>
-          </a:prstGeom>
-          <a:noFill/>
-        </p:spPr>
-        <p:txBody>
-          <a:bodyPr wrap="square" anchor="t" lIns="0" rIns="0" tIns="0" bIns="0">
-            <a:spAutoFit/>
-          </a:bodyPr>
-          <a:lstStyle/>
-          <a:p>
-            <a:pPr algn="l">
-              <a:lnSpc>
-                <a:spcPct val="105000"/>
-              </a:lnSpc>
-              <a:spcBef>
-                <a:spcPts val="0"/>
-              </a:spcBef>
-              <a:spcAft>
-                <a:spcPts val="600"/>
-              </a:spcAft>
-            </a:pPr>
-            <a:r>
-              <a:rPr sz="1600" b="0" i="0">
-                <a:solidFill>
-                  <a:srgbClr val="26121D"/>
-                </a:solidFill>
-                <a:latin typeface="Georgia"/>
-              </a:rPr>
-              <a:t>Casa Av. Juan B. Justo</a:t>
-            </a:r>
-          </a:p>
-        </p:txBody>
-      </p:sp>
-      <p:sp>
-        <p:nvSpPr>
-          <p:cNvPr id="7" name="TextBox 6"/>
-          <p:cNvSpPr txBox="1"/>
-          <p:nvPr/>
-        </p:nvSpPr>
-        <p:spPr>
-          <a:xfrm>
-            <a:off x="850392" y="4764024"/>
-            <a:ext cx="2487168" cy="320040"/>
-          </a:xfrm>
-          <a:prstGeom prst="rect">
-            <a:avLst/>
-          </a:prstGeom>
-          <a:noFill/>
-        </p:spPr>
-        <p:txBody>
-          <a:bodyPr wrap="square" anchor="t" lIns="0" rIns="0" tIns="0" bIns="0">
-            <a:spAutoFit/>
-          </a:bodyPr>
-          <a:lstStyle/>
-          <a:p>
-            <a:pPr algn="l">
-              <a:lnSpc>
-                <a:spcPct val="100000"/>
-              </a:lnSpc>
-              <a:spcBef>
-                <a:spcPts val="0"/>
-              </a:spcBef>
-              <a:spcAft>
-                <a:spcPts val="600"/>
-              </a:spcAft>
-            </a:pPr>
-            <a:r>
-              <a:rPr sz="1700" b="1" i="0">
-                <a:solidFill>
-                  <a:srgbClr val="B02467"/>
-                </a:solidFill>
-                <a:latin typeface="Segoe UI"/>
-              </a:rPr>
-              <a:t>U$S 62.000</a:t>
-            </a:r>
-          </a:p>
-        </p:txBody>
-      </p:sp>
-      <p:sp>
-        <p:nvSpPr>
-          <p:cNvPr id="8" name="TextBox 7"/>
-          <p:cNvSpPr txBox="1"/>
-          <p:nvPr/>
-        </p:nvSpPr>
-        <p:spPr>
-          <a:xfrm>
-            <a:off x="850392" y="5129784"/>
-            <a:ext cx="2487168" cy="320040"/>
-          </a:xfrm>
-          <a:prstGeom prst="rect">
-            <a:avLst/>
-          </a:prstGeom>
-          <a:noFill/>
-        </p:spPr>
-        <p:txBody>
-          <a:bodyPr wrap="square" anchor="t" lIns="0" rIns="0" tIns="0" bIns="0">
-            <a:spAutoFit/>
-          </a:bodyPr>
-          <a:lstStyle/>
-          <a:p>
-            <a:pPr algn="l">
-              <a:lnSpc>
-                <a:spcPct val="100000"/>
-              </a:lnSpc>
-              <a:spcBef>
-                <a:spcPts val="0"/>
-              </a:spcBef>
-              <a:spcAft>
-                <a:spcPts val="600"/>
-              </a:spcAft>
-            </a:pPr>
-            <a:r>
-              <a:rPr sz="1100" b="0" i="0" spc="50">
-                <a:solidFill>
-                  <a:srgbClr val="7A6570"/>
-                </a:solidFill>
-                <a:latin typeface="Segoe UI"/>
-              </a:rPr>
-              <a:t>LISTA PARA HABITAR</a:t>
-            </a:r>
-          </a:p>
-        </p:txBody>
-      </p:sp>
-      <p:pic>
-        <p:nvPicPr>
-          <p:cNvPr id="9" name="Picture 8" descr="casas-a-estrenar.jpg"/>
-          <p:cNvPicPr>
-            <a:picLocks noChangeAspect="1"/>
-          </p:cNvPicPr>
-          <p:nvPr/>
-        </p:nvPicPr>
-        <p:blipFill>
-          <a:blip r:embed="rId3"/>
-          <a:stretch>
-            <a:fillRect/>
-          </a:stretch>
-        </p:blipFill>
-        <p:spPr>
-          <a:xfrm>
-            <a:off x="3584448" y="2331720"/>
-            <a:ext cx="2487168" cy="1865376"/>
-          </a:xfrm>
-          <a:prstGeom prst="rect">
-            <a:avLst/>
-          </a:prstGeom>
-        </p:spPr>
-      </p:pic>
-      <p:sp>
-        <p:nvSpPr>
-          <p:cNvPr id="10" name="TextBox 9"/>
-          <p:cNvSpPr txBox="1"/>
-          <p:nvPr/>
-        </p:nvSpPr>
-        <p:spPr>
-          <a:xfrm>
-            <a:off x="3584448" y="4306824"/>
-            <a:ext cx="2487168" cy="457200"/>
-          </a:xfrm>
-          <a:prstGeom prst="rect">
-            <a:avLst/>
-          </a:prstGeom>
-          <a:noFill/>
-        </p:spPr>
-        <p:txBody>
-          <a:bodyPr wrap="square" anchor="t" lIns="0" rIns="0" tIns="0" bIns="0">
-            <a:spAutoFit/>
-          </a:bodyPr>
-          <a:lstStyle/>
-          <a:p>
-            <a:pPr algn="l">
-              <a:lnSpc>
-                <a:spcPct val="105000"/>
-              </a:lnSpc>
-              <a:spcBef>
-                <a:spcPts val="0"/>
-              </a:spcBef>
-              <a:spcAft>
-                <a:spcPts val="600"/>
-              </a:spcAft>
-            </a:pPr>
-            <a:r>
-              <a:rPr sz="1600" b="0" i="0">
-                <a:solidFill>
-                  <a:srgbClr val="26121D"/>
-                </a:solidFill>
-                <a:latin typeface="Georgia"/>
-              </a:rPr>
-              <a:t>Casas a estrenar · PH</a:t>
-            </a:r>
-          </a:p>
-        </p:txBody>
-      </p:sp>
-      <p:sp>
-        <p:nvSpPr>
-          <p:cNvPr id="11" name="TextBox 10"/>
-          <p:cNvSpPr txBox="1"/>
-          <p:nvPr/>
-        </p:nvSpPr>
-        <p:spPr>
-          <a:xfrm>
-            <a:off x="3584448" y="4764024"/>
-            <a:ext cx="2487168" cy="320040"/>
-          </a:xfrm>
-          <a:prstGeom prst="rect">
-            <a:avLst/>
-          </a:prstGeom>
-          <a:noFill/>
-        </p:spPr>
-        <p:txBody>
-          <a:bodyPr wrap="square" anchor="t" lIns="0" rIns="0" tIns="0" bIns="0">
-            <a:spAutoFit/>
-          </a:bodyPr>
-          <a:lstStyle/>
-          <a:p>
-            <a:pPr algn="l">
-              <a:lnSpc>
-                <a:spcPct val="100000"/>
-              </a:lnSpc>
-              <a:spcBef>
-                <a:spcPts val="0"/>
-              </a:spcBef>
-              <a:spcAft>
-                <a:spcPts val="600"/>
-              </a:spcAft>
-            </a:pPr>
-            <a:r>
-              <a:rPr sz="1700" b="1" i="0">
-                <a:solidFill>
-                  <a:srgbClr val="B02467"/>
-                </a:solidFill>
-                <a:latin typeface="Segoe UI"/>
-              </a:rPr>
-              <a:t>A estrenar</a:t>
-            </a:r>
-          </a:p>
-        </p:txBody>
-      </p:sp>
-      <p:sp>
-        <p:nvSpPr>
-          <p:cNvPr id="12" name="TextBox 11"/>
-          <p:cNvSpPr txBox="1"/>
-          <p:nvPr/>
-        </p:nvSpPr>
-        <p:spPr>
-          <a:xfrm>
-            <a:off x="3584448" y="5129784"/>
-            <a:ext cx="2487168" cy="320040"/>
-          </a:xfrm>
-          <a:prstGeom prst="rect">
-            <a:avLst/>
-          </a:prstGeom>
-          <a:noFill/>
-        </p:spPr>
-        <p:txBody>
-          <a:bodyPr wrap="square" anchor="t" lIns="0" rIns="0" tIns="0" bIns="0">
-            <a:spAutoFit/>
-          </a:bodyPr>
-          <a:lstStyle/>
-          <a:p>
-            <a:pPr algn="l">
-              <a:lnSpc>
-                <a:spcPct val="100000"/>
-              </a:lnSpc>
-              <a:spcBef>
-                <a:spcPts val="0"/>
-              </a:spcBef>
-              <a:spcAft>
-                <a:spcPts val="600"/>
-              </a:spcAft>
-            </a:pPr>
-            <a:r>
-              <a:rPr sz="1100" b="0" i="0" spc="50">
-                <a:solidFill>
-                  <a:srgbClr val="7A6570"/>
-                </a:solidFill>
-                <a:latin typeface="Segoe UI"/>
-              </a:rPr>
-              <a:t>OBRA NUEVA</a:t>
-            </a:r>
-          </a:p>
-        </p:txBody>
-      </p:sp>
-      <p:pic>
-        <p:nvPicPr>
-          <p:cNvPr id="13" name="Picture 12" descr="lotes-la-mata.jpg"/>
-          <p:cNvPicPr>
-            <a:picLocks noChangeAspect="1"/>
-          </p:cNvPicPr>
-          <p:nvPr/>
-        </p:nvPicPr>
-        <p:blipFill>
-          <a:blip r:embed="rId4"/>
-          <a:stretch>
-            <a:fillRect/>
-          </a:stretch>
-        </p:blipFill>
-        <p:spPr>
-          <a:xfrm>
-            <a:off x="6318504" y="2331720"/>
-            <a:ext cx="2487168" cy="1865376"/>
-          </a:xfrm>
-          <a:prstGeom prst="rect">
-            <a:avLst/>
-          </a:prstGeom>
-        </p:spPr>
-      </p:pic>
-      <p:sp>
-        <p:nvSpPr>
-          <p:cNvPr id="14" name="Rectangle 13"/>
+      <p:sp>
+        <p:nvSpPr>
+          <p:cNvPr id="5" name="Rectangle 4"/>
           <p:cNvSpPr/>
           <p:nvPr/>
         </p:nvSpPr>
         <p:spPr>
           <a:xfrm>
-            <a:off x="6318504" y="2331720"/>
-            <a:ext cx="2487168" cy="1865376"/>
-          </a:xfrm>
-          <a:prstGeom prst="rect">
-            <a:avLst/>
-          </a:prstGeom>
-          <a:noFill/>
-          <a:ln w="31750">
-            <a:solidFill>
-              <a:srgbClr val="E84A9C"/>
-            </a:solidFill>
-          </a:ln>
-          <a:effectLst/>
-        </p:spPr>
-        <p:style>
-          <a:lnRef idx="1">
-            <a:schemeClr val="accent1"/>
-          </a:lnRef>
-          <a:fillRef idx="3">
-            <a:schemeClr val="accent1"/>
-          </a:fillRef>
-          <a:effectRef idx="2">
-            <a:schemeClr val="accent1"/>
-          </a:effectRef>
-          <a:fontRef idx="minor">
-            <a:schemeClr val="lt1"/>
-          </a:fontRef>
-        </p:style>
-        <p:txBody>
-          <a:bodyPr rtlCol="0" anchor="ctr"/>
-          <a:lstStyle/>
-          <a:p>
-            <a:pPr algn="ctr"/>
-          </a:p>
-        </p:txBody>
-      </p:sp>
-      <p:sp>
-        <p:nvSpPr>
-          <p:cNvPr id="15" name="Rectangle 14"/>
-          <p:cNvSpPr/>
-          <p:nvPr/>
-        </p:nvSpPr>
-        <p:spPr>
-          <a:xfrm>
-            <a:off x="6318504" y="2331720"/>
-            <a:ext cx="1051560" cy="310896"/>
+            <a:off x="850392" y="2606040"/>
+            <a:ext cx="31750" cy="1325880"/>
           </a:xfrm>
           <a:prstGeom prst="rect">
             <a:avLst/>
@@ -8998,18 +9332,456 @@
           </a:fontRef>
         </p:style>
         <p:txBody>
-          <a:bodyPr rtlCol="0" anchor="ctr" lIns="50800" tIns="12700" bIns="12700"/>
+          <a:bodyPr rtlCol="0" anchor="ctr"/>
           <a:lstStyle/>
           <a:p>
             <a:pPr algn="ctr"/>
-            <a:r>
-              <a:rPr sz="1000" b="1">
-                <a:solidFill>
-                  <a:srgbClr val="FFFFFF"/>
+          </a:p>
+        </p:txBody>
+      </p:sp>
+      <p:sp>
+        <p:nvSpPr>
+          <p:cNvPr id="6" name="TextBox 5"/>
+          <p:cNvSpPr txBox="1"/>
+          <p:nvPr/>
+        </p:nvSpPr>
+        <p:spPr>
+          <a:xfrm>
+            <a:off x="1051560" y="2606040"/>
+            <a:ext cx="4754880" cy="457200"/>
+          </a:xfrm>
+          <a:prstGeom prst="rect">
+            <a:avLst/>
+          </a:prstGeom>
+          <a:noFill/>
+        </p:spPr>
+        <p:txBody>
+          <a:bodyPr wrap="square" anchor="t" lIns="0" rIns="0" tIns="0" bIns="0">
+            <a:spAutoFit/>
+          </a:bodyPr>
+          <a:lstStyle/>
+          <a:p>
+            <a:pPr algn="l">
+              <a:lnSpc>
+                <a:spcPct val="100000"/>
+              </a:lnSpc>
+              <a:spcBef>
+                <a:spcPts val="0"/>
+              </a:spcBef>
+              <a:spcAft>
+                <a:spcPts val="600"/>
+              </a:spcAft>
+            </a:pPr>
+            <a:r>
+              <a:rPr sz="2300" b="0" i="0">
+                <a:solidFill>
+                  <a:srgbClr val="3B1329"/>
+                </a:solidFill>
+                <a:latin typeface="Georgia"/>
+              </a:rPr>
+              <a:t>Publicidad que llega</a:t>
+            </a:r>
+          </a:p>
+        </p:txBody>
+      </p:sp>
+      <p:sp>
+        <p:nvSpPr>
+          <p:cNvPr id="7" name="TextBox 6"/>
+          <p:cNvSpPr txBox="1"/>
+          <p:nvPr/>
+        </p:nvSpPr>
+        <p:spPr>
+          <a:xfrm>
+            <a:off x="1051560" y="3108960"/>
+            <a:ext cx="4754880" cy="1097280"/>
+          </a:xfrm>
+          <a:prstGeom prst="rect">
+            <a:avLst/>
+          </a:prstGeom>
+          <a:noFill/>
+        </p:spPr>
+        <p:txBody>
+          <a:bodyPr wrap="square" anchor="t" lIns="0" rIns="0" tIns="0" bIns="0">
+            <a:spAutoFit/>
+          </a:bodyPr>
+          <a:lstStyle/>
+          <a:p>
+            <a:pPr algn="l">
+              <a:lnSpc>
+                <a:spcPct val="122000"/>
+              </a:lnSpc>
+              <a:spcBef>
+                <a:spcPts val="0"/>
+              </a:spcBef>
+              <a:spcAft>
+                <a:spcPts val="600"/>
+              </a:spcAft>
+            </a:pPr>
+            <a:r>
+              <a:rPr sz="1500" b="0" i="0">
+                <a:solidFill>
+                  <a:srgbClr val="7A6570"/>
                 </a:solidFill>
                 <a:latin typeface="Segoe UI"/>
               </a:rPr>
-              <a:t>FINANCIA</a:t>
+              <a:t>Distribución paga bien segmentada a quien busca en tu zona — no 'boostear' por boostear.</a:t>
+            </a:r>
+          </a:p>
+        </p:txBody>
+      </p:sp>
+      <p:sp>
+        <p:nvSpPr>
+          <p:cNvPr id="8" name="Rectangle 7"/>
+          <p:cNvSpPr/>
+          <p:nvPr/>
+        </p:nvSpPr>
+        <p:spPr>
+          <a:xfrm>
+            <a:off x="6245352" y="2606040"/>
+            <a:ext cx="31750" cy="1325880"/>
+          </a:xfrm>
+          <a:prstGeom prst="rect">
+            <a:avLst/>
+          </a:prstGeom>
+          <a:solidFill>
+            <a:srgbClr val="E84A9C"/>
+          </a:solidFill>
+          <a:ln>
+            <a:noFill/>
+          </a:ln>
+          <a:effectLst/>
+        </p:spPr>
+        <p:style>
+          <a:lnRef idx="1">
+            <a:schemeClr val="accent1"/>
+          </a:lnRef>
+          <a:fillRef idx="3">
+            <a:schemeClr val="accent1"/>
+          </a:fillRef>
+          <a:effectRef idx="2">
+            <a:schemeClr val="accent1"/>
+          </a:effectRef>
+          <a:fontRef idx="minor">
+            <a:schemeClr val="lt1"/>
+          </a:fontRef>
+        </p:style>
+        <p:txBody>
+          <a:bodyPr rtlCol="0" anchor="ctr"/>
+          <a:lstStyle/>
+          <a:p>
+            <a:pPr algn="ctr"/>
+          </a:p>
+        </p:txBody>
+      </p:sp>
+      <p:sp>
+        <p:nvSpPr>
+          <p:cNvPr id="9" name="TextBox 8"/>
+          <p:cNvSpPr txBox="1"/>
+          <p:nvPr/>
+        </p:nvSpPr>
+        <p:spPr>
+          <a:xfrm>
+            <a:off x="6446520" y="2606040"/>
+            <a:ext cx="4754880" cy="457200"/>
+          </a:xfrm>
+          <a:prstGeom prst="rect">
+            <a:avLst/>
+          </a:prstGeom>
+          <a:noFill/>
+        </p:spPr>
+        <p:txBody>
+          <a:bodyPr wrap="square" anchor="t" lIns="0" rIns="0" tIns="0" bIns="0">
+            <a:spAutoFit/>
+          </a:bodyPr>
+          <a:lstStyle/>
+          <a:p>
+            <a:pPr algn="l">
+              <a:lnSpc>
+                <a:spcPct val="100000"/>
+              </a:lnSpc>
+              <a:spcBef>
+                <a:spcPts val="0"/>
+              </a:spcBef>
+              <a:spcAft>
+                <a:spcPts val="600"/>
+              </a:spcAft>
+            </a:pPr>
+            <a:r>
+              <a:rPr sz="2300" b="0" i="0">
+                <a:solidFill>
+                  <a:srgbClr val="3B1329"/>
+                </a:solidFill>
+                <a:latin typeface="Georgia"/>
+              </a:rPr>
+              <a:t>Procesos de venta</a:t>
+            </a:r>
+          </a:p>
+        </p:txBody>
+      </p:sp>
+      <p:sp>
+        <p:nvSpPr>
+          <p:cNvPr id="10" name="TextBox 9"/>
+          <p:cNvSpPr txBox="1"/>
+          <p:nvPr/>
+        </p:nvSpPr>
+        <p:spPr>
+          <a:xfrm>
+            <a:off x="6446520" y="3108960"/>
+            <a:ext cx="4754880" cy="1097280"/>
+          </a:xfrm>
+          <a:prstGeom prst="rect">
+            <a:avLst/>
+          </a:prstGeom>
+          <a:noFill/>
+        </p:spPr>
+        <p:txBody>
+          <a:bodyPr wrap="square" anchor="t" lIns="0" rIns="0" tIns="0" bIns="0">
+            <a:spAutoFit/>
+          </a:bodyPr>
+          <a:lstStyle/>
+          <a:p>
+            <a:pPr algn="l">
+              <a:lnSpc>
+                <a:spcPct val="122000"/>
+              </a:lnSpc>
+              <a:spcBef>
+                <a:spcPts val="0"/>
+              </a:spcBef>
+              <a:spcAft>
+                <a:spcPts val="600"/>
+              </a:spcAft>
+            </a:pPr>
+            <a:r>
+              <a:rPr sz="1500" b="0" i="0">
+                <a:solidFill>
+                  <a:srgbClr val="7A6570"/>
+                </a:solidFill>
+                <a:latin typeface="Segoe UI"/>
+              </a:rPr>
+              <a:t>Cómo responder, con qué guion y cómo hacer seguimiento para que la consulta termine en visita.</a:t>
+            </a:r>
+          </a:p>
+        </p:txBody>
+      </p:sp>
+      <p:sp>
+        <p:nvSpPr>
+          <p:cNvPr id="11" name="Rectangle 10"/>
+          <p:cNvSpPr/>
+          <p:nvPr/>
+        </p:nvSpPr>
+        <p:spPr>
+          <a:xfrm>
+            <a:off x="850392" y="4297680"/>
+            <a:ext cx="31750" cy="1325880"/>
+          </a:xfrm>
+          <a:prstGeom prst="rect">
+            <a:avLst/>
+          </a:prstGeom>
+          <a:solidFill>
+            <a:srgbClr val="E84A9C"/>
+          </a:solidFill>
+          <a:ln>
+            <a:noFill/>
+          </a:ln>
+          <a:effectLst/>
+        </p:spPr>
+        <p:style>
+          <a:lnRef idx="1">
+            <a:schemeClr val="accent1"/>
+          </a:lnRef>
+          <a:fillRef idx="3">
+            <a:schemeClr val="accent1"/>
+          </a:fillRef>
+          <a:effectRef idx="2">
+            <a:schemeClr val="accent1"/>
+          </a:effectRef>
+          <a:fontRef idx="minor">
+            <a:schemeClr val="lt1"/>
+          </a:fontRef>
+        </p:style>
+        <p:txBody>
+          <a:bodyPr rtlCol="0" anchor="ctr"/>
+          <a:lstStyle/>
+          <a:p>
+            <a:pPr algn="ctr"/>
+          </a:p>
+        </p:txBody>
+      </p:sp>
+      <p:sp>
+        <p:nvSpPr>
+          <p:cNvPr id="12" name="TextBox 11"/>
+          <p:cNvSpPr txBox="1"/>
+          <p:nvPr/>
+        </p:nvSpPr>
+        <p:spPr>
+          <a:xfrm>
+            <a:off x="1051560" y="4297680"/>
+            <a:ext cx="4754880" cy="457200"/>
+          </a:xfrm>
+          <a:prstGeom prst="rect">
+            <a:avLst/>
+          </a:prstGeom>
+          <a:noFill/>
+        </p:spPr>
+        <p:txBody>
+          <a:bodyPr wrap="square" anchor="t" lIns="0" rIns="0" tIns="0" bIns="0">
+            <a:spAutoFit/>
+          </a:bodyPr>
+          <a:lstStyle/>
+          <a:p>
+            <a:pPr algn="l">
+              <a:lnSpc>
+                <a:spcPct val="100000"/>
+              </a:lnSpc>
+              <a:spcBef>
+                <a:spcPts val="0"/>
+              </a:spcBef>
+              <a:spcAft>
+                <a:spcPts val="600"/>
+              </a:spcAft>
+            </a:pPr>
+            <a:r>
+              <a:rPr sz="2300" b="0" i="0">
+                <a:solidFill>
+                  <a:srgbClr val="3B1329"/>
+                </a:solidFill>
+                <a:latin typeface="Georgia"/>
+              </a:rPr>
+              <a:t>Contenido que convierte</a:t>
+            </a:r>
+          </a:p>
+        </p:txBody>
+      </p:sp>
+      <p:sp>
+        <p:nvSpPr>
+          <p:cNvPr id="13" name="TextBox 12"/>
+          <p:cNvSpPr txBox="1"/>
+          <p:nvPr/>
+        </p:nvSpPr>
+        <p:spPr>
+          <a:xfrm>
+            <a:off x="1051560" y="4800600"/>
+            <a:ext cx="4754880" cy="1097280"/>
+          </a:xfrm>
+          <a:prstGeom prst="rect">
+            <a:avLst/>
+          </a:prstGeom>
+          <a:noFill/>
+        </p:spPr>
+        <p:txBody>
+          <a:bodyPr wrap="square" anchor="t" lIns="0" rIns="0" tIns="0" bIns="0">
+            <a:spAutoFit/>
+          </a:bodyPr>
+          <a:lstStyle/>
+          <a:p>
+            <a:pPr algn="l">
+              <a:lnSpc>
+                <a:spcPct val="122000"/>
+              </a:lnSpc>
+              <a:spcBef>
+                <a:spcPts val="0"/>
+              </a:spcBef>
+              <a:spcAft>
+                <a:spcPts val="600"/>
+              </a:spcAft>
+            </a:pPr>
+            <a:r>
+              <a:rPr sz="1500" b="0" i="0">
+                <a:solidFill>
+                  <a:srgbClr val="7A6570"/>
+                </a:solidFill>
+                <a:latin typeface="Segoe UI"/>
+              </a:rPr>
+              <a:t>Tu contenido ya es bueno; me aseguro de que trabaje y venda, no que solo se vea lindo.</a:t>
+            </a:r>
+          </a:p>
+        </p:txBody>
+      </p:sp>
+      <p:sp>
+        <p:nvSpPr>
+          <p:cNvPr id="14" name="Rectangle 13"/>
+          <p:cNvSpPr/>
+          <p:nvPr/>
+        </p:nvSpPr>
+        <p:spPr>
+          <a:xfrm>
+            <a:off x="6245352" y="4297680"/>
+            <a:ext cx="31750" cy="1325880"/>
+          </a:xfrm>
+          <a:prstGeom prst="rect">
+            <a:avLst/>
+          </a:prstGeom>
+          <a:solidFill>
+            <a:srgbClr val="E84A9C"/>
+          </a:solidFill>
+          <a:ln>
+            <a:noFill/>
+          </a:ln>
+          <a:effectLst/>
+        </p:spPr>
+        <p:style>
+          <a:lnRef idx="1">
+            <a:schemeClr val="accent1"/>
+          </a:lnRef>
+          <a:fillRef idx="3">
+            <a:schemeClr val="accent1"/>
+          </a:fillRef>
+          <a:effectRef idx="2">
+            <a:schemeClr val="accent1"/>
+          </a:effectRef>
+          <a:fontRef idx="minor">
+            <a:schemeClr val="lt1"/>
+          </a:fontRef>
+        </p:style>
+        <p:txBody>
+          <a:bodyPr rtlCol="0" anchor="ctr"/>
+          <a:lstStyle/>
+          <a:p>
+            <a:pPr algn="ctr"/>
+          </a:p>
+        </p:txBody>
+      </p:sp>
+      <p:sp>
+        <p:nvSpPr>
+          <p:cNvPr id="15" name="TextBox 14"/>
+          <p:cNvSpPr txBox="1"/>
+          <p:nvPr/>
+        </p:nvSpPr>
+        <p:spPr>
+          <a:xfrm>
+            <a:off x="6446520" y="4297680"/>
+            <a:ext cx="4754880" cy="457200"/>
+          </a:xfrm>
+          <a:prstGeom prst="rect">
+            <a:avLst/>
+          </a:prstGeom>
+          <a:noFill/>
+        </p:spPr>
+        <p:txBody>
+          <a:bodyPr wrap="square" anchor="t" lIns="0" rIns="0" tIns="0" bIns="0">
+            <a:spAutoFit/>
+          </a:bodyPr>
+          <a:lstStyle/>
+          <a:p>
+            <a:pPr algn="l">
+              <a:lnSpc>
+                <a:spcPct val="100000"/>
+              </a:lnSpc>
+              <a:spcBef>
+                <a:spcPts val="0"/>
+              </a:spcBef>
+              <a:spcAft>
+                <a:spcPts val="600"/>
+              </a:spcAft>
+            </a:pPr>
+            <a:r>
+              <a:rPr sz="2300" b="0" i="0">
+                <a:solidFill>
+                  <a:srgbClr val="3B1329"/>
+                </a:solidFill>
+                <a:latin typeface="Georgia"/>
+              </a:rPr>
+              <a:t>Comunicación</a:t>
             </a:r>
           </a:p>
         </p:txBody>
@@ -9022,8 +9794,8 @@
         </p:nvSpPr>
         <p:spPr>
           <a:xfrm>
-            <a:off x="6318504" y="4306824"/>
-            <a:ext cx="2487168" cy="457200"/>
+            <a:off x="6446520" y="4800600"/>
+            <a:ext cx="4754880" cy="1097280"/>
           </a:xfrm>
           <a:prstGeom prst="rect">
             <a:avLst/>
@@ -9038,324 +9810,30 @@
           <a:p>
             <a:pPr algn="l">
               <a:lnSpc>
-                <a:spcPct val="105000"/>
-              </a:lnSpc>
-              <a:spcBef>
-                <a:spcPts val="0"/>
-              </a:spcBef>
-              <a:spcAft>
-                <a:spcPts val="600"/>
-              </a:spcAft>
-            </a:pPr>
-            <a:r>
-              <a:rPr sz="1600" b="0" i="0">
-                <a:solidFill>
-                  <a:srgbClr val="26121D"/>
-                </a:solidFill>
-                <a:latin typeface="Georgia"/>
-              </a:rPr>
-              <a:t>Lotes Barrio La Mata</a:t>
-            </a:r>
-          </a:p>
-        </p:txBody>
-      </p:sp>
-      <p:sp>
-        <p:nvSpPr>
-          <p:cNvPr id="17" name="TextBox 16"/>
-          <p:cNvSpPr txBox="1"/>
-          <p:nvPr/>
-        </p:nvSpPr>
-        <p:spPr>
-          <a:xfrm>
-            <a:off x="6318504" y="4764024"/>
-            <a:ext cx="2487168" cy="320040"/>
-          </a:xfrm>
-          <a:prstGeom prst="rect">
-            <a:avLst/>
-          </a:prstGeom>
-          <a:noFill/>
-        </p:spPr>
-        <p:txBody>
-          <a:bodyPr wrap="square" anchor="t" lIns="0" rIns="0" tIns="0" bIns="0">
-            <a:spAutoFit/>
-          </a:bodyPr>
-          <a:lstStyle/>
-          <a:p>
-            <a:pPr algn="l">
-              <a:lnSpc>
-                <a:spcPct val="100000"/>
-              </a:lnSpc>
-              <a:spcBef>
-                <a:spcPts val="0"/>
-              </a:spcBef>
-              <a:spcAft>
-                <a:spcPts val="600"/>
-              </a:spcAft>
-            </a:pPr>
-            <a:r>
-              <a:rPr sz="1700" b="1" i="0">
-                <a:solidFill>
-                  <a:srgbClr val="B02467"/>
+                <a:spcPct val="122000"/>
+              </a:lnSpc>
+              <a:spcBef>
+                <a:spcPts val="0"/>
+              </a:spcBef>
+              <a:spcAft>
+                <a:spcPts val="600"/>
+              </a:spcAft>
+            </a:pPr>
+            <a:r>
+              <a:rPr sz="1500" b="0" i="0">
+                <a:solidFill>
+                  <a:srgbClr val="7A6570"/>
                 </a:solidFill>
                 <a:latin typeface="Segoe UI"/>
               </a:rPr>
-              <a:t>Desde U$S 57.000</a:t>
-            </a:r>
-          </a:p>
-        </p:txBody>
-      </p:sp>
-      <p:sp>
-        <p:nvSpPr>
-          <p:cNvPr id="18" name="TextBox 17"/>
-          <p:cNvSpPr txBox="1"/>
-          <p:nvPr/>
-        </p:nvSpPr>
-        <p:spPr>
-          <a:xfrm>
-            <a:off x="6318504" y="5129784"/>
-            <a:ext cx="2487168" cy="320040"/>
-          </a:xfrm>
-          <a:prstGeom prst="rect">
-            <a:avLst/>
-          </a:prstGeom>
-          <a:noFill/>
-        </p:spPr>
-        <p:txBody>
-          <a:bodyPr wrap="square" anchor="t" lIns="0" rIns="0" tIns="0" bIns="0">
-            <a:spAutoFit/>
-          </a:bodyPr>
-          <a:lstStyle/>
-          <a:p>
-            <a:pPr algn="l">
-              <a:lnSpc>
-                <a:spcPct val="100000"/>
-              </a:lnSpc>
-              <a:spcBef>
-                <a:spcPts val="0"/>
-              </a:spcBef>
-              <a:spcAft>
-                <a:spcPts val="600"/>
-              </a:spcAft>
-            </a:pPr>
-            <a:r>
-              <a:rPr sz="1100" b="0" i="0" spc="50">
-                <a:solidFill>
-                  <a:srgbClr val="7A6570"/>
-                </a:solidFill>
-                <a:latin typeface="Segoe UI"/>
-              </a:rPr>
-              <a:t>INVERSIÓN</a:t>
-            </a:r>
-          </a:p>
-        </p:txBody>
-      </p:sp>
-      <p:pic>
-        <p:nvPicPr>
-          <p:cNvPr id="19" name="Picture 18" descr="casa-3dorm-primerajunta.jpg"/>
-          <p:cNvPicPr>
-            <a:picLocks noChangeAspect="1"/>
-          </p:cNvPicPr>
-          <p:nvPr/>
-        </p:nvPicPr>
-        <p:blipFill>
-          <a:blip r:embed="rId5"/>
-          <a:stretch>
-            <a:fillRect/>
-          </a:stretch>
-        </p:blipFill>
-        <p:spPr>
-          <a:xfrm>
-            <a:off x="9052560" y="2331720"/>
-            <a:ext cx="2487168" cy="1865376"/>
-          </a:xfrm>
-          <a:prstGeom prst="rect">
-            <a:avLst/>
-          </a:prstGeom>
-        </p:spPr>
-      </p:pic>
-      <p:sp>
-        <p:nvSpPr>
-          <p:cNvPr id="20" name="TextBox 19"/>
-          <p:cNvSpPr txBox="1"/>
-          <p:nvPr/>
-        </p:nvSpPr>
-        <p:spPr>
-          <a:xfrm>
-            <a:off x="9052560" y="4306824"/>
-            <a:ext cx="2487168" cy="457200"/>
-          </a:xfrm>
-          <a:prstGeom prst="rect">
-            <a:avLst/>
-          </a:prstGeom>
-          <a:noFill/>
-        </p:spPr>
-        <p:txBody>
-          <a:bodyPr wrap="square" anchor="t" lIns="0" rIns="0" tIns="0" bIns="0">
-            <a:spAutoFit/>
-          </a:bodyPr>
-          <a:lstStyle/>
-          <a:p>
-            <a:pPr algn="l">
-              <a:lnSpc>
-                <a:spcPct val="105000"/>
-              </a:lnSpc>
-              <a:spcBef>
-                <a:spcPts val="0"/>
-              </a:spcBef>
-              <a:spcAft>
-                <a:spcPts val="600"/>
-              </a:spcAft>
-            </a:pPr>
-            <a:r>
-              <a:rPr sz="1600" b="0" i="0">
-                <a:solidFill>
-                  <a:srgbClr val="26121D"/>
-                </a:solidFill>
-                <a:latin typeface="Georgia"/>
-              </a:rPr>
-              <a:t>Casa Primera Junta</a:t>
-            </a:r>
-          </a:p>
-        </p:txBody>
-      </p:sp>
-      <p:sp>
-        <p:nvSpPr>
-          <p:cNvPr id="21" name="TextBox 20"/>
-          <p:cNvSpPr txBox="1"/>
-          <p:nvPr/>
-        </p:nvSpPr>
-        <p:spPr>
-          <a:xfrm>
-            <a:off x="9052560" y="4764024"/>
-            <a:ext cx="2487168" cy="320040"/>
-          </a:xfrm>
-          <a:prstGeom prst="rect">
-            <a:avLst/>
-          </a:prstGeom>
-          <a:noFill/>
-        </p:spPr>
-        <p:txBody>
-          <a:bodyPr wrap="square" anchor="t" lIns="0" rIns="0" tIns="0" bIns="0">
-            <a:spAutoFit/>
-          </a:bodyPr>
-          <a:lstStyle/>
-          <a:p>
-            <a:pPr algn="l">
-              <a:lnSpc>
-                <a:spcPct val="100000"/>
-              </a:lnSpc>
-              <a:spcBef>
-                <a:spcPts val="0"/>
-              </a:spcBef>
-              <a:spcAft>
-                <a:spcPts val="600"/>
-              </a:spcAft>
-            </a:pPr>
-            <a:r>
-              <a:rPr sz="1700" b="1" i="0">
-                <a:solidFill>
-                  <a:srgbClr val="B02467"/>
-                </a:solidFill>
-                <a:latin typeface="Segoe UI"/>
-              </a:rPr>
-              <a:t>3 dormitorios</a:t>
-            </a:r>
-          </a:p>
-        </p:txBody>
-      </p:sp>
-      <p:sp>
-        <p:nvSpPr>
-          <p:cNvPr id="22" name="TextBox 21"/>
-          <p:cNvSpPr txBox="1"/>
-          <p:nvPr/>
-        </p:nvSpPr>
-        <p:spPr>
-          <a:xfrm>
-            <a:off x="9052560" y="5129784"/>
-            <a:ext cx="2487168" cy="320040"/>
-          </a:xfrm>
-          <a:prstGeom prst="rect">
-            <a:avLst/>
-          </a:prstGeom>
-          <a:noFill/>
-        </p:spPr>
-        <p:txBody>
-          <a:bodyPr wrap="square" anchor="t" lIns="0" rIns="0" tIns="0" bIns="0">
-            <a:spAutoFit/>
-          </a:bodyPr>
-          <a:lstStyle/>
-          <a:p>
-            <a:pPr algn="l">
-              <a:lnSpc>
-                <a:spcPct val="100000"/>
-              </a:lnSpc>
-              <a:spcBef>
-                <a:spcPts val="0"/>
-              </a:spcBef>
-              <a:spcAft>
-                <a:spcPts val="600"/>
-              </a:spcAft>
-            </a:pPr>
-            <a:r>
-              <a:rPr sz="1100" b="0" i="0" spc="50">
-                <a:solidFill>
-                  <a:srgbClr val="7A6570"/>
-                </a:solidFill>
-                <a:latin typeface="Segoe UI"/>
-              </a:rPr>
-              <a:t>FAMILIAR · CON QUINCHO</a:t>
-            </a:r>
-          </a:p>
-        </p:txBody>
-      </p:sp>
-      <p:sp>
-        <p:nvSpPr>
-          <p:cNvPr id="23" name="TextBox 22"/>
-          <p:cNvSpPr txBox="1"/>
-          <p:nvPr/>
-        </p:nvSpPr>
-        <p:spPr>
-          <a:xfrm>
-            <a:off x="850392" y="5532120"/>
-            <a:ext cx="10424160" cy="731520"/>
-          </a:xfrm>
-          <a:prstGeom prst="rect">
-            <a:avLst/>
-          </a:prstGeom>
-          <a:noFill/>
-        </p:spPr>
-        <p:txBody>
-          <a:bodyPr wrap="square" anchor="t" lIns="0" rIns="0" tIns="0" bIns="0">
-            <a:spAutoFit/>
-          </a:bodyPr>
-          <a:lstStyle/>
-          <a:p>
-            <a:pPr algn="l">
-              <a:lnSpc>
-                <a:spcPct val="125000"/>
-              </a:lnSpc>
-              <a:spcBef>
-                <a:spcPts val="0"/>
-              </a:spcBef>
-              <a:spcAft>
-                <a:spcPts val="600"/>
-              </a:spcAft>
-            </a:pPr>
-            <a:r>
-              <a:rPr sz="1700" b="0" i="0">
-                <a:solidFill>
-                  <a:srgbClr val="26121D"/>
-                </a:solidFill>
-                <a:latin typeface="Georgia"/>
-              </a:rPr>
-              <a:t>Una por cada rango. Sumamos también un alquiler de volumen para captar inquilinos. Cada aviso abre la puerta a nuevos clientes, cierren o no.</a:t>
-            </a:r>
-          </a:p>
-        </p:txBody>
-      </p:sp>
-      <p:sp>
-        <p:nvSpPr>
-          <p:cNvPr id="24" name="Rectangle 23"/>
+              <a:t>Cómo se presenta cada propiedad y cómo se le habla al cliente para generar confianza.</a:t>
+            </a:r>
+          </a:p>
+        </p:txBody>
+      </p:sp>
+      <p:sp>
+        <p:nvSpPr>
+          <p:cNvPr id="17" name="Rectangle 16"/>
           <p:cNvSpPr/>
           <p:nvPr/>
         </p:nvSpPr>
@@ -9399,7 +9877,7 @@
       </p:sp>
       <p:sp>
         <p:nvSpPr>
-          <p:cNvPr id="25" name="TextBox 24"/>
+          <p:cNvPr id="18" name="TextBox 17"/>
           <p:cNvSpPr txBox="1"/>
           <p:nvPr/>
         </p:nvSpPr>
@@ -9444,7 +9922,7 @@
       </p:sp>
       <p:sp>
         <p:nvSpPr>
-          <p:cNvPr id="26" name="TextBox 25"/>
+          <p:cNvPr id="19" name="TextBox 18"/>
           <p:cNvSpPr txBox="1"/>
           <p:nvPr/>
         </p:nvSpPr>
@@ -9489,7 +9967,7 @@
       </p:sp>
       <p:sp>
         <p:nvSpPr>
-          <p:cNvPr id="27" name="TextBox 26"/>
+          <p:cNvPr id="20" name="TextBox 19"/>
           <p:cNvSpPr txBox="1"/>
           <p:nvPr/>
         </p:nvSpPr>
@@ -9527,7 +10005,7 @@
                 </a:solidFill>
                 <a:latin typeface="Segoe UI"/>
               </a:rPr>
-              <a:t>7 / 12</a:t>
+              <a:t>7 / 11</a:t>
             </a:r>
           </a:p>
         </p:txBody>
@@ -9541,6 +10019,1123 @@
 </file>
 
 <file path=ppt/slides/slide8.xml><?xml version="1.0" encoding="utf-8"?>
+<p:sld xmlns:a="http://schemas.openxmlformats.org/drawingml/2006/main" xmlns:p="http://schemas.openxmlformats.org/presentationml/2006/main" xmlns:r="http://schemas.openxmlformats.org/officeDocument/2006/relationships">
+  <p:cSld>
+    <p:bg>
+      <p:bgPr>
+        <a:solidFill>
+          <a:srgbClr val="FFFFFF"/>
+        </a:solidFill>
+        <a:effectLst/>
+      </p:bgPr>
+    </p:bg>
+    <p:spTree>
+      <p:nvGrpSpPr>
+        <p:cNvPr id="1" name=""/>
+        <p:cNvGrpSpPr/>
+        <p:nvPr/>
+      </p:nvGrpSpPr>
+      <p:grpSpPr/>
+      <p:sp>
+        <p:nvSpPr>
+          <p:cNvPr id="2" name="TextBox 1"/>
+          <p:cNvSpPr txBox="1"/>
+          <p:nvPr/>
+        </p:nvSpPr>
+        <p:spPr>
+          <a:xfrm>
+            <a:off x="850392" y="566928"/>
+            <a:ext cx="8229600" cy="274320"/>
+          </a:xfrm>
+          <a:prstGeom prst="rect">
+            <a:avLst/>
+          </a:prstGeom>
+          <a:noFill/>
+        </p:spPr>
+        <p:txBody>
+          <a:bodyPr wrap="square" anchor="t" lIns="0" rIns="0" tIns="0" bIns="0">
+            <a:spAutoFit/>
+          </a:bodyPr>
+          <a:lstStyle/>
+          <a:p>
+            <a:pPr algn="l">
+              <a:lnSpc>
+                <a:spcPct val="100000"/>
+              </a:lnSpc>
+              <a:spcBef>
+                <a:spcPts val="0"/>
+              </a:spcBef>
+              <a:spcAft>
+                <a:spcPts val="600"/>
+              </a:spcAft>
+            </a:pPr>
+            <a:r>
+              <a:rPr sz="1200" b="1" i="0" spc="220">
+                <a:solidFill>
+                  <a:srgbClr val="B02467"/>
+                </a:solidFill>
+                <a:latin typeface="Segoe UI"/>
+              </a:rPr>
+              <a:t>PARA EMPEZAR</a:t>
+            </a:r>
+          </a:p>
+        </p:txBody>
+      </p:sp>
+      <p:sp>
+        <p:nvSpPr>
+          <p:cNvPr id="3" name="TextBox 2"/>
+          <p:cNvSpPr txBox="1"/>
+          <p:nvPr/>
+        </p:nvSpPr>
+        <p:spPr>
+          <a:xfrm>
+            <a:off x="822960" y="868680"/>
+            <a:ext cx="10424160" cy="1371600"/>
+          </a:xfrm>
+          <a:prstGeom prst="rect">
+            <a:avLst/>
+          </a:prstGeom>
+          <a:noFill/>
+        </p:spPr>
+        <p:txBody>
+          <a:bodyPr wrap="square" anchor="t" lIns="0" rIns="0" tIns="0" bIns="0">
+            <a:spAutoFit/>
+          </a:bodyPr>
+          <a:lstStyle/>
+          <a:p>
+            <a:pPr algn="l">
+              <a:lnSpc>
+                <a:spcPct val="105000"/>
+              </a:lnSpc>
+              <a:spcBef>
+                <a:spcPts val="0"/>
+              </a:spcBef>
+              <a:spcAft>
+                <a:spcPts val="600"/>
+              </a:spcAft>
+            </a:pPr>
+            <a:r>
+              <a:rPr sz="3400" b="0" i="0">
+                <a:solidFill>
+                  <a:srgbClr val="3B1329"/>
+                </a:solidFill>
+                <a:latin typeface="Georgia"/>
+              </a:rPr>
+              <a:t>Arrancamos con estas propiedades.</a:t>
+            </a:r>
+          </a:p>
+        </p:txBody>
+      </p:sp>
+      <p:sp>
+        <p:nvSpPr>
+          <p:cNvPr id="4" name="Rectangle 3"/>
+          <p:cNvSpPr/>
+          <p:nvPr/>
+        </p:nvSpPr>
+        <p:spPr>
+          <a:xfrm>
+            <a:off x="850392" y="1847088"/>
+            <a:ext cx="548640" cy="38100"/>
+          </a:xfrm>
+          <a:prstGeom prst="rect">
+            <a:avLst/>
+          </a:prstGeom>
+          <a:solidFill>
+            <a:srgbClr val="E84A9C"/>
+          </a:solidFill>
+          <a:ln>
+            <a:noFill/>
+          </a:ln>
+          <a:effectLst/>
+        </p:spPr>
+        <p:style>
+          <a:lnRef idx="1">
+            <a:schemeClr val="accent1"/>
+          </a:lnRef>
+          <a:fillRef idx="3">
+            <a:schemeClr val="accent1"/>
+          </a:fillRef>
+          <a:effectRef idx="2">
+            <a:schemeClr val="accent1"/>
+          </a:effectRef>
+          <a:fontRef idx="minor">
+            <a:schemeClr val="lt1"/>
+          </a:fontRef>
+        </p:style>
+        <p:txBody>
+          <a:bodyPr rtlCol="0" anchor="ctr"/>
+          <a:lstStyle/>
+          <a:p>
+            <a:pPr algn="ctr"/>
+          </a:p>
+        </p:txBody>
+      </p:sp>
+      <p:pic>
+        <p:nvPicPr>
+          <p:cNvPr id="5" name="Picture 4" descr="casa-juanbjusto-62k.jpg"/>
+          <p:cNvPicPr>
+            <a:picLocks noChangeAspect="1"/>
+          </p:cNvPicPr>
+          <p:nvPr/>
+        </p:nvPicPr>
+        <p:blipFill>
+          <a:blip r:embed="rId2"/>
+          <a:stretch>
+            <a:fillRect/>
+          </a:stretch>
+        </p:blipFill>
+        <p:spPr>
+          <a:xfrm>
+            <a:off x="850392" y="2331720"/>
+            <a:ext cx="2487168" cy="1865376"/>
+          </a:xfrm>
+          <a:prstGeom prst="rect">
+            <a:avLst/>
+          </a:prstGeom>
+        </p:spPr>
+      </p:pic>
+      <p:sp>
+        <p:nvSpPr>
+          <p:cNvPr id="6" name="TextBox 5"/>
+          <p:cNvSpPr txBox="1"/>
+          <p:nvPr/>
+        </p:nvSpPr>
+        <p:spPr>
+          <a:xfrm>
+            <a:off x="850392" y="4306824"/>
+            <a:ext cx="2487168" cy="457200"/>
+          </a:xfrm>
+          <a:prstGeom prst="rect">
+            <a:avLst/>
+          </a:prstGeom>
+          <a:noFill/>
+        </p:spPr>
+        <p:txBody>
+          <a:bodyPr wrap="square" anchor="t" lIns="0" rIns="0" tIns="0" bIns="0">
+            <a:spAutoFit/>
+          </a:bodyPr>
+          <a:lstStyle/>
+          <a:p>
+            <a:pPr algn="l">
+              <a:lnSpc>
+                <a:spcPct val="105000"/>
+              </a:lnSpc>
+              <a:spcBef>
+                <a:spcPts val="0"/>
+              </a:spcBef>
+              <a:spcAft>
+                <a:spcPts val="600"/>
+              </a:spcAft>
+            </a:pPr>
+            <a:r>
+              <a:rPr sz="1600" b="0" i="0">
+                <a:solidFill>
+                  <a:srgbClr val="26121D"/>
+                </a:solidFill>
+                <a:latin typeface="Georgia"/>
+              </a:rPr>
+              <a:t>Casa Av. Juan B. Justo</a:t>
+            </a:r>
+          </a:p>
+        </p:txBody>
+      </p:sp>
+      <p:sp>
+        <p:nvSpPr>
+          <p:cNvPr id="7" name="TextBox 6"/>
+          <p:cNvSpPr txBox="1"/>
+          <p:nvPr/>
+        </p:nvSpPr>
+        <p:spPr>
+          <a:xfrm>
+            <a:off x="850392" y="4764024"/>
+            <a:ext cx="2487168" cy="320040"/>
+          </a:xfrm>
+          <a:prstGeom prst="rect">
+            <a:avLst/>
+          </a:prstGeom>
+          <a:noFill/>
+        </p:spPr>
+        <p:txBody>
+          <a:bodyPr wrap="square" anchor="t" lIns="0" rIns="0" tIns="0" bIns="0">
+            <a:spAutoFit/>
+          </a:bodyPr>
+          <a:lstStyle/>
+          <a:p>
+            <a:pPr algn="l">
+              <a:lnSpc>
+                <a:spcPct val="100000"/>
+              </a:lnSpc>
+              <a:spcBef>
+                <a:spcPts val="0"/>
+              </a:spcBef>
+              <a:spcAft>
+                <a:spcPts val="600"/>
+              </a:spcAft>
+            </a:pPr>
+            <a:r>
+              <a:rPr sz="1700" b="1" i="0">
+                <a:solidFill>
+                  <a:srgbClr val="B02467"/>
+                </a:solidFill>
+                <a:latin typeface="Segoe UI"/>
+              </a:rPr>
+              <a:t>U$S 62.000</a:t>
+            </a:r>
+          </a:p>
+        </p:txBody>
+      </p:sp>
+      <p:sp>
+        <p:nvSpPr>
+          <p:cNvPr id="8" name="TextBox 7"/>
+          <p:cNvSpPr txBox="1"/>
+          <p:nvPr/>
+        </p:nvSpPr>
+        <p:spPr>
+          <a:xfrm>
+            <a:off x="850392" y="5129784"/>
+            <a:ext cx="2487168" cy="320040"/>
+          </a:xfrm>
+          <a:prstGeom prst="rect">
+            <a:avLst/>
+          </a:prstGeom>
+          <a:noFill/>
+        </p:spPr>
+        <p:txBody>
+          <a:bodyPr wrap="square" anchor="t" lIns="0" rIns="0" tIns="0" bIns="0">
+            <a:spAutoFit/>
+          </a:bodyPr>
+          <a:lstStyle/>
+          <a:p>
+            <a:pPr algn="l">
+              <a:lnSpc>
+                <a:spcPct val="100000"/>
+              </a:lnSpc>
+              <a:spcBef>
+                <a:spcPts val="0"/>
+              </a:spcBef>
+              <a:spcAft>
+                <a:spcPts val="600"/>
+              </a:spcAft>
+            </a:pPr>
+            <a:r>
+              <a:rPr sz="1100" b="0" i="0" spc="50">
+                <a:solidFill>
+                  <a:srgbClr val="7A6570"/>
+                </a:solidFill>
+                <a:latin typeface="Segoe UI"/>
+              </a:rPr>
+              <a:t>LISTA PARA HABITAR</a:t>
+            </a:r>
+          </a:p>
+        </p:txBody>
+      </p:sp>
+      <p:pic>
+        <p:nvPicPr>
+          <p:cNvPr id="9" name="Picture 8" descr="casas-a-estrenar.jpg"/>
+          <p:cNvPicPr>
+            <a:picLocks noChangeAspect="1"/>
+          </p:cNvPicPr>
+          <p:nvPr/>
+        </p:nvPicPr>
+        <p:blipFill>
+          <a:blip r:embed="rId3"/>
+          <a:stretch>
+            <a:fillRect/>
+          </a:stretch>
+        </p:blipFill>
+        <p:spPr>
+          <a:xfrm>
+            <a:off x="3584448" y="2331720"/>
+            <a:ext cx="2487168" cy="1865376"/>
+          </a:xfrm>
+          <a:prstGeom prst="rect">
+            <a:avLst/>
+          </a:prstGeom>
+        </p:spPr>
+      </p:pic>
+      <p:sp>
+        <p:nvSpPr>
+          <p:cNvPr id="10" name="TextBox 9"/>
+          <p:cNvSpPr txBox="1"/>
+          <p:nvPr/>
+        </p:nvSpPr>
+        <p:spPr>
+          <a:xfrm>
+            <a:off x="3584448" y="4306824"/>
+            <a:ext cx="2487168" cy="457200"/>
+          </a:xfrm>
+          <a:prstGeom prst="rect">
+            <a:avLst/>
+          </a:prstGeom>
+          <a:noFill/>
+        </p:spPr>
+        <p:txBody>
+          <a:bodyPr wrap="square" anchor="t" lIns="0" rIns="0" tIns="0" bIns="0">
+            <a:spAutoFit/>
+          </a:bodyPr>
+          <a:lstStyle/>
+          <a:p>
+            <a:pPr algn="l">
+              <a:lnSpc>
+                <a:spcPct val="105000"/>
+              </a:lnSpc>
+              <a:spcBef>
+                <a:spcPts val="0"/>
+              </a:spcBef>
+              <a:spcAft>
+                <a:spcPts val="600"/>
+              </a:spcAft>
+            </a:pPr>
+            <a:r>
+              <a:rPr sz="1600" b="0" i="0">
+                <a:solidFill>
+                  <a:srgbClr val="26121D"/>
+                </a:solidFill>
+                <a:latin typeface="Georgia"/>
+              </a:rPr>
+              <a:t>Casas a estrenar · PH</a:t>
+            </a:r>
+          </a:p>
+        </p:txBody>
+      </p:sp>
+      <p:sp>
+        <p:nvSpPr>
+          <p:cNvPr id="11" name="TextBox 10"/>
+          <p:cNvSpPr txBox="1"/>
+          <p:nvPr/>
+        </p:nvSpPr>
+        <p:spPr>
+          <a:xfrm>
+            <a:off x="3584448" y="4764024"/>
+            <a:ext cx="2487168" cy="320040"/>
+          </a:xfrm>
+          <a:prstGeom prst="rect">
+            <a:avLst/>
+          </a:prstGeom>
+          <a:noFill/>
+        </p:spPr>
+        <p:txBody>
+          <a:bodyPr wrap="square" anchor="t" lIns="0" rIns="0" tIns="0" bIns="0">
+            <a:spAutoFit/>
+          </a:bodyPr>
+          <a:lstStyle/>
+          <a:p>
+            <a:pPr algn="l">
+              <a:lnSpc>
+                <a:spcPct val="100000"/>
+              </a:lnSpc>
+              <a:spcBef>
+                <a:spcPts val="0"/>
+              </a:spcBef>
+              <a:spcAft>
+                <a:spcPts val="600"/>
+              </a:spcAft>
+            </a:pPr>
+            <a:r>
+              <a:rPr sz="1700" b="1" i="0">
+                <a:solidFill>
+                  <a:srgbClr val="B02467"/>
+                </a:solidFill>
+                <a:latin typeface="Segoe UI"/>
+              </a:rPr>
+              <a:t>A estrenar</a:t>
+            </a:r>
+          </a:p>
+        </p:txBody>
+      </p:sp>
+      <p:sp>
+        <p:nvSpPr>
+          <p:cNvPr id="12" name="TextBox 11"/>
+          <p:cNvSpPr txBox="1"/>
+          <p:nvPr/>
+        </p:nvSpPr>
+        <p:spPr>
+          <a:xfrm>
+            <a:off x="3584448" y="5129784"/>
+            <a:ext cx="2487168" cy="320040"/>
+          </a:xfrm>
+          <a:prstGeom prst="rect">
+            <a:avLst/>
+          </a:prstGeom>
+          <a:noFill/>
+        </p:spPr>
+        <p:txBody>
+          <a:bodyPr wrap="square" anchor="t" lIns="0" rIns="0" tIns="0" bIns="0">
+            <a:spAutoFit/>
+          </a:bodyPr>
+          <a:lstStyle/>
+          <a:p>
+            <a:pPr algn="l">
+              <a:lnSpc>
+                <a:spcPct val="100000"/>
+              </a:lnSpc>
+              <a:spcBef>
+                <a:spcPts val="0"/>
+              </a:spcBef>
+              <a:spcAft>
+                <a:spcPts val="600"/>
+              </a:spcAft>
+            </a:pPr>
+            <a:r>
+              <a:rPr sz="1100" b="0" i="0" spc="50">
+                <a:solidFill>
+                  <a:srgbClr val="7A6570"/>
+                </a:solidFill>
+                <a:latin typeface="Segoe UI"/>
+              </a:rPr>
+              <a:t>OBRA NUEVA</a:t>
+            </a:r>
+          </a:p>
+        </p:txBody>
+      </p:sp>
+      <p:pic>
+        <p:nvPicPr>
+          <p:cNvPr id="13" name="Picture 12" descr="lotes-la-mata.jpg"/>
+          <p:cNvPicPr>
+            <a:picLocks noChangeAspect="1"/>
+          </p:cNvPicPr>
+          <p:nvPr/>
+        </p:nvPicPr>
+        <p:blipFill>
+          <a:blip r:embed="rId4"/>
+          <a:stretch>
+            <a:fillRect/>
+          </a:stretch>
+        </p:blipFill>
+        <p:spPr>
+          <a:xfrm>
+            <a:off x="6318504" y="2331720"/>
+            <a:ext cx="2487168" cy="1865376"/>
+          </a:xfrm>
+          <a:prstGeom prst="rect">
+            <a:avLst/>
+          </a:prstGeom>
+        </p:spPr>
+      </p:pic>
+      <p:sp>
+        <p:nvSpPr>
+          <p:cNvPr id="14" name="Rectangle 13"/>
+          <p:cNvSpPr/>
+          <p:nvPr/>
+        </p:nvSpPr>
+        <p:spPr>
+          <a:xfrm>
+            <a:off x="6318504" y="2331720"/>
+            <a:ext cx="2487168" cy="1865376"/>
+          </a:xfrm>
+          <a:prstGeom prst="rect">
+            <a:avLst/>
+          </a:prstGeom>
+          <a:noFill/>
+          <a:ln w="31750">
+            <a:solidFill>
+              <a:srgbClr val="E84A9C"/>
+            </a:solidFill>
+          </a:ln>
+          <a:effectLst/>
+        </p:spPr>
+        <p:style>
+          <a:lnRef idx="1">
+            <a:schemeClr val="accent1"/>
+          </a:lnRef>
+          <a:fillRef idx="3">
+            <a:schemeClr val="accent1"/>
+          </a:fillRef>
+          <a:effectRef idx="2">
+            <a:schemeClr val="accent1"/>
+          </a:effectRef>
+          <a:fontRef idx="minor">
+            <a:schemeClr val="lt1"/>
+          </a:fontRef>
+        </p:style>
+        <p:txBody>
+          <a:bodyPr rtlCol="0" anchor="ctr"/>
+          <a:lstStyle/>
+          <a:p>
+            <a:pPr algn="ctr"/>
+          </a:p>
+        </p:txBody>
+      </p:sp>
+      <p:sp>
+        <p:nvSpPr>
+          <p:cNvPr id="15" name="Rectangle 14"/>
+          <p:cNvSpPr/>
+          <p:nvPr/>
+        </p:nvSpPr>
+        <p:spPr>
+          <a:xfrm>
+            <a:off x="6318504" y="2331720"/>
+            <a:ext cx="1051560" cy="310896"/>
+          </a:xfrm>
+          <a:prstGeom prst="rect">
+            <a:avLst/>
+          </a:prstGeom>
+          <a:solidFill>
+            <a:srgbClr val="E84A9C"/>
+          </a:solidFill>
+          <a:ln>
+            <a:noFill/>
+          </a:ln>
+          <a:effectLst/>
+        </p:spPr>
+        <p:style>
+          <a:lnRef idx="1">
+            <a:schemeClr val="accent1"/>
+          </a:lnRef>
+          <a:fillRef idx="3">
+            <a:schemeClr val="accent1"/>
+          </a:fillRef>
+          <a:effectRef idx="2">
+            <a:schemeClr val="accent1"/>
+          </a:effectRef>
+          <a:fontRef idx="minor">
+            <a:schemeClr val="lt1"/>
+          </a:fontRef>
+        </p:style>
+        <p:txBody>
+          <a:bodyPr rtlCol="0" anchor="ctr" lIns="50800" tIns="12700" bIns="12700"/>
+          <a:lstStyle/>
+          <a:p>
+            <a:pPr algn="ctr"/>
+            <a:r>
+              <a:rPr sz="1000" b="1">
+                <a:solidFill>
+                  <a:srgbClr val="FFFFFF"/>
+                </a:solidFill>
+                <a:latin typeface="Segoe UI"/>
+              </a:rPr>
+              <a:t>FINANCIA</a:t>
+            </a:r>
+          </a:p>
+        </p:txBody>
+      </p:sp>
+      <p:sp>
+        <p:nvSpPr>
+          <p:cNvPr id="16" name="TextBox 15"/>
+          <p:cNvSpPr txBox="1"/>
+          <p:nvPr/>
+        </p:nvSpPr>
+        <p:spPr>
+          <a:xfrm>
+            <a:off x="6318504" y="4306824"/>
+            <a:ext cx="2487168" cy="457200"/>
+          </a:xfrm>
+          <a:prstGeom prst="rect">
+            <a:avLst/>
+          </a:prstGeom>
+          <a:noFill/>
+        </p:spPr>
+        <p:txBody>
+          <a:bodyPr wrap="square" anchor="t" lIns="0" rIns="0" tIns="0" bIns="0">
+            <a:spAutoFit/>
+          </a:bodyPr>
+          <a:lstStyle/>
+          <a:p>
+            <a:pPr algn="l">
+              <a:lnSpc>
+                <a:spcPct val="105000"/>
+              </a:lnSpc>
+              <a:spcBef>
+                <a:spcPts val="0"/>
+              </a:spcBef>
+              <a:spcAft>
+                <a:spcPts val="600"/>
+              </a:spcAft>
+            </a:pPr>
+            <a:r>
+              <a:rPr sz="1600" b="0" i="0">
+                <a:solidFill>
+                  <a:srgbClr val="26121D"/>
+                </a:solidFill>
+                <a:latin typeface="Georgia"/>
+              </a:rPr>
+              <a:t>Lotes Barrio La Mata</a:t>
+            </a:r>
+          </a:p>
+        </p:txBody>
+      </p:sp>
+      <p:sp>
+        <p:nvSpPr>
+          <p:cNvPr id="17" name="TextBox 16"/>
+          <p:cNvSpPr txBox="1"/>
+          <p:nvPr/>
+        </p:nvSpPr>
+        <p:spPr>
+          <a:xfrm>
+            <a:off x="6318504" y="4764024"/>
+            <a:ext cx="2487168" cy="320040"/>
+          </a:xfrm>
+          <a:prstGeom prst="rect">
+            <a:avLst/>
+          </a:prstGeom>
+          <a:noFill/>
+        </p:spPr>
+        <p:txBody>
+          <a:bodyPr wrap="square" anchor="t" lIns="0" rIns="0" tIns="0" bIns="0">
+            <a:spAutoFit/>
+          </a:bodyPr>
+          <a:lstStyle/>
+          <a:p>
+            <a:pPr algn="l">
+              <a:lnSpc>
+                <a:spcPct val="100000"/>
+              </a:lnSpc>
+              <a:spcBef>
+                <a:spcPts val="0"/>
+              </a:spcBef>
+              <a:spcAft>
+                <a:spcPts val="600"/>
+              </a:spcAft>
+            </a:pPr>
+            <a:r>
+              <a:rPr sz="1700" b="1" i="0">
+                <a:solidFill>
+                  <a:srgbClr val="B02467"/>
+                </a:solidFill>
+                <a:latin typeface="Segoe UI"/>
+              </a:rPr>
+              <a:t>Desde U$S 57.000</a:t>
+            </a:r>
+          </a:p>
+        </p:txBody>
+      </p:sp>
+      <p:sp>
+        <p:nvSpPr>
+          <p:cNvPr id="18" name="TextBox 17"/>
+          <p:cNvSpPr txBox="1"/>
+          <p:nvPr/>
+        </p:nvSpPr>
+        <p:spPr>
+          <a:xfrm>
+            <a:off x="6318504" y="5129784"/>
+            <a:ext cx="2487168" cy="320040"/>
+          </a:xfrm>
+          <a:prstGeom prst="rect">
+            <a:avLst/>
+          </a:prstGeom>
+          <a:noFill/>
+        </p:spPr>
+        <p:txBody>
+          <a:bodyPr wrap="square" anchor="t" lIns="0" rIns="0" tIns="0" bIns="0">
+            <a:spAutoFit/>
+          </a:bodyPr>
+          <a:lstStyle/>
+          <a:p>
+            <a:pPr algn="l">
+              <a:lnSpc>
+                <a:spcPct val="100000"/>
+              </a:lnSpc>
+              <a:spcBef>
+                <a:spcPts val="0"/>
+              </a:spcBef>
+              <a:spcAft>
+                <a:spcPts val="600"/>
+              </a:spcAft>
+            </a:pPr>
+            <a:r>
+              <a:rPr sz="1100" b="0" i="0" spc="50">
+                <a:solidFill>
+                  <a:srgbClr val="7A6570"/>
+                </a:solidFill>
+                <a:latin typeface="Segoe UI"/>
+              </a:rPr>
+              <a:t>INVERSIÓN</a:t>
+            </a:r>
+          </a:p>
+        </p:txBody>
+      </p:sp>
+      <p:pic>
+        <p:nvPicPr>
+          <p:cNvPr id="19" name="Picture 18" descr="casa-3dorm-primerajunta.jpg"/>
+          <p:cNvPicPr>
+            <a:picLocks noChangeAspect="1"/>
+          </p:cNvPicPr>
+          <p:nvPr/>
+        </p:nvPicPr>
+        <p:blipFill>
+          <a:blip r:embed="rId5"/>
+          <a:stretch>
+            <a:fillRect/>
+          </a:stretch>
+        </p:blipFill>
+        <p:spPr>
+          <a:xfrm>
+            <a:off x="9052560" y="2331720"/>
+            <a:ext cx="2487168" cy="1865376"/>
+          </a:xfrm>
+          <a:prstGeom prst="rect">
+            <a:avLst/>
+          </a:prstGeom>
+        </p:spPr>
+      </p:pic>
+      <p:sp>
+        <p:nvSpPr>
+          <p:cNvPr id="20" name="TextBox 19"/>
+          <p:cNvSpPr txBox="1"/>
+          <p:nvPr/>
+        </p:nvSpPr>
+        <p:spPr>
+          <a:xfrm>
+            <a:off x="9052560" y="4306824"/>
+            <a:ext cx="2487168" cy="457200"/>
+          </a:xfrm>
+          <a:prstGeom prst="rect">
+            <a:avLst/>
+          </a:prstGeom>
+          <a:noFill/>
+        </p:spPr>
+        <p:txBody>
+          <a:bodyPr wrap="square" anchor="t" lIns="0" rIns="0" tIns="0" bIns="0">
+            <a:spAutoFit/>
+          </a:bodyPr>
+          <a:lstStyle/>
+          <a:p>
+            <a:pPr algn="l">
+              <a:lnSpc>
+                <a:spcPct val="105000"/>
+              </a:lnSpc>
+              <a:spcBef>
+                <a:spcPts val="0"/>
+              </a:spcBef>
+              <a:spcAft>
+                <a:spcPts val="600"/>
+              </a:spcAft>
+            </a:pPr>
+            <a:r>
+              <a:rPr sz="1600" b="0" i="0">
+                <a:solidFill>
+                  <a:srgbClr val="26121D"/>
+                </a:solidFill>
+                <a:latin typeface="Georgia"/>
+              </a:rPr>
+              <a:t>Casa Primera Junta</a:t>
+            </a:r>
+          </a:p>
+        </p:txBody>
+      </p:sp>
+      <p:sp>
+        <p:nvSpPr>
+          <p:cNvPr id="21" name="TextBox 20"/>
+          <p:cNvSpPr txBox="1"/>
+          <p:nvPr/>
+        </p:nvSpPr>
+        <p:spPr>
+          <a:xfrm>
+            <a:off x="9052560" y="4764024"/>
+            <a:ext cx="2487168" cy="320040"/>
+          </a:xfrm>
+          <a:prstGeom prst="rect">
+            <a:avLst/>
+          </a:prstGeom>
+          <a:noFill/>
+        </p:spPr>
+        <p:txBody>
+          <a:bodyPr wrap="square" anchor="t" lIns="0" rIns="0" tIns="0" bIns="0">
+            <a:spAutoFit/>
+          </a:bodyPr>
+          <a:lstStyle/>
+          <a:p>
+            <a:pPr algn="l">
+              <a:lnSpc>
+                <a:spcPct val="100000"/>
+              </a:lnSpc>
+              <a:spcBef>
+                <a:spcPts val="0"/>
+              </a:spcBef>
+              <a:spcAft>
+                <a:spcPts val="600"/>
+              </a:spcAft>
+            </a:pPr>
+            <a:r>
+              <a:rPr sz="1700" b="1" i="0">
+                <a:solidFill>
+                  <a:srgbClr val="B02467"/>
+                </a:solidFill>
+                <a:latin typeface="Segoe UI"/>
+              </a:rPr>
+              <a:t>3 dormitorios</a:t>
+            </a:r>
+          </a:p>
+        </p:txBody>
+      </p:sp>
+      <p:sp>
+        <p:nvSpPr>
+          <p:cNvPr id="22" name="TextBox 21"/>
+          <p:cNvSpPr txBox="1"/>
+          <p:nvPr/>
+        </p:nvSpPr>
+        <p:spPr>
+          <a:xfrm>
+            <a:off x="9052560" y="5129784"/>
+            <a:ext cx="2487168" cy="320040"/>
+          </a:xfrm>
+          <a:prstGeom prst="rect">
+            <a:avLst/>
+          </a:prstGeom>
+          <a:noFill/>
+        </p:spPr>
+        <p:txBody>
+          <a:bodyPr wrap="square" anchor="t" lIns="0" rIns="0" tIns="0" bIns="0">
+            <a:spAutoFit/>
+          </a:bodyPr>
+          <a:lstStyle/>
+          <a:p>
+            <a:pPr algn="l">
+              <a:lnSpc>
+                <a:spcPct val="100000"/>
+              </a:lnSpc>
+              <a:spcBef>
+                <a:spcPts val="0"/>
+              </a:spcBef>
+              <a:spcAft>
+                <a:spcPts val="600"/>
+              </a:spcAft>
+            </a:pPr>
+            <a:r>
+              <a:rPr sz="1100" b="0" i="0" spc="50">
+                <a:solidFill>
+                  <a:srgbClr val="7A6570"/>
+                </a:solidFill>
+                <a:latin typeface="Segoe UI"/>
+              </a:rPr>
+              <a:t>FAMILIAR · CON QUINCHO</a:t>
+            </a:r>
+          </a:p>
+        </p:txBody>
+      </p:sp>
+      <p:sp>
+        <p:nvSpPr>
+          <p:cNvPr id="23" name="TextBox 22"/>
+          <p:cNvSpPr txBox="1"/>
+          <p:nvPr/>
+        </p:nvSpPr>
+        <p:spPr>
+          <a:xfrm>
+            <a:off x="850392" y="5532120"/>
+            <a:ext cx="10424160" cy="731520"/>
+          </a:xfrm>
+          <a:prstGeom prst="rect">
+            <a:avLst/>
+          </a:prstGeom>
+          <a:noFill/>
+        </p:spPr>
+        <p:txBody>
+          <a:bodyPr wrap="square" anchor="t" lIns="0" rIns="0" tIns="0" bIns="0">
+            <a:spAutoFit/>
+          </a:bodyPr>
+          <a:lstStyle/>
+          <a:p>
+            <a:pPr algn="l">
+              <a:lnSpc>
+                <a:spcPct val="125000"/>
+              </a:lnSpc>
+              <a:spcBef>
+                <a:spcPts val="0"/>
+              </a:spcBef>
+              <a:spcAft>
+                <a:spcPts val="600"/>
+              </a:spcAft>
+            </a:pPr>
+            <a:r>
+              <a:rPr sz="1700" b="0" i="0">
+                <a:solidFill>
+                  <a:srgbClr val="26121D"/>
+                </a:solidFill>
+                <a:latin typeface="Georgia"/>
+              </a:rPr>
+              <a:t>Una por cada rango. Sumamos también un alquiler de volumen para captar inquilinos. Cada aviso abre la puerta a nuevos clientes, cierren o no.</a:t>
+            </a:r>
+          </a:p>
+        </p:txBody>
+      </p:sp>
+      <p:sp>
+        <p:nvSpPr>
+          <p:cNvPr id="24" name="Rectangle 23"/>
+          <p:cNvSpPr/>
+          <p:nvPr/>
+        </p:nvSpPr>
+        <p:spPr>
+          <a:xfrm>
+            <a:off x="822960" y="6355080"/>
+            <a:ext cx="10543032" cy="12700"/>
+          </a:xfrm>
+          <a:prstGeom prst="rect">
+            <a:avLst/>
+          </a:prstGeom>
+          <a:solidFill>
+            <a:srgbClr val="F0D9E5"/>
+          </a:solidFill>
+          <a:ln>
+            <a:noFill/>
+          </a:ln>
+          <a:effectLst/>
+        </p:spPr>
+        <p:style>
+          <a:lnRef idx="1">
+            <a:schemeClr val="accent1"/>
+          </a:lnRef>
+          <a:fillRef idx="3">
+            <a:schemeClr val="accent1"/>
+          </a:fillRef>
+          <a:effectRef idx="2">
+            <a:schemeClr val="accent1"/>
+          </a:effectRef>
+          <a:fontRef idx="minor">
+            <a:schemeClr val="lt1"/>
+          </a:fontRef>
+        </p:style>
+        <p:txBody>
+          <a:bodyPr rtlCol="0" anchor="ctr"/>
+          <a:lstStyle/>
+          <a:p>
+            <a:pPr algn="ctr"/>
+          </a:p>
+        </p:txBody>
+      </p:sp>
+      <p:sp>
+        <p:nvSpPr>
+          <p:cNvPr id="25" name="TextBox 24"/>
+          <p:cNvSpPr txBox="1"/>
+          <p:nvPr/>
+        </p:nvSpPr>
+        <p:spPr>
+          <a:xfrm>
+            <a:off x="822960" y="6419088"/>
+            <a:ext cx="3657600" cy="274320"/>
+          </a:xfrm>
+          <a:prstGeom prst="rect">
+            <a:avLst/>
+          </a:prstGeom>
+          <a:noFill/>
+        </p:spPr>
+        <p:txBody>
+          <a:bodyPr wrap="square" anchor="t" lIns="0" rIns="0" tIns="0" bIns="0">
+            <a:spAutoFit/>
+          </a:bodyPr>
+          <a:lstStyle/>
+          <a:p>
+            <a:pPr algn="l">
+              <a:lnSpc>
+                <a:spcPct val="100000"/>
+              </a:lnSpc>
+              <a:spcBef>
+                <a:spcPts val="0"/>
+              </a:spcBef>
+              <a:spcAft>
+                <a:spcPts val="600"/>
+              </a:spcAft>
+            </a:pPr>
+            <a:r>
+              <a:rPr sz="900" b="1" i="0" spc="120">
+                <a:solidFill>
+                  <a:srgbClr val="3B1329"/>
+                </a:solidFill>
+                <a:latin typeface="Segoe UI"/>
+              </a:rPr>
+              <a:t>SANTINO MARCONI</a:t>
+            </a:r>
+          </a:p>
+        </p:txBody>
+      </p:sp>
+      <p:sp>
+        <p:nvSpPr>
+          <p:cNvPr id="26" name="TextBox 25"/>
+          <p:cNvSpPr txBox="1"/>
+          <p:nvPr/>
+        </p:nvSpPr>
+        <p:spPr>
+          <a:xfrm>
+            <a:off x="4114800" y="6419088"/>
+            <a:ext cx="3959352" cy="274320"/>
+          </a:xfrm>
+          <a:prstGeom prst="rect">
+            <a:avLst/>
+          </a:prstGeom>
+          <a:noFill/>
+        </p:spPr>
+        <p:txBody>
+          <a:bodyPr wrap="square" anchor="t" lIns="0" rIns="0" tIns="0" bIns="0">
+            <a:spAutoFit/>
+          </a:bodyPr>
+          <a:lstStyle/>
+          <a:p>
+            <a:pPr algn="ctr">
+              <a:lnSpc>
+                <a:spcPct val="100000"/>
+              </a:lnSpc>
+              <a:spcBef>
+                <a:spcPts val="0"/>
+              </a:spcBef>
+              <a:spcAft>
+                <a:spcPts val="600"/>
+              </a:spcAft>
+            </a:pPr>
+            <a:r>
+              <a:rPr sz="900" b="0" i="0" spc="120">
+                <a:solidFill>
+                  <a:srgbClr val="7A6570"/>
+                </a:solidFill>
+                <a:latin typeface="Segoe UI"/>
+              </a:rPr>
+              <a:t>PROPUESTA · LUCRECIA MORENO NEGOCIOS INMOBILIARIOS</a:t>
+            </a:r>
+          </a:p>
+        </p:txBody>
+      </p:sp>
+      <p:sp>
+        <p:nvSpPr>
+          <p:cNvPr id="27" name="TextBox 26"/>
+          <p:cNvSpPr txBox="1"/>
+          <p:nvPr/>
+        </p:nvSpPr>
+        <p:spPr>
+          <a:xfrm>
+            <a:off x="8686800" y="6419088"/>
+            <a:ext cx="2679192" cy="274320"/>
+          </a:xfrm>
+          <a:prstGeom prst="rect">
+            <a:avLst/>
+          </a:prstGeom>
+          <a:noFill/>
+        </p:spPr>
+        <p:txBody>
+          <a:bodyPr wrap="square" anchor="t" lIns="0" rIns="0" tIns="0" bIns="0">
+            <a:spAutoFit/>
+          </a:bodyPr>
+          <a:lstStyle/>
+          <a:p>
+            <a:pPr algn="r">
+              <a:lnSpc>
+                <a:spcPct val="100000"/>
+              </a:lnSpc>
+              <a:spcBef>
+                <a:spcPts val="0"/>
+              </a:spcBef>
+              <a:spcAft>
+                <a:spcPts val="600"/>
+              </a:spcAft>
+            </a:pPr>
+            <a:r>
+              <a:rPr sz="900" b="0" i="0" spc="120">
+                <a:solidFill>
+                  <a:srgbClr val="7A6570"/>
+                </a:solidFill>
+                <a:latin typeface="Segoe UI"/>
+              </a:rPr>
+              <a:t>8 / 11</a:t>
+            </a:r>
+          </a:p>
+        </p:txBody>
+      </p:sp>
+    </p:spTree>
+  </p:cSld>
+  <p:clrMapOvr>
+    <a:masterClrMapping/>
+  </p:clrMapOvr>
+</p:sld>
+</file>
+
+<file path=ppt/slides/slide9.xml><?xml version="1.0" encoding="utf-8"?>
 <p:sld xmlns:a="http://schemas.openxmlformats.org/drawingml/2006/main" xmlns:p="http://schemas.openxmlformats.org/presentationml/2006/main" xmlns:r="http://schemas.openxmlformats.org/officeDocument/2006/relationships">
   <p:cSld>
     <p:bg>
@@ -9612,7 +11207,7 @@
         <p:spPr>
           <a:xfrm>
             <a:off x="822960" y="868680"/>
-            <a:ext cx="10058400" cy="1371600"/>
+            <a:ext cx="10424160" cy="1371600"/>
           </a:xfrm>
           <a:prstGeom prst="rect">
             <a:avLst/>
@@ -10403,1026 +11998,7 @@
                 </a:solidFill>
                 <a:latin typeface="Segoe UI"/>
               </a:rPr>
-              <a:t>8 / 12</a:t>
-            </a:r>
-          </a:p>
-        </p:txBody>
-      </p:sp>
-    </p:spTree>
-  </p:cSld>
-  <p:clrMapOvr>
-    <a:masterClrMapping/>
-  </p:clrMapOvr>
-</p:sld>
-</file>
-
-<file path=ppt/slides/slide9.xml><?xml version="1.0" encoding="utf-8"?>
-<p:sld xmlns:a="http://schemas.openxmlformats.org/drawingml/2006/main" xmlns:p="http://schemas.openxmlformats.org/presentationml/2006/main" xmlns:r="http://schemas.openxmlformats.org/officeDocument/2006/relationships">
-  <p:cSld>
-    <p:bg>
-      <p:bgPr>
-        <a:solidFill>
-          <a:srgbClr val="FFFFFF"/>
-        </a:solidFill>
-        <a:effectLst/>
-      </p:bgPr>
-    </p:bg>
-    <p:spTree>
-      <p:nvGrpSpPr>
-        <p:cNvPr id="1" name=""/>
-        <p:cNvGrpSpPr/>
-        <p:nvPr/>
-      </p:nvGrpSpPr>
-      <p:grpSpPr/>
-      <p:sp>
-        <p:nvSpPr>
-          <p:cNvPr id="2" name="TextBox 1"/>
-          <p:cNvSpPr txBox="1"/>
-          <p:nvPr/>
-        </p:nvSpPr>
-        <p:spPr>
-          <a:xfrm>
-            <a:off x="850392" y="566928"/>
-            <a:ext cx="8229600" cy="274320"/>
-          </a:xfrm>
-          <a:prstGeom prst="rect">
-            <a:avLst/>
-          </a:prstGeom>
-          <a:noFill/>
-        </p:spPr>
-        <p:txBody>
-          <a:bodyPr wrap="square" anchor="t" lIns="0" rIns="0" tIns="0" bIns="0">
-            <a:spAutoFit/>
-          </a:bodyPr>
-          <a:lstStyle/>
-          <a:p>
-            <a:pPr algn="l">
-              <a:lnSpc>
-                <a:spcPct val="100000"/>
-              </a:lnSpc>
-              <a:spcBef>
-                <a:spcPts val="0"/>
-              </a:spcBef>
-              <a:spcAft>
-                <a:spcPts val="600"/>
-              </a:spcAft>
-            </a:pPr>
-            <a:r>
-              <a:rPr sz="1200" b="1" i="0" spc="220">
-                <a:solidFill>
-                  <a:srgbClr val="B02467"/>
-                </a:solidFill>
-                <a:latin typeface="Segoe UI"/>
-              </a:rPr>
-              <a:t>LA INVERSIÓN</a:t>
-            </a:r>
-          </a:p>
-        </p:txBody>
-      </p:sp>
-      <p:sp>
-        <p:nvSpPr>
-          <p:cNvPr id="3" name="TextBox 2"/>
-          <p:cNvSpPr txBox="1"/>
-          <p:nvPr/>
-        </p:nvSpPr>
-        <p:spPr>
-          <a:xfrm>
-            <a:off x="822960" y="868680"/>
-            <a:ext cx="10058400" cy="1371600"/>
-          </a:xfrm>
-          <a:prstGeom prst="rect">
-            <a:avLst/>
-          </a:prstGeom>
-          <a:noFill/>
-        </p:spPr>
-        <p:txBody>
-          <a:bodyPr wrap="square" anchor="t" lIns="0" rIns="0" tIns="0" bIns="0">
-            <a:spAutoFit/>
-          </a:bodyPr>
-          <a:lstStyle/>
-          <a:p>
-            <a:pPr algn="l">
-              <a:lnSpc>
-                <a:spcPct val="105000"/>
-              </a:lnSpc>
-              <a:spcBef>
-                <a:spcPts val="0"/>
-              </a:spcBef>
-              <a:spcAft>
-                <a:spcPts val="600"/>
-              </a:spcAft>
-            </a:pPr>
-            <a:r>
-              <a:rPr sz="3400" b="0" i="0">
-                <a:solidFill>
-                  <a:srgbClr val="3B1329"/>
-                </a:solidFill>
-                <a:latin typeface="Georgia"/>
-              </a:rPr>
-              <a:t>Claro y sin sorpresas.</a:t>
-            </a:r>
-          </a:p>
-        </p:txBody>
-      </p:sp>
-      <p:sp>
-        <p:nvSpPr>
-          <p:cNvPr id="4" name="Rectangle 3"/>
-          <p:cNvSpPr/>
-          <p:nvPr/>
-        </p:nvSpPr>
-        <p:spPr>
-          <a:xfrm>
-            <a:off x="850392" y="1847088"/>
-            <a:ext cx="548640" cy="38100"/>
-          </a:xfrm>
-          <a:prstGeom prst="rect">
-            <a:avLst/>
-          </a:prstGeom>
-          <a:solidFill>
-            <a:srgbClr val="E84A9C"/>
-          </a:solidFill>
-          <a:ln>
-            <a:noFill/>
-          </a:ln>
-          <a:effectLst/>
-        </p:spPr>
-        <p:style>
-          <a:lnRef idx="1">
-            <a:schemeClr val="accent1"/>
-          </a:lnRef>
-          <a:fillRef idx="3">
-            <a:schemeClr val="accent1"/>
-          </a:fillRef>
-          <a:effectRef idx="2">
-            <a:schemeClr val="accent1"/>
-          </a:effectRef>
-          <a:fontRef idx="minor">
-            <a:schemeClr val="lt1"/>
-          </a:fontRef>
-        </p:style>
-        <p:txBody>
-          <a:bodyPr rtlCol="0" anchor="ctr"/>
-          <a:lstStyle/>
-          <a:p>
-            <a:pPr algn="ctr"/>
-          </a:p>
-        </p:txBody>
-      </p:sp>
-      <p:sp>
-        <p:nvSpPr>
-          <p:cNvPr id="5" name="Rounded Rectangle 4"/>
-          <p:cNvSpPr/>
-          <p:nvPr/>
-        </p:nvSpPr>
-        <p:spPr>
-          <a:xfrm>
-            <a:off x="850392" y="2468880"/>
-            <a:ext cx="5760720" cy="3017520"/>
-          </a:xfrm>
-          <a:prstGeom prst="roundRect">
-            <a:avLst/>
-          </a:prstGeom>
-          <a:solidFill>
-            <a:srgbClr val="FBEEF4"/>
-          </a:solidFill>
-          <a:ln>
-            <a:noFill/>
-          </a:ln>
-          <a:effectLst/>
-        </p:spPr>
-        <p:style>
-          <a:lnRef idx="1">
-            <a:schemeClr val="accent1"/>
-          </a:lnRef>
-          <a:fillRef idx="3">
-            <a:schemeClr val="accent1"/>
-          </a:fillRef>
-          <a:effectRef idx="2">
-            <a:schemeClr val="accent1"/>
-          </a:effectRef>
-          <a:fontRef idx="minor">
-            <a:schemeClr val="lt1"/>
-          </a:fontRef>
-        </p:style>
-        <p:txBody>
-          <a:bodyPr rtlCol="0" anchor="ctr"/>
-          <a:lstStyle/>
-          <a:p>
-            <a:pPr algn="ctr"/>
-          </a:p>
-        </p:txBody>
-      </p:sp>
-      <p:sp>
-        <p:nvSpPr>
-          <p:cNvPr id="6" name="TextBox 5"/>
-          <p:cNvSpPr txBox="1"/>
-          <p:nvPr/>
-        </p:nvSpPr>
-        <p:spPr>
-          <a:xfrm>
-            <a:off x="1143000" y="2743200"/>
-            <a:ext cx="3291840" cy="457200"/>
-          </a:xfrm>
-          <a:prstGeom prst="rect">
-            <a:avLst/>
-          </a:prstGeom>
-          <a:noFill/>
-        </p:spPr>
-        <p:txBody>
-          <a:bodyPr wrap="square" anchor="t" lIns="0" rIns="0" tIns="0" bIns="0">
-            <a:spAutoFit/>
-          </a:bodyPr>
-          <a:lstStyle/>
-          <a:p>
-            <a:pPr algn="l">
-              <a:lnSpc>
-                <a:spcPct val="100000"/>
-              </a:lnSpc>
-              <a:spcBef>
-                <a:spcPts val="0"/>
-              </a:spcBef>
-              <a:spcAft>
-                <a:spcPts val="600"/>
-              </a:spcAft>
-            </a:pPr>
-            <a:r>
-              <a:rPr sz="1700" b="0" i="0">
-                <a:solidFill>
-                  <a:srgbClr val="26121D"/>
-                </a:solidFill>
-                <a:latin typeface="Segoe UI"/>
-              </a:rPr>
-              <a:t>Mi honorario mensual</a:t>
-            </a:r>
-          </a:p>
-        </p:txBody>
-      </p:sp>
-      <p:sp>
-        <p:nvSpPr>
-          <p:cNvPr id="7" name="TextBox 6"/>
-          <p:cNvSpPr txBox="1"/>
-          <p:nvPr/>
-        </p:nvSpPr>
-        <p:spPr>
-          <a:xfrm>
-            <a:off x="4572000" y="2743200"/>
-            <a:ext cx="1737360" cy="457200"/>
-          </a:xfrm>
-          <a:prstGeom prst="rect">
-            <a:avLst/>
-          </a:prstGeom>
-          <a:noFill/>
-        </p:spPr>
-        <p:txBody>
-          <a:bodyPr wrap="square" anchor="t" lIns="0" rIns="0" tIns="0" bIns="0">
-            <a:spAutoFit/>
-          </a:bodyPr>
-          <a:lstStyle/>
-          <a:p>
-            <a:pPr algn="r">
-              <a:lnSpc>
-                <a:spcPct val="100000"/>
-              </a:lnSpc>
-              <a:spcBef>
-                <a:spcPts val="0"/>
-              </a:spcBef>
-              <a:spcAft>
-                <a:spcPts val="600"/>
-              </a:spcAft>
-            </a:pPr>
-            <a:r>
-              <a:rPr sz="2400" b="1" i="0">
-                <a:solidFill>
-                  <a:srgbClr val="3B1329"/>
-                </a:solidFill>
-                <a:latin typeface="Georgia"/>
-              </a:rPr>
-              <a:t>$400.000</a:t>
-            </a:r>
-          </a:p>
-        </p:txBody>
-      </p:sp>
-      <p:sp>
-        <p:nvSpPr>
-          <p:cNvPr id="8" name="Rectangle 7"/>
-          <p:cNvSpPr/>
-          <p:nvPr/>
-        </p:nvSpPr>
-        <p:spPr>
-          <a:xfrm>
-            <a:off x="1143000" y="3493008"/>
-            <a:ext cx="5166360" cy="12700"/>
-          </a:xfrm>
-          <a:prstGeom prst="rect">
-            <a:avLst/>
-          </a:prstGeom>
-          <a:solidFill>
-            <a:srgbClr val="F0D9E5"/>
-          </a:solidFill>
-          <a:ln>
-            <a:noFill/>
-          </a:ln>
-          <a:effectLst/>
-        </p:spPr>
-        <p:style>
-          <a:lnRef idx="1">
-            <a:schemeClr val="accent1"/>
-          </a:lnRef>
-          <a:fillRef idx="3">
-            <a:schemeClr val="accent1"/>
-          </a:fillRef>
-          <a:effectRef idx="2">
-            <a:schemeClr val="accent1"/>
-          </a:effectRef>
-          <a:fontRef idx="minor">
-            <a:schemeClr val="lt1"/>
-          </a:fontRef>
-        </p:style>
-        <p:txBody>
-          <a:bodyPr rtlCol="0" anchor="ctr"/>
-          <a:lstStyle/>
-          <a:p>
-            <a:pPr algn="ctr"/>
-          </a:p>
-        </p:txBody>
-      </p:sp>
-      <p:sp>
-        <p:nvSpPr>
-          <p:cNvPr id="9" name="TextBox 8"/>
-          <p:cNvSpPr txBox="1"/>
-          <p:nvPr/>
-        </p:nvSpPr>
-        <p:spPr>
-          <a:xfrm>
-            <a:off x="1143000" y="3639312"/>
-            <a:ext cx="3291840" cy="457200"/>
-          </a:xfrm>
-          <a:prstGeom prst="rect">
-            <a:avLst/>
-          </a:prstGeom>
-          <a:noFill/>
-        </p:spPr>
-        <p:txBody>
-          <a:bodyPr wrap="square" anchor="t" lIns="0" rIns="0" tIns="0" bIns="0">
-            <a:spAutoFit/>
-          </a:bodyPr>
-          <a:lstStyle/>
-          <a:p>
-            <a:pPr algn="l">
-              <a:lnSpc>
-                <a:spcPct val="100000"/>
-              </a:lnSpc>
-              <a:spcBef>
-                <a:spcPts val="0"/>
-              </a:spcBef>
-              <a:spcAft>
-                <a:spcPts val="600"/>
-              </a:spcAft>
-            </a:pPr>
-            <a:r>
-              <a:rPr sz="1700" b="0" i="0">
-                <a:solidFill>
-                  <a:srgbClr val="26121D"/>
-                </a:solidFill>
-                <a:latin typeface="Segoe UI"/>
-              </a:rPr>
-              <a:t>Publicidad</a:t>
-            </a:r>
-          </a:p>
-        </p:txBody>
-      </p:sp>
-      <p:sp>
-        <p:nvSpPr>
-          <p:cNvPr id="10" name="TextBox 9"/>
-          <p:cNvSpPr txBox="1"/>
-          <p:nvPr/>
-        </p:nvSpPr>
-        <p:spPr>
-          <a:xfrm>
-            <a:off x="1143000" y="4005072"/>
-            <a:ext cx="3474720" cy="274320"/>
-          </a:xfrm>
-          <a:prstGeom prst="rect">
-            <a:avLst/>
-          </a:prstGeom>
-          <a:noFill/>
-        </p:spPr>
-        <p:txBody>
-          <a:bodyPr wrap="square" anchor="t" lIns="0" rIns="0" tIns="0" bIns="0">
-            <a:spAutoFit/>
-          </a:bodyPr>
-          <a:lstStyle/>
-          <a:p>
-            <a:pPr algn="l">
-              <a:lnSpc>
-                <a:spcPct val="100000"/>
-              </a:lnSpc>
-              <a:spcBef>
-                <a:spcPts val="0"/>
-              </a:spcBef>
-              <a:spcAft>
-                <a:spcPts val="600"/>
-              </a:spcAft>
-            </a:pPr>
-            <a:r>
-              <a:rPr sz="1100" b="0" i="0">
-                <a:solidFill>
-                  <a:srgbClr val="7A6570"/>
-                </a:solidFill>
-                <a:latin typeface="Segoe UI"/>
-              </a:rPr>
-              <a:t>la pagás vos, va directo a Facebook</a:t>
-            </a:r>
-          </a:p>
-        </p:txBody>
-      </p:sp>
-      <p:sp>
-        <p:nvSpPr>
-          <p:cNvPr id="11" name="TextBox 10"/>
-          <p:cNvSpPr txBox="1"/>
-          <p:nvPr/>
-        </p:nvSpPr>
-        <p:spPr>
-          <a:xfrm>
-            <a:off x="4572000" y="3639312"/>
-            <a:ext cx="1737360" cy="457200"/>
-          </a:xfrm>
-          <a:prstGeom prst="rect">
-            <a:avLst/>
-          </a:prstGeom>
-          <a:noFill/>
-        </p:spPr>
-        <p:txBody>
-          <a:bodyPr wrap="square" anchor="t" lIns="0" rIns="0" tIns="0" bIns="0">
-            <a:spAutoFit/>
-          </a:bodyPr>
-          <a:lstStyle/>
-          <a:p>
-            <a:pPr algn="r">
-              <a:lnSpc>
-                <a:spcPct val="100000"/>
-              </a:lnSpc>
-              <a:spcBef>
-                <a:spcPts val="0"/>
-              </a:spcBef>
-              <a:spcAft>
-                <a:spcPts val="600"/>
-              </a:spcAft>
-            </a:pPr>
-            <a:r>
-              <a:rPr sz="2400" b="1" i="0">
-                <a:solidFill>
-                  <a:srgbClr val="3B1329"/>
-                </a:solidFill>
-                <a:latin typeface="Georgia"/>
-              </a:rPr>
-              <a:t>$300.000</a:t>
-            </a:r>
-          </a:p>
-        </p:txBody>
-      </p:sp>
-      <p:sp>
-        <p:nvSpPr>
-          <p:cNvPr id="12" name="Rectangle 11"/>
-          <p:cNvSpPr/>
-          <p:nvPr/>
-        </p:nvSpPr>
-        <p:spPr>
-          <a:xfrm>
-            <a:off x="1143000" y="4389120"/>
-            <a:ext cx="5166360" cy="12700"/>
-          </a:xfrm>
-          <a:prstGeom prst="rect">
-            <a:avLst/>
-          </a:prstGeom>
-          <a:solidFill>
-            <a:srgbClr val="F0D9E5"/>
-          </a:solidFill>
-          <a:ln>
-            <a:noFill/>
-          </a:ln>
-          <a:effectLst/>
-        </p:spPr>
-        <p:style>
-          <a:lnRef idx="1">
-            <a:schemeClr val="accent1"/>
-          </a:lnRef>
-          <a:fillRef idx="3">
-            <a:schemeClr val="accent1"/>
-          </a:fillRef>
-          <a:effectRef idx="2">
-            <a:schemeClr val="accent1"/>
-          </a:effectRef>
-          <a:fontRef idx="minor">
-            <a:schemeClr val="lt1"/>
-          </a:fontRef>
-        </p:style>
-        <p:txBody>
-          <a:bodyPr rtlCol="0" anchor="ctr"/>
-          <a:lstStyle/>
-          <a:p>
-            <a:pPr algn="ctr"/>
-          </a:p>
-        </p:txBody>
-      </p:sp>
-      <p:sp>
-        <p:nvSpPr>
-          <p:cNvPr id="13" name="TextBox 12"/>
-          <p:cNvSpPr txBox="1"/>
-          <p:nvPr/>
-        </p:nvSpPr>
-        <p:spPr>
-          <a:xfrm>
-            <a:off x="1143000" y="4535424"/>
-            <a:ext cx="3291840" cy="457200"/>
-          </a:xfrm>
-          <a:prstGeom prst="rect">
-            <a:avLst/>
-          </a:prstGeom>
-          <a:noFill/>
-        </p:spPr>
-        <p:txBody>
-          <a:bodyPr wrap="square" anchor="t" lIns="0" rIns="0" tIns="0" bIns="0">
-            <a:spAutoFit/>
-          </a:bodyPr>
-          <a:lstStyle/>
-          <a:p>
-            <a:pPr algn="l">
-              <a:lnSpc>
-                <a:spcPct val="100000"/>
-              </a:lnSpc>
-              <a:spcBef>
-                <a:spcPts val="0"/>
-              </a:spcBef>
-              <a:spcAft>
-                <a:spcPts val="600"/>
-              </a:spcAft>
-            </a:pPr>
-            <a:r>
-              <a:rPr sz="1700" b="0" i="0">
-                <a:solidFill>
-                  <a:srgbClr val="26121D"/>
-                </a:solidFill>
-                <a:latin typeface="Segoe UI"/>
-              </a:rPr>
-              <a:t>Comisión sobre operaciones</a:t>
-            </a:r>
-          </a:p>
-        </p:txBody>
-      </p:sp>
-      <p:sp>
-        <p:nvSpPr>
-          <p:cNvPr id="14" name="TextBox 13"/>
-          <p:cNvSpPr txBox="1"/>
-          <p:nvPr/>
-        </p:nvSpPr>
-        <p:spPr>
-          <a:xfrm>
-            <a:off x="1143000" y="4901184"/>
-            <a:ext cx="3474720" cy="274320"/>
-          </a:xfrm>
-          <a:prstGeom prst="rect">
-            <a:avLst/>
-          </a:prstGeom>
-          <a:noFill/>
-        </p:spPr>
-        <p:txBody>
-          <a:bodyPr wrap="square" anchor="t" lIns="0" rIns="0" tIns="0" bIns="0">
-            <a:spAutoFit/>
-          </a:bodyPr>
-          <a:lstStyle/>
-          <a:p>
-            <a:pPr algn="l">
-              <a:lnSpc>
-                <a:spcPct val="100000"/>
-              </a:lnSpc>
-              <a:spcBef>
-                <a:spcPts val="0"/>
-              </a:spcBef>
-              <a:spcAft>
-                <a:spcPts val="600"/>
-              </a:spcAft>
-            </a:pPr>
-            <a:r>
-              <a:rPr sz="1100" b="0" i="0">
-                <a:solidFill>
-                  <a:srgbClr val="7A6570"/>
-                </a:solidFill>
-                <a:latin typeface="Segoe UI"/>
-              </a:rPr>
-              <a:t>solo de las que salen de este trabajo</a:t>
-            </a:r>
-          </a:p>
-        </p:txBody>
-      </p:sp>
-      <p:sp>
-        <p:nvSpPr>
-          <p:cNvPr id="15" name="TextBox 14"/>
-          <p:cNvSpPr txBox="1"/>
-          <p:nvPr/>
-        </p:nvSpPr>
-        <p:spPr>
-          <a:xfrm>
-            <a:off x="4572000" y="4535424"/>
-            <a:ext cx="1737360" cy="457200"/>
-          </a:xfrm>
-          <a:prstGeom prst="rect">
-            <a:avLst/>
-          </a:prstGeom>
-          <a:noFill/>
-        </p:spPr>
-        <p:txBody>
-          <a:bodyPr wrap="square" anchor="t" lIns="0" rIns="0" tIns="0" bIns="0">
-            <a:spAutoFit/>
-          </a:bodyPr>
-          <a:lstStyle/>
-          <a:p>
-            <a:pPr algn="r">
-              <a:lnSpc>
-                <a:spcPct val="100000"/>
-              </a:lnSpc>
-              <a:spcBef>
-                <a:spcPts val="0"/>
-              </a:spcBef>
-              <a:spcAft>
-                <a:spcPts val="600"/>
-              </a:spcAft>
-            </a:pPr>
-            <a:r>
-              <a:rPr sz="2400" b="1" i="0">
-                <a:solidFill>
-                  <a:srgbClr val="B02467"/>
-                </a:solidFill>
-                <a:latin typeface="Georgia"/>
-              </a:rPr>
-              <a:t>10%</a:t>
-            </a:r>
-          </a:p>
-        </p:txBody>
-      </p:sp>
-      <p:sp>
-        <p:nvSpPr>
-          <p:cNvPr id="16" name="TextBox 15"/>
-          <p:cNvSpPr txBox="1"/>
-          <p:nvPr/>
-        </p:nvSpPr>
-        <p:spPr>
-          <a:xfrm>
-            <a:off x="7040880" y="2606040"/>
-            <a:ext cx="4297680" cy="1097280"/>
-          </a:xfrm>
-          <a:prstGeom prst="rect">
-            <a:avLst/>
-          </a:prstGeom>
-          <a:noFill/>
-        </p:spPr>
-        <p:txBody>
-          <a:bodyPr wrap="square" anchor="t" lIns="0" rIns="0" tIns="0" bIns="0">
-            <a:spAutoFit/>
-          </a:bodyPr>
-          <a:lstStyle/>
-          <a:p>
-            <a:pPr algn="l">
-              <a:lnSpc>
-                <a:spcPct val="112000"/>
-              </a:lnSpc>
-              <a:spcBef>
-                <a:spcPts val="0"/>
-              </a:spcBef>
-              <a:spcAft>
-                <a:spcPts val="600"/>
-              </a:spcAft>
-            </a:pPr>
-            <a:r>
-              <a:rPr sz="2900" b="0" i="0">
-                <a:solidFill>
-                  <a:srgbClr val="3B1329"/>
-                </a:solidFill>
-                <a:latin typeface="Georgia"/>
-              </a:rPr>
-              <a:t>Una sola operación cubre meses de trabajo.</a:t>
-            </a:r>
-          </a:p>
-        </p:txBody>
-      </p:sp>
-      <p:sp>
-        <p:nvSpPr>
-          <p:cNvPr id="17" name="TextBox 16"/>
-          <p:cNvSpPr txBox="1"/>
-          <p:nvPr/>
-        </p:nvSpPr>
-        <p:spPr>
-          <a:xfrm>
-            <a:off x="7040880" y="3794760"/>
-            <a:ext cx="4297680" cy="914400"/>
-          </a:xfrm>
-          <a:prstGeom prst="rect">
-            <a:avLst/>
-          </a:prstGeom>
-          <a:noFill/>
-        </p:spPr>
-        <p:txBody>
-          <a:bodyPr wrap="square" anchor="t" lIns="0" rIns="0" tIns="0" bIns="0">
-            <a:spAutoFit/>
-          </a:bodyPr>
-          <a:lstStyle/>
-          <a:p>
-            <a:pPr algn="l">
-              <a:lnSpc>
-                <a:spcPct val="125000"/>
-              </a:lnSpc>
-              <a:spcBef>
-                <a:spcPts val="0"/>
-              </a:spcBef>
-              <a:spcAft>
-                <a:spcPts val="600"/>
-              </a:spcAft>
-            </a:pPr>
-            <a:r>
-              <a:rPr sz="1500" b="0" i="0">
-                <a:solidFill>
-                  <a:srgbClr val="7A6570"/>
-                </a:solidFill>
-                <a:latin typeface="Segoe UI"/>
-              </a:rPr>
-              <a:t>El 10% se cobra únicamente sobre las ventas y alquileres de clientes que llegan por este sistema.</a:t>
-            </a:r>
-          </a:p>
-        </p:txBody>
-      </p:sp>
-      <p:sp>
-        <p:nvSpPr>
-          <p:cNvPr id="18" name="Rectangle 17"/>
-          <p:cNvSpPr/>
-          <p:nvPr/>
-        </p:nvSpPr>
-        <p:spPr>
-          <a:xfrm>
-            <a:off x="7040880" y="4754880"/>
-            <a:ext cx="4114800" cy="12700"/>
-          </a:xfrm>
-          <a:prstGeom prst="rect">
-            <a:avLst/>
-          </a:prstGeom>
-          <a:solidFill>
-            <a:srgbClr val="F0D9E5"/>
-          </a:solidFill>
-          <a:ln>
-            <a:noFill/>
-          </a:ln>
-          <a:effectLst/>
-        </p:spPr>
-        <p:style>
-          <a:lnRef idx="1">
-            <a:schemeClr val="accent1"/>
-          </a:lnRef>
-          <a:fillRef idx="3">
-            <a:schemeClr val="accent1"/>
-          </a:fillRef>
-          <a:effectRef idx="2">
-            <a:schemeClr val="accent1"/>
-          </a:effectRef>
-          <a:fontRef idx="minor">
-            <a:schemeClr val="lt1"/>
-          </a:fontRef>
-        </p:style>
-        <p:txBody>
-          <a:bodyPr rtlCol="0" anchor="ctr"/>
-          <a:lstStyle/>
-          <a:p>
-            <a:pPr algn="ctr"/>
-          </a:p>
-        </p:txBody>
-      </p:sp>
-      <p:sp>
-        <p:nvSpPr>
-          <p:cNvPr id="19" name="TextBox 18"/>
-          <p:cNvSpPr txBox="1"/>
-          <p:nvPr/>
-        </p:nvSpPr>
-        <p:spPr>
-          <a:xfrm>
-            <a:off x="7040880" y="4892040"/>
-            <a:ext cx="4297680" cy="731520"/>
-          </a:xfrm>
-          <a:prstGeom prst="rect">
-            <a:avLst/>
-          </a:prstGeom>
-          <a:noFill/>
-        </p:spPr>
-        <p:txBody>
-          <a:bodyPr wrap="square" anchor="t" lIns="0" rIns="0" tIns="0" bIns="0">
-            <a:spAutoFit/>
-          </a:bodyPr>
-          <a:lstStyle/>
-          <a:p>
-            <a:pPr algn="l">
-              <a:lnSpc>
-                <a:spcPct val="120000"/>
-              </a:lnSpc>
-              <a:spcBef>
-                <a:spcPts val="0"/>
-              </a:spcBef>
-              <a:spcAft>
-                <a:spcPts val="600"/>
-              </a:spcAft>
-            </a:pPr>
-            <a:r>
-              <a:rPr sz="1400" b="1" i="0">
-                <a:solidFill>
-                  <a:srgbClr val="B02467"/>
-                </a:solidFill>
-                <a:latin typeface="Segoe UI"/>
-              </a:rPr>
-              <a:t>Otra opción: </a:t>
-            </a:r>
-            <a:r>
-              <a:rPr sz="1400" b="0" i="0">
-                <a:solidFill>
-                  <a:srgbClr val="7A6570"/>
-                </a:solidFill>
-                <a:latin typeface="Segoe UI"/>
-              </a:rPr>
-              <a:t>$300.000 de honorario + 15% sobre esas operaciones.</a:t>
-            </a:r>
-          </a:p>
-        </p:txBody>
-      </p:sp>
-      <p:sp>
-        <p:nvSpPr>
-          <p:cNvPr id="20" name="Rectangle 19"/>
-          <p:cNvSpPr/>
-          <p:nvPr/>
-        </p:nvSpPr>
-        <p:spPr>
-          <a:xfrm>
-            <a:off x="822960" y="6355080"/>
-            <a:ext cx="10543032" cy="12700"/>
-          </a:xfrm>
-          <a:prstGeom prst="rect">
-            <a:avLst/>
-          </a:prstGeom>
-          <a:solidFill>
-            <a:srgbClr val="F0D9E5"/>
-          </a:solidFill>
-          <a:ln>
-            <a:noFill/>
-          </a:ln>
-          <a:effectLst/>
-        </p:spPr>
-        <p:style>
-          <a:lnRef idx="1">
-            <a:schemeClr val="accent1"/>
-          </a:lnRef>
-          <a:fillRef idx="3">
-            <a:schemeClr val="accent1"/>
-          </a:fillRef>
-          <a:effectRef idx="2">
-            <a:schemeClr val="accent1"/>
-          </a:effectRef>
-          <a:fontRef idx="minor">
-            <a:schemeClr val="lt1"/>
-          </a:fontRef>
-        </p:style>
-        <p:txBody>
-          <a:bodyPr rtlCol="0" anchor="ctr"/>
-          <a:lstStyle/>
-          <a:p>
-            <a:pPr algn="ctr"/>
-          </a:p>
-        </p:txBody>
-      </p:sp>
-      <p:sp>
-        <p:nvSpPr>
-          <p:cNvPr id="21" name="TextBox 20"/>
-          <p:cNvSpPr txBox="1"/>
-          <p:nvPr/>
-        </p:nvSpPr>
-        <p:spPr>
-          <a:xfrm>
-            <a:off x="822960" y="6419088"/>
-            <a:ext cx="3657600" cy="274320"/>
-          </a:xfrm>
-          <a:prstGeom prst="rect">
-            <a:avLst/>
-          </a:prstGeom>
-          <a:noFill/>
-        </p:spPr>
-        <p:txBody>
-          <a:bodyPr wrap="square" anchor="t" lIns="0" rIns="0" tIns="0" bIns="0">
-            <a:spAutoFit/>
-          </a:bodyPr>
-          <a:lstStyle/>
-          <a:p>
-            <a:pPr algn="l">
-              <a:lnSpc>
-                <a:spcPct val="100000"/>
-              </a:lnSpc>
-              <a:spcBef>
-                <a:spcPts val="0"/>
-              </a:spcBef>
-              <a:spcAft>
-                <a:spcPts val="600"/>
-              </a:spcAft>
-            </a:pPr>
-            <a:r>
-              <a:rPr sz="900" b="1" i="0" spc="120">
-                <a:solidFill>
-                  <a:srgbClr val="3B1329"/>
-                </a:solidFill>
-                <a:latin typeface="Segoe UI"/>
-              </a:rPr>
-              <a:t>SANTINO MARCONI</a:t>
-            </a:r>
-          </a:p>
-        </p:txBody>
-      </p:sp>
-      <p:sp>
-        <p:nvSpPr>
-          <p:cNvPr id="22" name="TextBox 21"/>
-          <p:cNvSpPr txBox="1"/>
-          <p:nvPr/>
-        </p:nvSpPr>
-        <p:spPr>
-          <a:xfrm>
-            <a:off x="4114800" y="6419088"/>
-            <a:ext cx="3959352" cy="274320"/>
-          </a:xfrm>
-          <a:prstGeom prst="rect">
-            <a:avLst/>
-          </a:prstGeom>
-          <a:noFill/>
-        </p:spPr>
-        <p:txBody>
-          <a:bodyPr wrap="square" anchor="t" lIns="0" rIns="0" tIns="0" bIns="0">
-            <a:spAutoFit/>
-          </a:bodyPr>
-          <a:lstStyle/>
-          <a:p>
-            <a:pPr algn="ctr">
-              <a:lnSpc>
-                <a:spcPct val="100000"/>
-              </a:lnSpc>
-              <a:spcBef>
-                <a:spcPts val="0"/>
-              </a:spcBef>
-              <a:spcAft>
-                <a:spcPts val="600"/>
-              </a:spcAft>
-            </a:pPr>
-            <a:r>
-              <a:rPr sz="900" b="0" i="0" spc="120">
-                <a:solidFill>
-                  <a:srgbClr val="7A6570"/>
-                </a:solidFill>
-                <a:latin typeface="Segoe UI"/>
-              </a:rPr>
-              <a:t>COMPROMISO INICIAL DE 90 DÍAS</a:t>
-            </a:r>
-          </a:p>
-        </p:txBody>
-      </p:sp>
-      <p:sp>
-        <p:nvSpPr>
-          <p:cNvPr id="23" name="TextBox 22"/>
-          <p:cNvSpPr txBox="1"/>
-          <p:nvPr/>
-        </p:nvSpPr>
-        <p:spPr>
-          <a:xfrm>
-            <a:off x="8686800" y="6419088"/>
-            <a:ext cx="2679192" cy="274320"/>
-          </a:xfrm>
-          <a:prstGeom prst="rect">
-            <a:avLst/>
-          </a:prstGeom>
-          <a:noFill/>
-        </p:spPr>
-        <p:txBody>
-          <a:bodyPr wrap="square" anchor="t" lIns="0" rIns="0" tIns="0" bIns="0">
-            <a:spAutoFit/>
-          </a:bodyPr>
-          <a:lstStyle/>
-          <a:p>
-            <a:pPr algn="r">
-              <a:lnSpc>
-                <a:spcPct val="100000"/>
-              </a:lnSpc>
-              <a:spcBef>
-                <a:spcPts val="0"/>
-              </a:spcBef>
-              <a:spcAft>
-                <a:spcPts val="600"/>
-              </a:spcAft>
-            </a:pPr>
-            <a:r>
-              <a:rPr sz="900" b="0" i="0" spc="120">
-                <a:solidFill>
-                  <a:srgbClr val="7A6570"/>
-                </a:solidFill>
-                <a:latin typeface="Segoe UI"/>
-              </a:rPr>
-              <a:t>9 / 12</a:t>
+              <a:t>9 / 11</a:t>
             </a:r>
           </a:p>
         </p:txBody>
